--- a/00 Admin/06 Presentations/JP_TapThat_WhereYouAre_v01.pptx
+++ b/00 Admin/06 Presentations/JP_TapThat_WhereYouAre_v01.pptx
@@ -3499,7 +3499,7 @@
                 </a:solidFill>
                 <a:latin typeface="Poppins"/>
               </a:rPr>
-              <a:t>WHAT WE NEED FROM YOU</a:t>
+              <a:t>WHAT WE NEED FROM YOU · SIX OF EIGHT DECISIONS</a:t>
             </a:r>
           </a:p>
         </p:txBody>
@@ -3538,7 +3538,7 @@
                 </a:solidFill>
                 <a:latin typeface="Poppins"/>
               </a:rPr>
-              <a:t>Six decisions. None of them need research.</a:t>
+              <a:t>The six decisions that most change the plan.</a:t>
             </a:r>
           </a:p>
         </p:txBody>

--- a/00 Admin/06 Presentations/JP_TapThat_WhereYouAre_v01.pptx
+++ b/00 Admin/06 Presentations/JP_TapThat_WhereYouAre_v01.pptx
@@ -18,6 +18,9 @@
     <p:sldId id="266" r:id="rId17"/>
     <p:sldId id="267" r:id="rId18"/>
     <p:sldId id="268" r:id="rId19"/>
+    <p:sldId id="269" r:id="rId20"/>
+    <p:sldId id="270" r:id="rId21"/>
+    <p:sldId id="271" r:id="rId22"/>
   </p:sldIdLst>
   <p:sldSz cx="12191695" cy="6858000" type="screen4x3"/>
   <p:notesSz cx="6858000" cy="9144000"/>
@@ -3340,7 +3343,7 @@
                 </a:solidFill>
                 <a:latin typeface="Poppins"/>
               </a:rPr>
-              <a:t>AND ONE WE HAVE RANKED BELOW THEM</a:t>
+              <a:t>MOVE 03</a:t>
             </a:r>
           </a:p>
         </p:txBody>
@@ -3379,7 +3382,7 @@
                 </a:solidFill>
                 <a:latin typeface="Poppins"/>
               </a:rPr>
-              <a:t>Pulling people into the taproom</a:t>
+              <a:t>Go at the tour operators, and run</a:t>
             </a:r>
           </a:p>
           <a:p>
@@ -3395,7 +3398,7 @@
                 </a:solidFill>
                 <a:latin typeface="Poppins"/>
               </a:rPr>
-              <a:t>through social media.</a:t>
+              <a:t>wholesale properly.</a:t>
             </a:r>
           </a:p>
         </p:txBody>
@@ -3434,7 +3437,7 @@
                 </a:solidFill>
                 <a:latin typeface="Poppins"/>
               </a:rPr>
-              <a:t>That was close to the centre of the plan we wrote for you. On this read it should not be. If the taproom is the half that loses money, spending the marketing budget filling it is the wrong instinct, however good the content is.</a:t>
+              <a:t>Hop On, Urban Legends and Pineapple Tours all let the customer choose which breweries to visit. So your write up decides whether you get picked, and yours does not mention Midnight in Tokyo while Balter gets the imagery. On wholesale, one commercial account is worth about ten households, and it currently has no structure, no targets and nobody carrying it.</a:t>
             </a:r>
           </a:p>
         </p:txBody>
@@ -3499,7 +3502,7 @@
                 </a:solidFill>
                 <a:latin typeface="Poppins"/>
               </a:rPr>
-              <a:t>WHAT WE NEED FROM YOU · SIX OF EIGHT DECISIONS</a:t>
+              <a:t>AND ONE WE HAVE RANKED BELOW THEM</a:t>
             </a:r>
           </a:p>
         </p:txBody>
@@ -3538,724 +3541,66 @@
                 </a:solidFill>
                 <a:latin typeface="Poppins"/>
               </a:rPr>
-              <a:t>The six decisions that most change the plan.</a:t>
-            </a:r>
-          </a:p>
-        </p:txBody>
-      </p:sp>
-      <p:cxnSp>
-        <p:nvCxnSpPr>
-          <p:cNvPr id="4" name="Connector 3"/>
-          <p:cNvCxnSpPr/>
-          <p:nvPr/>
-        </p:nvCxnSpPr>
-        <p:spPr>
-          <a:xfrm>
-            <a:off x="914400" y="2514600"/>
-            <a:ext cx="10332720" cy="0"/>
-          </a:xfrm>
-          <a:prstGeom prst="line">
-            <a:avLst/>
-          </a:prstGeom>
-          <a:ln w="9525">
-            <a:solidFill>
-              <a:srgbClr val="EDEBEA"/>
-            </a:solidFill>
-          </a:ln>
-        </p:spPr>
-        <p:style>
-          <a:lnRef idx="2">
-            <a:schemeClr val="accent1"/>
-          </a:lnRef>
-          <a:fillRef idx="0">
-            <a:schemeClr val="accent1"/>
-          </a:fillRef>
-          <a:effectRef idx="1">
-            <a:schemeClr val="accent1"/>
-          </a:effectRef>
-          <a:fontRef idx="minor">
-            <a:schemeClr val="tx1"/>
-          </a:fontRef>
-        </p:style>
-      </p:cxnSp>
-      <p:sp>
-        <p:nvSpPr>
-          <p:cNvPr id="5" name="TextBox 4"/>
-          <p:cNvSpPr txBox="1"/>
-          <p:nvPr/>
-        </p:nvSpPr>
-        <p:spPr>
-          <a:xfrm>
-            <a:off x="914400" y="2642616"/>
-            <a:ext cx="2834640" cy="566928"/>
-          </a:xfrm>
-          <a:prstGeom prst="rect">
-            <a:avLst/>
-          </a:prstGeom>
-          <a:noFill/>
-        </p:spPr>
-        <p:txBody>
-          <a:bodyPr wrap="square" lIns="0" rIns="0" tIns="0" bIns="0" anchor="t">
-            <a:spAutoFit/>
-          </a:bodyPr>
-          <a:lstStyle/>
-          <a:p>
-            <a:pPr algn="l">
-              <a:lnSpc>
-                <a:spcPct val="130000"/>
-              </a:lnSpc>
-            </a:pPr>
-            <a:r>
-              <a:rPr sz="1300" b="1">
+              <a:t>Pulling people into the taproom</a:t>
+            </a:r>
+          </a:p>
+          <a:p>
+            <a:pPr algn="l">
+              <a:lnSpc>
+                <a:spcPct val="112000"/>
+              </a:lnSpc>
+            </a:pPr>
+            <a:r>
+              <a:rPr sz="3800" b="0">
                 <a:solidFill>
                   <a:srgbClr val="111111"/>
                 </a:solidFill>
                 <a:latin typeface="Poppins"/>
               </a:rPr>
-              <a:t>The taproom</a:t>
-            </a:r>
-          </a:p>
-        </p:txBody>
-      </p:sp>
-      <p:sp>
-        <p:nvSpPr>
-          <p:cNvPr id="6" name="TextBox 5"/>
-          <p:cNvSpPr txBox="1"/>
-          <p:nvPr/>
-        </p:nvSpPr>
-        <p:spPr>
-          <a:xfrm>
-            <a:off x="4023360" y="2642616"/>
-            <a:ext cx="7223760" cy="566928"/>
-          </a:xfrm>
-          <a:prstGeom prst="rect">
-            <a:avLst/>
-          </a:prstGeom>
-          <a:noFill/>
-        </p:spPr>
-        <p:txBody>
-          <a:bodyPr wrap="square" lIns="0" rIns="0" tIns="0" bIns="0" anchor="t">
-            <a:spAutoFit/>
-          </a:bodyPr>
-          <a:lstStyle/>
-          <a:p>
-            <a:pPr algn="l">
-              <a:lnSpc>
-                <a:spcPct val="138000"/>
-              </a:lnSpc>
-            </a:pPr>
-            <a:r>
-              <a:rPr sz="1300" b="0">
-                <a:solidFill>
-                  <a:srgbClr val="666666"/>
-                </a:solidFill>
-                <a:latin typeface="Poppins"/>
-              </a:rPr>
-              <a:t>Tasting and event venue, or keep paying for a drop in.</a:t>
-            </a:r>
-          </a:p>
-        </p:txBody>
-      </p:sp>
-      <p:cxnSp>
-        <p:nvCxnSpPr>
-          <p:cNvPr id="7" name="Connector 6"/>
-          <p:cNvCxnSpPr/>
-          <p:nvPr/>
-        </p:nvCxnSpPr>
-        <p:spPr>
-          <a:xfrm>
-            <a:off x="914400" y="3136392"/>
-            <a:ext cx="10332720" cy="0"/>
-          </a:xfrm>
-          <a:prstGeom prst="line">
-            <a:avLst/>
-          </a:prstGeom>
-          <a:ln w="9525">
-            <a:solidFill>
-              <a:srgbClr val="EDEBEA"/>
-            </a:solidFill>
-          </a:ln>
-        </p:spPr>
-        <p:style>
-          <a:lnRef idx="2">
-            <a:schemeClr val="accent1"/>
-          </a:lnRef>
-          <a:fillRef idx="0">
-            <a:schemeClr val="accent1"/>
-          </a:fillRef>
-          <a:effectRef idx="1">
-            <a:schemeClr val="accent1"/>
-          </a:effectRef>
-          <a:fontRef idx="minor">
-            <a:schemeClr val="tx1"/>
-          </a:fontRef>
-        </p:style>
-      </p:cxnSp>
-      <p:sp>
-        <p:nvSpPr>
-          <p:cNvPr id="8" name="TextBox 7"/>
-          <p:cNvSpPr txBox="1"/>
-          <p:nvPr/>
-        </p:nvSpPr>
-        <p:spPr>
-          <a:xfrm>
-            <a:off x="914400" y="3264408"/>
-            <a:ext cx="2834640" cy="566928"/>
-          </a:xfrm>
-          <a:prstGeom prst="rect">
-            <a:avLst/>
-          </a:prstGeom>
-          <a:noFill/>
-        </p:spPr>
-        <p:txBody>
-          <a:bodyPr wrap="square" lIns="0" rIns="0" tIns="0" bIns="0" anchor="t">
-            <a:spAutoFit/>
-          </a:bodyPr>
-          <a:lstStyle/>
-          <a:p>
-            <a:pPr algn="l">
-              <a:lnSpc>
-                <a:spcPct val="130000"/>
-              </a:lnSpc>
-            </a:pPr>
-            <a:r>
-              <a:rPr sz="1300" b="1">
+              <a:t>through social media.</a:t>
+            </a:r>
+          </a:p>
+        </p:txBody>
+      </p:sp>
+      <p:sp>
+        <p:nvSpPr>
+          <p:cNvPr id="4" name="TextBox 3"/>
+          <p:cNvSpPr txBox="1"/>
+          <p:nvPr/>
+        </p:nvSpPr>
+        <p:spPr>
+          <a:xfrm>
+            <a:off x="914400" y="4114800"/>
+            <a:ext cx="9144000" cy="2194560"/>
+          </a:xfrm>
+          <a:prstGeom prst="rect">
+            <a:avLst/>
+          </a:prstGeom>
+          <a:noFill/>
+        </p:spPr>
+        <p:txBody>
+          <a:bodyPr wrap="square" lIns="0" rIns="0" tIns="0" bIns="0" anchor="t">
+            <a:spAutoFit/>
+          </a:bodyPr>
+          <a:lstStyle/>
+          <a:p>
+            <a:pPr algn="l">
+              <a:lnSpc>
+                <a:spcPct val="155000"/>
+              </a:lnSpc>
+            </a:pPr>
+            <a:r>
+              <a:rPr sz="1400" b="0">
                 <a:solidFill>
                   <a:srgbClr val="111111"/>
                 </a:solidFill>
                 <a:latin typeface="Poppins"/>
               </a:rPr>
-              <a:t>The range</a:t>
-            </a:r>
-          </a:p>
-        </p:txBody>
-      </p:sp>
-      <p:sp>
-        <p:nvSpPr>
-          <p:cNvPr id="9" name="TextBox 8"/>
-          <p:cNvSpPr txBox="1"/>
-          <p:nvPr/>
-        </p:nvSpPr>
-        <p:spPr>
-          <a:xfrm>
-            <a:off x="4023360" y="3264408"/>
-            <a:ext cx="7223760" cy="566928"/>
-          </a:xfrm>
-          <a:prstGeom prst="rect">
-            <a:avLst/>
-          </a:prstGeom>
-          <a:noFill/>
-        </p:spPr>
-        <p:txBody>
-          <a:bodyPr wrap="square" lIns="0" rIns="0" tIns="0" bIns="0" anchor="t">
-            <a:spAutoFit/>
-          </a:bodyPr>
-          <a:lstStyle/>
-          <a:p>
-            <a:pPr algn="l">
-              <a:lnSpc>
-                <a:spcPct val="138000"/>
-              </a:lnSpc>
-            </a:pPr>
-            <a:r>
-              <a:rPr sz="1300" b="0">
-                <a:solidFill>
-                  <a:srgbClr val="666666"/>
-                </a:solidFill>
-                <a:latin typeface="Poppins"/>
-              </a:rPr>
-              <a:t>Six core beers, or twenty seven taps.</a:t>
-            </a:r>
-          </a:p>
-        </p:txBody>
-      </p:sp>
-      <p:cxnSp>
-        <p:nvCxnSpPr>
-          <p:cNvPr id="10" name="Connector 9"/>
-          <p:cNvCxnSpPr/>
-          <p:nvPr/>
-        </p:nvCxnSpPr>
-        <p:spPr>
-          <a:xfrm>
-            <a:off x="914400" y="3758184"/>
-            <a:ext cx="10332720" cy="0"/>
-          </a:xfrm>
-          <a:prstGeom prst="line">
-            <a:avLst/>
-          </a:prstGeom>
-          <a:ln w="9525">
-            <a:solidFill>
-              <a:srgbClr val="EDEBEA"/>
-            </a:solidFill>
-          </a:ln>
-        </p:spPr>
-        <p:style>
-          <a:lnRef idx="2">
-            <a:schemeClr val="accent1"/>
-          </a:lnRef>
-          <a:fillRef idx="0">
-            <a:schemeClr val="accent1"/>
-          </a:fillRef>
-          <a:effectRef idx="1">
-            <a:schemeClr val="accent1"/>
-          </a:effectRef>
-          <a:fontRef idx="minor">
-            <a:schemeClr val="tx1"/>
-          </a:fontRef>
-        </p:style>
-      </p:cxnSp>
-      <p:sp>
-        <p:nvSpPr>
-          <p:cNvPr id="11" name="TextBox 10"/>
-          <p:cNvSpPr txBox="1"/>
-          <p:nvPr/>
-        </p:nvSpPr>
-        <p:spPr>
-          <a:xfrm>
-            <a:off x="914400" y="3886200"/>
-            <a:ext cx="2834640" cy="566928"/>
-          </a:xfrm>
-          <a:prstGeom prst="rect">
-            <a:avLst/>
-          </a:prstGeom>
-          <a:noFill/>
-        </p:spPr>
-        <p:txBody>
-          <a:bodyPr wrap="square" lIns="0" rIns="0" tIns="0" bIns="0" anchor="t">
-            <a:spAutoFit/>
-          </a:bodyPr>
-          <a:lstStyle/>
-          <a:p>
-            <a:pPr algn="l">
-              <a:lnSpc>
-                <a:spcPct val="130000"/>
-              </a:lnSpc>
-            </a:pPr>
-            <a:r>
-              <a:rPr sz="1300" b="1">
-                <a:solidFill>
-                  <a:srgbClr val="111111"/>
-                </a:solidFill>
-                <a:latin typeface="Poppins"/>
-              </a:rPr>
-              <a:t>Membership price</a:t>
-            </a:r>
-          </a:p>
-        </p:txBody>
-      </p:sp>
-      <p:sp>
-        <p:nvSpPr>
-          <p:cNvPr id="12" name="TextBox 11"/>
-          <p:cNvSpPr txBox="1"/>
-          <p:nvPr/>
-        </p:nvSpPr>
-        <p:spPr>
-          <a:xfrm>
-            <a:off x="4023360" y="3886200"/>
-            <a:ext cx="7223760" cy="566928"/>
-          </a:xfrm>
-          <a:prstGeom prst="rect">
-            <a:avLst/>
-          </a:prstGeom>
-          <a:noFill/>
-        </p:spPr>
-        <p:txBody>
-          <a:bodyPr wrap="square" lIns="0" rIns="0" tIns="0" bIns="0" anchor="t">
-            <a:spAutoFit/>
-          </a:bodyPr>
-          <a:lstStyle/>
-          <a:p>
-            <a:pPr algn="l">
-              <a:lnSpc>
-                <a:spcPct val="138000"/>
-              </a:lnSpc>
-            </a:pPr>
-            <a:r>
-              <a:rPr sz="1300" b="0">
-                <a:solidFill>
-                  <a:srgbClr val="666666"/>
-                </a:solidFill>
-                <a:latin typeface="Poppins"/>
-              </a:rPr>
-              <a:t>Two posters, two prices, both live in your venue today.</a:t>
-            </a:r>
-          </a:p>
-        </p:txBody>
-      </p:sp>
-      <p:cxnSp>
-        <p:nvCxnSpPr>
-          <p:cNvPr id="13" name="Connector 12"/>
-          <p:cNvCxnSpPr/>
-          <p:nvPr/>
-        </p:nvCxnSpPr>
-        <p:spPr>
-          <a:xfrm>
-            <a:off x="914400" y="4379976"/>
-            <a:ext cx="10332720" cy="0"/>
-          </a:xfrm>
-          <a:prstGeom prst="line">
-            <a:avLst/>
-          </a:prstGeom>
-          <a:ln w="9525">
-            <a:solidFill>
-              <a:srgbClr val="EDEBEA"/>
-            </a:solidFill>
-          </a:ln>
-        </p:spPr>
-        <p:style>
-          <a:lnRef idx="2">
-            <a:schemeClr val="accent1"/>
-          </a:lnRef>
-          <a:fillRef idx="0">
-            <a:schemeClr val="accent1"/>
-          </a:fillRef>
-          <a:effectRef idx="1">
-            <a:schemeClr val="accent1"/>
-          </a:effectRef>
-          <a:fontRef idx="minor">
-            <a:schemeClr val="tx1"/>
-          </a:fontRef>
-        </p:style>
-      </p:cxnSp>
-      <p:sp>
-        <p:nvSpPr>
-          <p:cNvPr id="14" name="TextBox 13"/>
-          <p:cNvSpPr txBox="1"/>
-          <p:nvPr/>
-        </p:nvSpPr>
-        <p:spPr>
-          <a:xfrm>
-            <a:off x="914400" y="4507992"/>
-            <a:ext cx="2834640" cy="566928"/>
-          </a:xfrm>
-          <a:prstGeom prst="rect">
-            <a:avLst/>
-          </a:prstGeom>
-          <a:noFill/>
-        </p:spPr>
-        <p:txBody>
-          <a:bodyPr wrap="square" lIns="0" rIns="0" tIns="0" bIns="0" anchor="t">
-            <a:spAutoFit/>
-          </a:bodyPr>
-          <a:lstStyle/>
-          <a:p>
-            <a:pPr algn="l">
-              <a:lnSpc>
-                <a:spcPct val="130000"/>
-              </a:lnSpc>
-            </a:pPr>
-            <a:r>
-              <a:rPr sz="1300" b="1">
-                <a:solidFill>
-                  <a:srgbClr val="111111"/>
-                </a:solidFill>
-                <a:latin typeface="Poppins"/>
-              </a:rPr>
-              <a:t>Active customer</a:t>
-            </a:r>
-          </a:p>
-        </p:txBody>
-      </p:sp>
-      <p:sp>
-        <p:nvSpPr>
-          <p:cNvPr id="15" name="TextBox 14"/>
-          <p:cNvSpPr txBox="1"/>
-          <p:nvPr/>
-        </p:nvSpPr>
-        <p:spPr>
-          <a:xfrm>
-            <a:off x="4023360" y="4507992"/>
-            <a:ext cx="7223760" cy="566928"/>
-          </a:xfrm>
-          <a:prstGeom prst="rect">
-            <a:avLst/>
-          </a:prstGeom>
-          <a:noFill/>
-        </p:spPr>
-        <p:txBody>
-          <a:bodyPr wrap="square" lIns="0" rIns="0" tIns="0" bIns="0" anchor="t">
-            <a:spAutoFit/>
-          </a:bodyPr>
-          <a:lstStyle/>
-          <a:p>
-            <a:pPr algn="l">
-              <a:lnSpc>
-                <a:spcPct val="138000"/>
-              </a:lnSpc>
-            </a:pPr>
-            <a:r>
-              <a:rPr sz="1300" b="0">
-                <a:solidFill>
-                  <a:srgbClr val="666666"/>
-                </a:solidFill>
-                <a:latin typeface="Poppins"/>
-              </a:rPr>
-              <a:t>Forty five, seventy five or ninety days. It decides every number we report.</a:t>
-            </a:r>
-          </a:p>
-        </p:txBody>
-      </p:sp>
-      <p:cxnSp>
-        <p:nvCxnSpPr>
-          <p:cNvPr id="16" name="Connector 15"/>
-          <p:cNvCxnSpPr/>
-          <p:nvPr/>
-        </p:nvCxnSpPr>
-        <p:spPr>
-          <a:xfrm>
-            <a:off x="914400" y="5001768"/>
-            <a:ext cx="10332720" cy="0"/>
-          </a:xfrm>
-          <a:prstGeom prst="line">
-            <a:avLst/>
-          </a:prstGeom>
-          <a:ln w="9525">
-            <a:solidFill>
-              <a:srgbClr val="EDEBEA"/>
-            </a:solidFill>
-          </a:ln>
-        </p:spPr>
-        <p:style>
-          <a:lnRef idx="2">
-            <a:schemeClr val="accent1"/>
-          </a:lnRef>
-          <a:fillRef idx="0">
-            <a:schemeClr val="accent1"/>
-          </a:fillRef>
-          <a:effectRef idx="1">
-            <a:schemeClr val="accent1"/>
-          </a:effectRef>
-          <a:fontRef idx="minor">
-            <a:schemeClr val="tx1"/>
-          </a:fontRef>
-        </p:style>
-      </p:cxnSp>
-      <p:sp>
-        <p:nvSpPr>
-          <p:cNvPr id="17" name="TextBox 16"/>
-          <p:cNvSpPr txBox="1"/>
-          <p:nvPr/>
-        </p:nvSpPr>
-        <p:spPr>
-          <a:xfrm>
-            <a:off x="914400" y="5129783"/>
-            <a:ext cx="2834640" cy="566928"/>
-          </a:xfrm>
-          <a:prstGeom prst="rect">
-            <a:avLst/>
-          </a:prstGeom>
-          <a:noFill/>
-        </p:spPr>
-        <p:txBody>
-          <a:bodyPr wrap="square" lIns="0" rIns="0" tIns="0" bIns="0" anchor="t">
-            <a:spAutoFit/>
-          </a:bodyPr>
-          <a:lstStyle/>
-          <a:p>
-            <a:pPr algn="l">
-              <a:lnSpc>
-                <a:spcPct val="130000"/>
-              </a:lnSpc>
-            </a:pPr>
-            <a:r>
-              <a:rPr sz="1300" b="1">
-                <a:solidFill>
-                  <a:srgbClr val="111111"/>
-                </a:solidFill>
-                <a:latin typeface="Poppins"/>
-              </a:rPr>
-              <a:t>Which plan is live</a:t>
-            </a:r>
-          </a:p>
-        </p:txBody>
-      </p:sp>
-      <p:sp>
-        <p:nvSpPr>
-          <p:cNvPr id="18" name="TextBox 17"/>
-          <p:cNvSpPr txBox="1"/>
-          <p:nvPr/>
-        </p:nvSpPr>
-        <p:spPr>
-          <a:xfrm>
-            <a:off x="4023360" y="5129783"/>
-            <a:ext cx="7223760" cy="566928"/>
-          </a:xfrm>
-          <a:prstGeom prst="rect">
-            <a:avLst/>
-          </a:prstGeom>
-          <a:noFill/>
-        </p:spPr>
-        <p:txBody>
-          <a:bodyPr wrap="square" lIns="0" rIns="0" tIns="0" bIns="0" anchor="t">
-            <a:spAutoFit/>
-          </a:bodyPr>
-          <a:lstStyle/>
-          <a:p>
-            <a:pPr algn="l">
-              <a:lnSpc>
-                <a:spcPct val="138000"/>
-              </a:lnSpc>
-            </a:pPr>
-            <a:r>
-              <a:rPr sz="1300" b="0">
-                <a:solidFill>
-                  <a:srgbClr val="666666"/>
-                </a:solidFill>
-                <a:latin typeface="Poppins"/>
-              </a:rPr>
-              <a:t>Three of your documents name three different core metrics.</a:t>
-            </a:r>
-          </a:p>
-        </p:txBody>
-      </p:sp>
-      <p:cxnSp>
-        <p:nvCxnSpPr>
-          <p:cNvPr id="19" name="Connector 18"/>
-          <p:cNvCxnSpPr/>
-          <p:nvPr/>
-        </p:nvCxnSpPr>
-        <p:spPr>
-          <a:xfrm>
-            <a:off x="914400" y="5623559"/>
-            <a:ext cx="10332720" cy="0"/>
-          </a:xfrm>
-          <a:prstGeom prst="line">
-            <a:avLst/>
-          </a:prstGeom>
-          <a:ln w="9525">
-            <a:solidFill>
-              <a:srgbClr val="EDEBEA"/>
-            </a:solidFill>
-          </a:ln>
-        </p:spPr>
-        <p:style>
-          <a:lnRef idx="2">
-            <a:schemeClr val="accent1"/>
-          </a:lnRef>
-          <a:fillRef idx="0">
-            <a:schemeClr val="accent1"/>
-          </a:fillRef>
-          <a:effectRef idx="1">
-            <a:schemeClr val="accent1"/>
-          </a:effectRef>
-          <a:fontRef idx="minor">
-            <a:schemeClr val="tx1"/>
-          </a:fontRef>
-        </p:style>
-      </p:cxnSp>
-      <p:sp>
-        <p:nvSpPr>
-          <p:cNvPr id="20" name="TextBox 19"/>
-          <p:cNvSpPr txBox="1"/>
-          <p:nvPr/>
-        </p:nvSpPr>
-        <p:spPr>
-          <a:xfrm>
-            <a:off x="914400" y="5751575"/>
-            <a:ext cx="2834640" cy="566928"/>
-          </a:xfrm>
-          <a:prstGeom prst="rect">
-            <a:avLst/>
-          </a:prstGeom>
-          <a:noFill/>
-        </p:spPr>
-        <p:txBody>
-          <a:bodyPr wrap="square" lIns="0" rIns="0" tIns="0" bIns="0" anchor="t">
-            <a:spAutoFit/>
-          </a:bodyPr>
-          <a:lstStyle/>
-          <a:p>
-            <a:pPr algn="l">
-              <a:lnSpc>
-                <a:spcPct val="130000"/>
-              </a:lnSpc>
-            </a:pPr>
-            <a:r>
-              <a:rPr sz="1300" b="1">
-                <a:solidFill>
-                  <a:srgbClr val="111111"/>
-                </a:solidFill>
-                <a:latin typeface="Poppins"/>
-              </a:rPr>
-              <a:t>Model A or B</a:t>
-            </a:r>
-          </a:p>
-        </p:txBody>
-      </p:sp>
-      <p:sp>
-        <p:nvSpPr>
-          <p:cNvPr id="21" name="TextBox 20"/>
-          <p:cNvSpPr txBox="1"/>
-          <p:nvPr/>
-        </p:nvSpPr>
-        <p:spPr>
-          <a:xfrm>
-            <a:off x="4023360" y="5751575"/>
-            <a:ext cx="7223760" cy="566928"/>
-          </a:xfrm>
-          <a:prstGeom prst="rect">
-            <a:avLst/>
-          </a:prstGeom>
-          <a:noFill/>
-        </p:spPr>
-        <p:txBody>
-          <a:bodyPr wrap="square" lIns="0" rIns="0" tIns="0" bIns="0" anchor="t">
-            <a:spAutoFit/>
-          </a:bodyPr>
-          <a:lstStyle/>
-          <a:p>
-            <a:pPr algn="l">
-              <a:lnSpc>
-                <a:spcPct val="138000"/>
-              </a:lnSpc>
-            </a:pPr>
-            <a:r>
-              <a:rPr sz="1300" b="0">
-                <a:solidFill>
-                  <a:srgbClr val="666666"/>
-                </a:solidFill>
-                <a:latin typeface="Poppins"/>
-              </a:rPr>
-              <a:t>Sell more systems, or convert the 116 who bought elsewhere.</a:t>
-            </a:r>
-          </a:p>
-        </p:txBody>
-      </p:sp>
-      <p:cxnSp>
-        <p:nvCxnSpPr>
-          <p:cNvPr id="22" name="Connector 21"/>
-          <p:cNvCxnSpPr/>
-          <p:nvPr/>
-        </p:nvCxnSpPr>
-        <p:spPr>
-          <a:xfrm>
-            <a:off x="914400" y="6245351"/>
-            <a:ext cx="10332720" cy="0"/>
-          </a:xfrm>
-          <a:prstGeom prst="line">
-            <a:avLst/>
-          </a:prstGeom>
-          <a:ln w="9525">
-            <a:solidFill>
-              <a:srgbClr val="EDEBEA"/>
-            </a:solidFill>
-          </a:ln>
-        </p:spPr>
-        <p:style>
-          <a:lnRef idx="2">
-            <a:schemeClr val="accent1"/>
-          </a:lnRef>
-          <a:fillRef idx="0">
-            <a:schemeClr val="accent1"/>
-          </a:fillRef>
-          <a:effectRef idx="1">
-            <a:schemeClr val="accent1"/>
-          </a:effectRef>
-          <a:fontRef idx="minor">
-            <a:schemeClr val="tx1"/>
-          </a:fontRef>
-        </p:style>
-      </p:cxnSp>
+              <a:t>That was close to the centre of the plan we wrote for you. On this read it should not be. If the taproom is the half that loses money, spending the marketing budget filling it is the wrong instinct, however good the content is.</a:t>
+            </a:r>
+          </a:p>
+        </p:txBody>
+      </p:sp>
     </p:spTree>
   </p:cSld>
   <p:clrMapOvr>
@@ -4316,7 +3661,7 @@
                 </a:solidFill>
                 <a:latin typeface="Poppins"/>
               </a:rPr>
-              <a:t>HOW THIS SPLITS</a:t>
+              <a:t>THE OPPORTUNITY NOBODY HAS WORKED</a:t>
             </a:r>
           </a:p>
         </p:txBody>
@@ -4355,21 +3700,76 @@
                 </a:solidFill>
                 <a:latin typeface="Poppins"/>
               </a:rPr>
-              <a:t>Harry takes these. We would do these for you.</a:t>
+              <a:t>Four in ten of your customers have</a:t>
+            </a:r>
+          </a:p>
+          <a:p>
+            <a:pPr algn="l">
+              <a:lnSpc>
+                <a:spcPct val="112000"/>
+              </a:lnSpc>
+            </a:pPr>
+            <a:r>
+              <a:rPr sz="3800" b="0">
+                <a:solidFill>
+                  <a:srgbClr val="111111"/>
+                </a:solidFill>
+                <a:latin typeface="Poppins"/>
+              </a:rPr>
+              <a:t>quietly slowed down.</a:t>
+            </a:r>
+          </a:p>
+        </p:txBody>
+      </p:sp>
+      <p:sp>
+        <p:nvSpPr>
+          <p:cNvPr id="4" name="TextBox 3"/>
+          <p:cNvSpPr txBox="1"/>
+          <p:nvPr/>
+        </p:nvSpPr>
+        <p:spPr>
+          <a:xfrm>
+            <a:off x="914400" y="4114800"/>
+            <a:ext cx="9144000" cy="2194560"/>
+          </a:xfrm>
+          <a:prstGeom prst="rect">
+            <a:avLst/>
+          </a:prstGeom>
+          <a:noFill/>
+        </p:spPr>
+        <p:txBody>
+          <a:bodyPr wrap="square" lIns="0" rIns="0" tIns="0" bIns="0" anchor="t">
+            <a:spAutoFit/>
+          </a:bodyPr>
+          <a:lstStyle/>
+          <a:p>
+            <a:pPr algn="l">
+              <a:lnSpc>
+                <a:spcPct val="155000"/>
+              </a:lnSpc>
+            </a:pPr>
+            <a:r>
+              <a:rPr sz="1400" b="0">
+                <a:solidFill>
+                  <a:srgbClr val="111111"/>
+                </a:solidFill>
+                <a:latin typeface="Poppins"/>
+              </a:rPr>
+              <a:t>They have cut back on beer, not on thirst. A lighter or lower alcohol line puts something back in their taps without asking anyone to drink more. Where they are also members, they are paying for something they have stopped using.</a:t>
             </a:r>
           </a:p>
         </p:txBody>
       </p:sp>
       <p:cxnSp>
         <p:nvCxnSpPr>
-          <p:cNvPr id="4" name="Connector 3"/>
+          <p:cNvPr id="5" name="Connector 4"/>
           <p:cNvCxnSpPr/>
           <p:nvPr/>
         </p:nvCxnSpPr>
         <p:spPr>
           <a:xfrm>
-            <a:off x="914400" y="2926080"/>
-            <a:ext cx="10332720" cy="0"/>
+            <a:off x="914400" y="4023360"/>
+            <a:ext cx="2217420" cy="0"/>
           </a:xfrm>
           <a:prstGeom prst="line">
             <a:avLst/>
@@ -4397,92 +3797,92 @@
       </p:cxnSp>
       <p:sp>
         <p:nvSpPr>
-          <p:cNvPr id="5" name="TextBox 4"/>
-          <p:cNvSpPr txBox="1"/>
-          <p:nvPr/>
-        </p:nvSpPr>
-        <p:spPr>
-          <a:xfrm>
-            <a:off x="914400" y="3054096"/>
-            <a:ext cx="2103120" cy="658368"/>
-          </a:xfrm>
-          <a:prstGeom prst="rect">
-            <a:avLst/>
-          </a:prstGeom>
-          <a:noFill/>
-        </p:spPr>
-        <p:txBody>
-          <a:bodyPr wrap="square" lIns="0" rIns="0" tIns="0" bIns="0" anchor="t">
-            <a:spAutoFit/>
-          </a:bodyPr>
-          <a:lstStyle/>
-          <a:p>
-            <a:pPr algn="l">
-              <a:lnSpc>
-                <a:spcPct val="130000"/>
-              </a:lnSpc>
-            </a:pPr>
-            <a:r>
-              <a:rPr sz="1300" b="1">
+          <p:cNvPr id="6" name="TextBox 5"/>
+          <p:cNvSpPr txBox="1"/>
+          <p:nvPr/>
+        </p:nvSpPr>
+        <p:spPr>
+          <a:xfrm>
+            <a:off x="914400" y="4187952"/>
+            <a:ext cx="2217420" cy="640080"/>
+          </a:xfrm>
+          <a:prstGeom prst="rect">
+            <a:avLst/>
+          </a:prstGeom>
+          <a:noFill/>
+        </p:spPr>
+        <p:txBody>
+          <a:bodyPr wrap="square" lIns="0" rIns="0" tIns="0" bIns="0" anchor="t">
+            <a:spAutoFit/>
+          </a:bodyPr>
+          <a:lstStyle/>
+          <a:p>
+            <a:pPr algn="l">
+              <a:lnSpc>
+                <a:spcPct val="100000"/>
+              </a:lnSpc>
+            </a:pPr>
+            <a:r>
+              <a:rPr sz="3200" b="1">
                 <a:solidFill>
                   <a:srgbClr val="111111"/>
                 </a:solidFill>
                 <a:latin typeface="Poppins"/>
               </a:rPr>
-              <a:t>Harry</a:t>
-            </a:r>
-          </a:p>
-        </p:txBody>
-      </p:sp>
-      <p:sp>
-        <p:nvSpPr>
-          <p:cNvPr id="6" name="TextBox 5"/>
-          <p:cNvSpPr txBox="1"/>
-          <p:nvPr/>
-        </p:nvSpPr>
-        <p:spPr>
-          <a:xfrm>
-            <a:off x="3291840" y="3054096"/>
-            <a:ext cx="7955280" cy="658368"/>
-          </a:xfrm>
-          <a:prstGeom prst="rect">
-            <a:avLst/>
-          </a:prstGeom>
-          <a:noFill/>
-        </p:spPr>
-        <p:txBody>
-          <a:bodyPr wrap="square" lIns="0" rIns="0" tIns="0" bIns="0" anchor="t">
-            <a:spAutoFit/>
-          </a:bodyPr>
-          <a:lstStyle/>
-          <a:p>
-            <a:pPr algn="l">
-              <a:lnSpc>
-                <a:spcPct val="138000"/>
-              </a:lnSpc>
-            </a:pPr>
-            <a:r>
-              <a:rPr sz="1300" b="0">
+              <a:t>10%</a:t>
+            </a:r>
+          </a:p>
+        </p:txBody>
+      </p:sp>
+      <p:sp>
+        <p:nvSpPr>
+          <p:cNvPr id="7" name="TextBox 6"/>
+          <p:cNvSpPr txBox="1"/>
+          <p:nvPr/>
+        </p:nvSpPr>
+        <p:spPr>
+          <a:xfrm>
+            <a:off x="914400" y="4892040"/>
+            <a:ext cx="2125980" cy="822960"/>
+          </a:xfrm>
+          <a:prstGeom prst="rect">
+            <a:avLst/>
+          </a:prstGeom>
+          <a:noFill/>
+        </p:spPr>
+        <p:txBody>
+          <a:bodyPr wrap="square" lIns="0" rIns="0" tIns="0" bIns="0" anchor="t">
+            <a:spAutoFit/>
+          </a:bodyPr>
+          <a:lstStyle/>
+          <a:p>
+            <a:pPr algn="l">
+              <a:lnSpc>
+                <a:spcPct val="135000"/>
+              </a:lnSpc>
+            </a:pPr>
+            <a:r>
+              <a:rPr sz="1100" b="0">
                 <a:solidFill>
                   <a:srgbClr val="666666"/>
                 </a:solidFill>
                 <a:latin typeface="Poppins"/>
               </a:rPr>
-              <a:t>Tour operator outreach. Fresh copy, photos, reviews and the award to each operator. The referral reward nobody knows about.</a:t>
+              <a:t>Buy about every month. Already at their ceiling</a:t>
             </a:r>
           </a:p>
         </p:txBody>
       </p:sp>
       <p:cxnSp>
         <p:nvCxnSpPr>
-          <p:cNvPr id="7" name="Connector 6"/>
+          <p:cNvPr id="8" name="Connector 7"/>
           <p:cNvCxnSpPr/>
           <p:nvPr/>
         </p:nvCxnSpPr>
         <p:spPr>
           <a:xfrm>
-            <a:off x="914400" y="3639312"/>
-            <a:ext cx="10332720" cy="0"/>
+            <a:off x="3497580" y="4023360"/>
+            <a:ext cx="2217420" cy="0"/>
           </a:xfrm>
           <a:prstGeom prst="line">
             <a:avLst/>
@@ -4510,92 +3910,92 @@
       </p:cxnSp>
       <p:sp>
         <p:nvSpPr>
-          <p:cNvPr id="8" name="TextBox 7"/>
-          <p:cNvSpPr txBox="1"/>
-          <p:nvPr/>
-        </p:nvSpPr>
-        <p:spPr>
-          <a:xfrm>
-            <a:off x="914400" y="3767328"/>
-            <a:ext cx="2103120" cy="658368"/>
-          </a:xfrm>
-          <a:prstGeom prst="rect">
-            <a:avLst/>
-          </a:prstGeom>
-          <a:noFill/>
-        </p:spPr>
-        <p:txBody>
-          <a:bodyPr wrap="square" lIns="0" rIns="0" tIns="0" bIns="0" anchor="t">
-            <a:spAutoFit/>
-          </a:bodyPr>
-          <a:lstStyle/>
-          <a:p>
-            <a:pPr algn="l">
-              <a:lnSpc>
-                <a:spcPct val="130000"/>
-              </a:lnSpc>
-            </a:pPr>
-            <a:r>
-              <a:rPr sz="1300" b="1">
+          <p:cNvPr id="9" name="TextBox 8"/>
+          <p:cNvSpPr txBox="1"/>
+          <p:nvPr/>
+        </p:nvSpPr>
+        <p:spPr>
+          <a:xfrm>
+            <a:off x="3497580" y="4187952"/>
+            <a:ext cx="2217420" cy="640080"/>
+          </a:xfrm>
+          <a:prstGeom prst="rect">
+            <a:avLst/>
+          </a:prstGeom>
+          <a:noFill/>
+        </p:spPr>
+        <p:txBody>
+          <a:bodyPr wrap="square" lIns="0" rIns="0" tIns="0" bIns="0" anchor="t">
+            <a:spAutoFit/>
+          </a:bodyPr>
+          <a:lstStyle/>
+          <a:p>
+            <a:pPr algn="l">
+              <a:lnSpc>
+                <a:spcPct val="100000"/>
+              </a:lnSpc>
+            </a:pPr>
+            <a:r>
+              <a:rPr sz="3200" b="1">
                 <a:solidFill>
                   <a:srgbClr val="111111"/>
                 </a:solidFill>
                 <a:latin typeface="Poppins"/>
               </a:rPr>
-              <a:t>Justin</a:t>
-            </a:r>
-          </a:p>
-        </p:txBody>
-      </p:sp>
-      <p:sp>
-        <p:nvSpPr>
-          <p:cNvPr id="9" name="TextBox 8"/>
-          <p:cNvSpPr txBox="1"/>
-          <p:nvPr/>
-        </p:nvSpPr>
-        <p:spPr>
-          <a:xfrm>
-            <a:off x="3291840" y="3767328"/>
-            <a:ext cx="7955280" cy="658368"/>
-          </a:xfrm>
-          <a:prstGeom prst="rect">
-            <a:avLst/>
-          </a:prstGeom>
-          <a:noFill/>
-        </p:spPr>
-        <p:txBody>
-          <a:bodyPr wrap="square" lIns="0" rIns="0" tIns="0" bIns="0" anchor="t">
-            <a:spAutoFit/>
-          </a:bodyPr>
-          <a:lstStyle/>
-          <a:p>
-            <a:pPr algn="l">
-              <a:lnSpc>
-                <a:spcPct val="138000"/>
-              </a:lnSpc>
-            </a:pPr>
-            <a:r>
-              <a:rPr sz="1300" b="0">
+              <a:t>60%</a:t>
+            </a:r>
+          </a:p>
+        </p:txBody>
+      </p:sp>
+      <p:sp>
+        <p:nvSpPr>
+          <p:cNvPr id="10" name="TextBox 9"/>
+          <p:cNvSpPr txBox="1"/>
+          <p:nvPr/>
+        </p:nvSpPr>
+        <p:spPr>
+          <a:xfrm>
+            <a:off x="3497580" y="4892040"/>
+            <a:ext cx="2125980" cy="822960"/>
+          </a:xfrm>
+          <a:prstGeom prst="rect">
+            <a:avLst/>
+          </a:prstGeom>
+          <a:noFill/>
+        </p:spPr>
+        <p:txBody>
+          <a:bodyPr wrap="square" lIns="0" rIns="0" tIns="0" bIns="0" anchor="t">
+            <a:spAutoFit/>
+          </a:bodyPr>
+          <a:lstStyle/>
+          <a:p>
+            <a:pPr algn="l">
+              <a:lnSpc>
+                <a:spcPct val="135000"/>
+              </a:lnSpc>
+            </a:pPr>
+            <a:r>
+              <a:rPr sz="1100" b="0">
                 <a:solidFill>
                   <a:srgbClr val="666666"/>
                 </a:solidFill>
                 <a:latin typeface="Poppins"/>
               </a:rPr>
-              <a:t>The Harvey Norman conversation. Wholesale structure and targets. The six decisions above.</a:t>
+              <a:t>Buy about every three months. This is the core</a:t>
             </a:r>
           </a:p>
         </p:txBody>
       </p:sp>
       <p:cxnSp>
         <p:nvCxnSpPr>
-          <p:cNvPr id="10" name="Connector 9"/>
+          <p:cNvPr id="11" name="Connector 10"/>
           <p:cNvCxnSpPr/>
           <p:nvPr/>
         </p:nvCxnSpPr>
         <p:spPr>
           <a:xfrm>
-            <a:off x="914400" y="4352544"/>
-            <a:ext cx="10332720" cy="0"/>
+            <a:off x="6080760" y="4023360"/>
+            <a:ext cx="2217420" cy="0"/>
           </a:xfrm>
           <a:prstGeom prst="line">
             <a:avLst/>
@@ -4623,92 +4023,92 @@
       </p:cxnSp>
       <p:sp>
         <p:nvSpPr>
-          <p:cNvPr id="11" name="TextBox 10"/>
-          <p:cNvSpPr txBox="1"/>
-          <p:nvPr/>
-        </p:nvSpPr>
-        <p:spPr>
-          <a:xfrm>
-            <a:off x="914400" y="4480560"/>
-            <a:ext cx="2103120" cy="658368"/>
-          </a:xfrm>
-          <a:prstGeom prst="rect">
-            <a:avLst/>
-          </a:prstGeom>
-          <a:noFill/>
-        </p:spPr>
-        <p:txBody>
-          <a:bodyPr wrap="square" lIns="0" rIns="0" tIns="0" bIns="0" anchor="t">
-            <a:spAutoFit/>
-          </a:bodyPr>
-          <a:lstStyle/>
-          <a:p>
-            <a:pPr algn="l">
-              <a:lnSpc>
-                <a:spcPct val="130000"/>
-              </a:lnSpc>
-            </a:pPr>
-            <a:r>
-              <a:rPr sz="1300" b="1">
+          <p:cNvPr id="12" name="TextBox 11"/>
+          <p:cNvSpPr txBox="1"/>
+          <p:nvPr/>
+        </p:nvSpPr>
+        <p:spPr>
+          <a:xfrm>
+            <a:off x="6080760" y="4187952"/>
+            <a:ext cx="2217420" cy="640080"/>
+          </a:xfrm>
+          <a:prstGeom prst="rect">
+            <a:avLst/>
+          </a:prstGeom>
+          <a:noFill/>
+        </p:spPr>
+        <p:txBody>
+          <a:bodyPr wrap="square" lIns="0" rIns="0" tIns="0" bIns="0" anchor="t">
+            <a:spAutoFit/>
+          </a:bodyPr>
+          <a:lstStyle/>
+          <a:p>
+            <a:pPr algn="l">
+              <a:lnSpc>
+                <a:spcPct val="100000"/>
+              </a:lnSpc>
+            </a:pPr>
+            <a:r>
+              <a:rPr sz="3200" b="1">
                 <a:solidFill>
                   <a:srgbClr val="111111"/>
                 </a:solidFill>
                 <a:latin typeface="Poppins"/>
               </a:rPr>
-              <a:t>Jewell</a:t>
-            </a:r>
-          </a:p>
-        </p:txBody>
-      </p:sp>
-      <p:sp>
-        <p:nvSpPr>
-          <p:cNvPr id="12" name="TextBox 11"/>
-          <p:cNvSpPr txBox="1"/>
-          <p:nvPr/>
-        </p:nvSpPr>
-        <p:spPr>
-          <a:xfrm>
-            <a:off x="3291840" y="4480560"/>
-            <a:ext cx="7955280" cy="658368"/>
-          </a:xfrm>
-          <a:prstGeom prst="rect">
-            <a:avLst/>
-          </a:prstGeom>
-          <a:noFill/>
-        </p:spPr>
-        <p:txBody>
-          <a:bodyPr wrap="square" lIns="0" rIns="0" tIns="0" bIns="0" anchor="t">
-            <a:spAutoFit/>
-          </a:bodyPr>
-          <a:lstStyle/>
-          <a:p>
-            <a:pPr algn="l">
-              <a:lnSpc>
-                <a:spcPct val="138000"/>
-              </a:lnSpc>
-            </a:pPr>
-            <a:r>
-              <a:rPr sz="1300" b="0">
+              <a:t>40%</a:t>
+            </a:r>
+          </a:p>
+        </p:txBody>
+      </p:sp>
+      <p:sp>
+        <p:nvSpPr>
+          <p:cNvPr id="13" name="TextBox 12"/>
+          <p:cNvSpPr txBox="1"/>
+          <p:nvPr/>
+        </p:nvSpPr>
+        <p:spPr>
+          <a:xfrm>
+            <a:off x="6080760" y="4892040"/>
+            <a:ext cx="2125980" cy="822960"/>
+          </a:xfrm>
+          <a:prstGeom prst="rect">
+            <a:avLst/>
+          </a:prstGeom>
+          <a:noFill/>
+        </p:spPr>
+        <p:txBody>
+          <a:bodyPr wrap="square" lIns="0" rIns="0" tIns="0" bIns="0" anchor="t">
+            <a:spAutoFit/>
+          </a:bodyPr>
+          <a:lstStyle/>
+          <a:p>
+            <a:pPr algn="l">
+              <a:lnSpc>
+                <a:spcPct val="135000"/>
+              </a:lnSpc>
+            </a:pPr>
+            <a:r>
+              <a:rPr sz="1100" b="0">
                 <a:solidFill>
                   <a:srgbClr val="666666"/>
                 </a:solidFill>
                 <a:latin typeface="Poppins"/>
               </a:rPr>
-              <a:t>Database acquisition and the campaign against it. The Urban Legends booking tool. Tracking, so you can see what any of it did.</a:t>
+              <a:t>Take longer than that. The system is still in the backyard</a:t>
             </a:r>
           </a:p>
         </p:txBody>
       </p:sp>
       <p:cxnSp>
         <p:nvCxnSpPr>
-          <p:cNvPr id="13" name="Connector 12"/>
+          <p:cNvPr id="14" name="Connector 13"/>
           <p:cNvCxnSpPr/>
           <p:nvPr/>
         </p:nvCxnSpPr>
         <p:spPr>
           <a:xfrm>
-            <a:off x="914400" y="5065776"/>
-            <a:ext cx="10332720" cy="0"/>
+            <a:off x="8663940" y="4023360"/>
+            <a:ext cx="2217420" cy="0"/>
           </a:xfrm>
           <a:prstGeom prst="line">
             <a:avLst/>
@@ -4734,6 +4134,84 @@
           </a:fontRef>
         </p:style>
       </p:cxnSp>
+      <p:sp>
+        <p:nvSpPr>
+          <p:cNvPr id="15" name="TextBox 14"/>
+          <p:cNvSpPr txBox="1"/>
+          <p:nvPr/>
+        </p:nvSpPr>
+        <p:spPr>
+          <a:xfrm>
+            <a:off x="8663940" y="4187952"/>
+            <a:ext cx="2217420" cy="640080"/>
+          </a:xfrm>
+          <a:prstGeom prst="rect">
+            <a:avLst/>
+          </a:prstGeom>
+          <a:noFill/>
+        </p:spPr>
+        <p:txBody>
+          <a:bodyPr wrap="square" lIns="0" rIns="0" tIns="0" bIns="0" anchor="t">
+            <a:spAutoFit/>
+          </a:bodyPr>
+          <a:lstStyle/>
+          <a:p>
+            <a:pPr algn="l">
+              <a:lnSpc>
+                <a:spcPct val="100000"/>
+              </a:lnSpc>
+            </a:pPr>
+            <a:r>
+              <a:rPr sz="3200" b="1">
+                <a:solidFill>
+                  <a:srgbClr val="111111"/>
+                </a:solidFill>
+                <a:latin typeface="Poppins"/>
+              </a:rPr>
+              <a:t>1 in 3</a:t>
+            </a:r>
+          </a:p>
+        </p:txBody>
+      </p:sp>
+      <p:sp>
+        <p:nvSpPr>
+          <p:cNvPr id="16" name="TextBox 15"/>
+          <p:cNvSpPr txBox="1"/>
+          <p:nvPr/>
+        </p:nvSpPr>
+        <p:spPr>
+          <a:xfrm>
+            <a:off x="8663940" y="4892040"/>
+            <a:ext cx="2125980" cy="822960"/>
+          </a:xfrm>
+          <a:prstGeom prst="rect">
+            <a:avLst/>
+          </a:prstGeom>
+          <a:noFill/>
+        </p:spPr>
+        <p:txBody>
+          <a:bodyPr wrap="square" lIns="0" rIns="0" tIns="0" bIns="0" anchor="t">
+            <a:spAutoFit/>
+          </a:bodyPr>
+          <a:lstStyle/>
+          <a:p>
+            <a:pPr algn="l">
+              <a:lnSpc>
+                <a:spcPct val="135000"/>
+              </a:lnSpc>
+            </a:pPr>
+            <a:r>
+              <a:rPr sz="1100" b="0">
+                <a:solidFill>
+                  <a:srgbClr val="666666"/>
+                </a:solidFill>
+                <a:latin typeface="Poppins"/>
+              </a:rPr>
+              <a:t>Of your taps are not beer, which is the answer to this</a:t>
+            </a:r>
+          </a:p>
+        </p:txBody>
+      </p:sp>
     </p:spTree>
   </p:cSld>
   <p:clrMapOvr>
@@ -4768,6 +4246,2134 @@
         </p:nvSpPr>
         <p:spPr>
           <a:xfrm>
+            <a:off x="914400" y="914400"/>
+            <a:ext cx="10332720" cy="274320"/>
+          </a:xfrm>
+          <a:prstGeom prst="rect">
+            <a:avLst/>
+          </a:prstGeom>
+          <a:noFill/>
+        </p:spPr>
+        <p:txBody>
+          <a:bodyPr wrap="square" lIns="0" rIns="0" tIns="0" bIns="0" anchor="t">
+            <a:spAutoFit/>
+          </a:bodyPr>
+          <a:lstStyle/>
+          <a:p>
+            <a:pPr algn="l">
+              <a:lnSpc>
+                <a:spcPct val="150000"/>
+              </a:lnSpc>
+            </a:pPr>
+            <a:r>
+              <a:rPr sz="900" b="0" spc="200">
+                <a:solidFill>
+                  <a:srgbClr val="111111"/>
+                </a:solidFill>
+                <a:latin typeface="Poppins"/>
+              </a:rPr>
+              <a:t>YOUR WEBSITE</a:t>
+            </a:r>
+          </a:p>
+        </p:txBody>
+      </p:sp>
+      <p:sp>
+        <p:nvSpPr>
+          <p:cNvPr id="3" name="TextBox 2"/>
+          <p:cNvSpPr txBox="1"/>
+          <p:nvPr/>
+        </p:nvSpPr>
+        <p:spPr>
+          <a:xfrm>
+            <a:off x="914400" y="1737360"/>
+            <a:ext cx="10332720" cy="2103120"/>
+          </a:xfrm>
+          <a:prstGeom prst="rect">
+            <a:avLst/>
+          </a:prstGeom>
+          <a:noFill/>
+        </p:spPr>
+        <p:txBody>
+          <a:bodyPr wrap="square" lIns="0" rIns="0" tIns="0" bIns="0" anchor="t">
+            <a:spAutoFit/>
+          </a:bodyPr>
+          <a:lstStyle/>
+          <a:p>
+            <a:pPr algn="l">
+              <a:lnSpc>
+                <a:spcPct val="112000"/>
+              </a:lnSpc>
+            </a:pPr>
+            <a:r>
+              <a:rPr sz="3800" b="0">
+                <a:solidFill>
+                  <a:srgbClr val="111111"/>
+                </a:solidFill>
+                <a:latin typeface="Poppins"/>
+              </a:rPr>
+              <a:t>Four business units, given equal</a:t>
+            </a:r>
+          </a:p>
+          <a:p>
+            <a:pPr algn="l">
+              <a:lnSpc>
+                <a:spcPct val="112000"/>
+              </a:lnSpc>
+            </a:pPr>
+            <a:r>
+              <a:rPr sz="3800" b="0">
+                <a:solidFill>
+                  <a:srgbClr val="111111"/>
+                </a:solidFill>
+                <a:latin typeface="Poppins"/>
+              </a:rPr>
+              <a:t>billing, and the award is buried.</a:t>
+            </a:r>
+          </a:p>
+        </p:txBody>
+      </p:sp>
+      <p:cxnSp>
+        <p:nvCxnSpPr>
+          <p:cNvPr id="4" name="Connector 3"/>
+          <p:cNvCxnSpPr/>
+          <p:nvPr/>
+        </p:nvCxnSpPr>
+        <p:spPr>
+          <a:xfrm>
+            <a:off x="914400" y="2651760"/>
+            <a:ext cx="10332720" cy="0"/>
+          </a:xfrm>
+          <a:prstGeom prst="line">
+            <a:avLst/>
+          </a:prstGeom>
+          <a:ln w="9525">
+            <a:solidFill>
+              <a:srgbClr val="EDEBEA"/>
+            </a:solidFill>
+          </a:ln>
+        </p:spPr>
+        <p:style>
+          <a:lnRef idx="2">
+            <a:schemeClr val="accent1"/>
+          </a:lnRef>
+          <a:fillRef idx="0">
+            <a:schemeClr val="accent1"/>
+          </a:fillRef>
+          <a:effectRef idx="1">
+            <a:schemeClr val="accent1"/>
+          </a:effectRef>
+          <a:fontRef idx="minor">
+            <a:schemeClr val="tx1"/>
+          </a:fontRef>
+        </p:style>
+      </p:cxnSp>
+      <p:sp>
+        <p:nvSpPr>
+          <p:cNvPr id="5" name="TextBox 4"/>
+          <p:cNvSpPr txBox="1"/>
+          <p:nvPr/>
+        </p:nvSpPr>
+        <p:spPr>
+          <a:xfrm>
+            <a:off x="914400" y="2779776"/>
+            <a:ext cx="2468880" cy="603503"/>
+          </a:xfrm>
+          <a:prstGeom prst="rect">
+            <a:avLst/>
+          </a:prstGeom>
+          <a:noFill/>
+        </p:spPr>
+        <p:txBody>
+          <a:bodyPr wrap="square" lIns="0" rIns="0" tIns="0" bIns="0" anchor="t">
+            <a:spAutoFit/>
+          </a:bodyPr>
+          <a:lstStyle/>
+          <a:p>
+            <a:pPr algn="l">
+              <a:lnSpc>
+                <a:spcPct val="130000"/>
+              </a:lnSpc>
+            </a:pPr>
+            <a:r>
+              <a:rPr sz="1300" b="1">
+                <a:solidFill>
+                  <a:srgbClr val="111111"/>
+                </a:solidFill>
+                <a:latin typeface="Poppins"/>
+              </a:rPr>
+              <a:t>Above the fold</a:t>
+            </a:r>
+          </a:p>
+        </p:txBody>
+      </p:sp>
+      <p:sp>
+        <p:nvSpPr>
+          <p:cNvPr id="6" name="TextBox 5"/>
+          <p:cNvSpPr txBox="1"/>
+          <p:nvPr/>
+        </p:nvSpPr>
+        <p:spPr>
+          <a:xfrm>
+            <a:off x="3657600" y="2779776"/>
+            <a:ext cx="7589520" cy="603503"/>
+          </a:xfrm>
+          <a:prstGeom prst="rect">
+            <a:avLst/>
+          </a:prstGeom>
+          <a:noFill/>
+        </p:spPr>
+        <p:txBody>
+          <a:bodyPr wrap="square" lIns="0" rIns="0" tIns="0" bIns="0" anchor="t">
+            <a:spAutoFit/>
+          </a:bodyPr>
+          <a:lstStyle/>
+          <a:p>
+            <a:pPr algn="l">
+              <a:lnSpc>
+                <a:spcPct val="138000"/>
+              </a:lnSpc>
+            </a:pPr>
+            <a:r>
+              <a:rPr sz="1300" b="0">
+                <a:solidFill>
+                  <a:srgbClr val="666666"/>
+                </a:solidFill>
+                <a:latin typeface="Poppins"/>
+              </a:rPr>
+              <a:t>Nothing arresting. The film cuts too fast to read the message under it.</a:t>
+            </a:r>
+          </a:p>
+        </p:txBody>
+      </p:sp>
+      <p:cxnSp>
+        <p:nvCxnSpPr>
+          <p:cNvPr id="7" name="Connector 6"/>
+          <p:cNvCxnSpPr/>
+          <p:nvPr/>
+        </p:nvCxnSpPr>
+        <p:spPr>
+          <a:xfrm>
+            <a:off x="914400" y="3310128"/>
+            <a:ext cx="10332720" cy="0"/>
+          </a:xfrm>
+          <a:prstGeom prst="line">
+            <a:avLst/>
+          </a:prstGeom>
+          <a:ln w="9525">
+            <a:solidFill>
+              <a:srgbClr val="EDEBEA"/>
+            </a:solidFill>
+          </a:ln>
+        </p:spPr>
+        <p:style>
+          <a:lnRef idx="2">
+            <a:schemeClr val="accent1"/>
+          </a:lnRef>
+          <a:fillRef idx="0">
+            <a:schemeClr val="accent1"/>
+          </a:fillRef>
+          <a:effectRef idx="1">
+            <a:schemeClr val="accent1"/>
+          </a:effectRef>
+          <a:fontRef idx="minor">
+            <a:schemeClr val="tx1"/>
+          </a:fontRef>
+        </p:style>
+      </p:cxnSp>
+      <p:sp>
+        <p:nvSpPr>
+          <p:cNvPr id="8" name="TextBox 7"/>
+          <p:cNvSpPr txBox="1"/>
+          <p:nvPr/>
+        </p:nvSpPr>
+        <p:spPr>
+          <a:xfrm>
+            <a:off x="914400" y="3438144"/>
+            <a:ext cx="2468880" cy="603503"/>
+          </a:xfrm>
+          <a:prstGeom prst="rect">
+            <a:avLst/>
+          </a:prstGeom>
+          <a:noFill/>
+        </p:spPr>
+        <p:txBody>
+          <a:bodyPr wrap="square" lIns="0" rIns="0" tIns="0" bIns="0" anchor="t">
+            <a:spAutoFit/>
+          </a:bodyPr>
+          <a:lstStyle/>
+          <a:p>
+            <a:pPr algn="l">
+              <a:lnSpc>
+                <a:spcPct val="130000"/>
+              </a:lnSpc>
+            </a:pPr>
+            <a:r>
+              <a:rPr sz="1300" b="1">
+                <a:solidFill>
+                  <a:srgbClr val="111111"/>
+                </a:solidFill>
+                <a:latin typeface="Poppins"/>
+              </a:rPr>
+              <a:t>The award</a:t>
+            </a:r>
+          </a:p>
+        </p:txBody>
+      </p:sp>
+      <p:sp>
+        <p:nvSpPr>
+          <p:cNvPr id="9" name="TextBox 8"/>
+          <p:cNvSpPr txBox="1"/>
+          <p:nvPr/>
+        </p:nvSpPr>
+        <p:spPr>
+          <a:xfrm>
+            <a:off x="3657600" y="3438144"/>
+            <a:ext cx="7589520" cy="603503"/>
+          </a:xfrm>
+          <a:prstGeom prst="rect">
+            <a:avLst/>
+          </a:prstGeom>
+          <a:noFill/>
+        </p:spPr>
+        <p:txBody>
+          <a:bodyPr wrap="square" lIns="0" rIns="0" tIns="0" bIns="0" anchor="t">
+            <a:spAutoFit/>
+          </a:bodyPr>
+          <a:lstStyle/>
+          <a:p>
+            <a:pPr algn="l">
+              <a:lnSpc>
+                <a:spcPct val="138000"/>
+              </a:lnSpc>
+            </a:pPr>
+            <a:r>
+              <a:rPr sz="1300" b="0">
+                <a:solidFill>
+                  <a:srgbClr val="666666"/>
+                </a:solidFill>
+                <a:latin typeface="Poppins"/>
+              </a:rPr>
+              <a:t>Brewer's Choice at Crafted is not the first thing a visitor sees. It should be.</a:t>
+            </a:r>
+          </a:p>
+        </p:txBody>
+      </p:sp>
+      <p:cxnSp>
+        <p:nvCxnSpPr>
+          <p:cNvPr id="10" name="Connector 9"/>
+          <p:cNvCxnSpPr/>
+          <p:nvPr/>
+        </p:nvCxnSpPr>
+        <p:spPr>
+          <a:xfrm>
+            <a:off x="914400" y="3968496"/>
+            <a:ext cx="10332720" cy="0"/>
+          </a:xfrm>
+          <a:prstGeom prst="line">
+            <a:avLst/>
+          </a:prstGeom>
+          <a:ln w="9525">
+            <a:solidFill>
+              <a:srgbClr val="EDEBEA"/>
+            </a:solidFill>
+          </a:ln>
+        </p:spPr>
+        <p:style>
+          <a:lnRef idx="2">
+            <a:schemeClr val="accent1"/>
+          </a:lnRef>
+          <a:fillRef idx="0">
+            <a:schemeClr val="accent1"/>
+          </a:fillRef>
+          <a:effectRef idx="1">
+            <a:schemeClr val="accent1"/>
+          </a:effectRef>
+          <a:fontRef idx="minor">
+            <a:schemeClr val="tx1"/>
+          </a:fontRef>
+        </p:style>
+      </p:cxnSp>
+      <p:sp>
+        <p:nvSpPr>
+          <p:cNvPr id="11" name="TextBox 10"/>
+          <p:cNvSpPr txBox="1"/>
+          <p:nvPr/>
+        </p:nvSpPr>
+        <p:spPr>
+          <a:xfrm>
+            <a:off x="914400" y="4096511"/>
+            <a:ext cx="2468880" cy="603503"/>
+          </a:xfrm>
+          <a:prstGeom prst="rect">
+            <a:avLst/>
+          </a:prstGeom>
+          <a:noFill/>
+        </p:spPr>
+        <p:txBody>
+          <a:bodyPr wrap="square" lIns="0" rIns="0" tIns="0" bIns="0" anchor="t">
+            <a:spAutoFit/>
+          </a:bodyPr>
+          <a:lstStyle/>
+          <a:p>
+            <a:pPr algn="l">
+              <a:lnSpc>
+                <a:spcPct val="130000"/>
+              </a:lnSpc>
+            </a:pPr>
+            <a:r>
+              <a:rPr sz="1300" b="1">
+                <a:solidFill>
+                  <a:srgbClr val="111111"/>
+                </a:solidFill>
+                <a:latin typeface="Poppins"/>
+              </a:rPr>
+              <a:t>Fits any system</a:t>
+            </a:r>
+          </a:p>
+        </p:txBody>
+      </p:sp>
+      <p:sp>
+        <p:nvSpPr>
+          <p:cNvPr id="12" name="TextBox 11"/>
+          <p:cNvSpPr txBox="1"/>
+          <p:nvPr/>
+        </p:nvSpPr>
+        <p:spPr>
+          <a:xfrm>
+            <a:off x="3657600" y="4096511"/>
+            <a:ext cx="7589520" cy="603503"/>
+          </a:xfrm>
+          <a:prstGeom prst="rect">
+            <a:avLst/>
+          </a:prstGeom>
+          <a:noFill/>
+        </p:spPr>
+        <p:txBody>
+          <a:bodyPr wrap="square" lIns="0" rIns="0" tIns="0" bIns="0" anchor="t">
+            <a:spAutoFit/>
+          </a:bodyPr>
+          <a:lstStyle/>
+          <a:p>
+            <a:pPr algn="l">
+              <a:lnSpc>
+                <a:spcPct val="138000"/>
+              </a:lnSpc>
+            </a:pPr>
+            <a:r>
+              <a:rPr sz="1300" b="0">
+                <a:solidFill>
+                  <a:srgbClr val="666666"/>
+                </a:solidFill>
+                <a:latin typeface="Poppins"/>
+              </a:rPr>
+              <a:t>Your cheapest source of customers, and the site does not say it on arrival.</a:t>
+            </a:r>
+          </a:p>
+        </p:txBody>
+      </p:sp>
+      <p:cxnSp>
+        <p:nvCxnSpPr>
+          <p:cNvPr id="13" name="Connector 12"/>
+          <p:cNvCxnSpPr/>
+          <p:nvPr/>
+        </p:nvCxnSpPr>
+        <p:spPr>
+          <a:xfrm>
+            <a:off x="914400" y="4626864"/>
+            <a:ext cx="10332720" cy="0"/>
+          </a:xfrm>
+          <a:prstGeom prst="line">
+            <a:avLst/>
+          </a:prstGeom>
+          <a:ln w="9525">
+            <a:solidFill>
+              <a:srgbClr val="EDEBEA"/>
+            </a:solidFill>
+          </a:ln>
+        </p:spPr>
+        <p:style>
+          <a:lnRef idx="2">
+            <a:schemeClr val="accent1"/>
+          </a:lnRef>
+          <a:fillRef idx="0">
+            <a:schemeClr val="accent1"/>
+          </a:fillRef>
+          <a:effectRef idx="1">
+            <a:schemeClr val="accent1"/>
+          </a:effectRef>
+          <a:fontRef idx="minor">
+            <a:schemeClr val="tx1"/>
+          </a:fontRef>
+        </p:style>
+      </p:cxnSp>
+      <p:sp>
+        <p:nvSpPr>
+          <p:cNvPr id="14" name="TextBox 13"/>
+          <p:cNvSpPr txBox="1"/>
+          <p:nvPr/>
+        </p:nvSpPr>
+        <p:spPr>
+          <a:xfrm>
+            <a:off x="914400" y="4754879"/>
+            <a:ext cx="2468880" cy="603503"/>
+          </a:xfrm>
+          <a:prstGeom prst="rect">
+            <a:avLst/>
+          </a:prstGeom>
+          <a:noFill/>
+        </p:spPr>
+        <p:txBody>
+          <a:bodyPr wrap="square" lIns="0" rIns="0" tIns="0" bIns="0" anchor="t">
+            <a:spAutoFit/>
+          </a:bodyPr>
+          <a:lstStyle/>
+          <a:p>
+            <a:pPr algn="l">
+              <a:lnSpc>
+                <a:spcPct val="130000"/>
+              </a:lnSpc>
+            </a:pPr>
+            <a:r>
+              <a:rPr sz="1300" b="1">
+                <a:solidFill>
+                  <a:srgbClr val="111111"/>
+                </a:solidFill>
+                <a:latin typeface="Poppins"/>
+              </a:rPr>
+              <a:t>Reviews</a:t>
+            </a:r>
+          </a:p>
+        </p:txBody>
+      </p:sp>
+      <p:sp>
+        <p:nvSpPr>
+          <p:cNvPr id="15" name="TextBox 14"/>
+          <p:cNvSpPr txBox="1"/>
+          <p:nvPr/>
+        </p:nvSpPr>
+        <p:spPr>
+          <a:xfrm>
+            <a:off x="3657600" y="4754879"/>
+            <a:ext cx="7589520" cy="603503"/>
+          </a:xfrm>
+          <a:prstGeom prst="rect">
+            <a:avLst/>
+          </a:prstGeom>
+          <a:noFill/>
+        </p:spPr>
+        <p:txBody>
+          <a:bodyPr wrap="square" lIns="0" rIns="0" tIns="0" bIns="0" anchor="t">
+            <a:spAutoFit/>
+          </a:bodyPr>
+          <a:lstStyle/>
+          <a:p>
+            <a:pPr algn="l">
+              <a:lnSpc>
+                <a:spcPct val="138000"/>
+              </a:lnSpc>
+            </a:pPr>
+            <a:r>
+              <a:rPr sz="1300" b="0">
+                <a:solidFill>
+                  <a:srgbClr val="666666"/>
+                </a:solidFill>
+                <a:latin typeface="Poppins"/>
+              </a:rPr>
+              <a:t>Behind click dots that do not scroll, so nobody reaches them.</a:t>
+            </a:r>
+          </a:p>
+        </p:txBody>
+      </p:sp>
+      <p:cxnSp>
+        <p:nvCxnSpPr>
+          <p:cNvPr id="16" name="Connector 15"/>
+          <p:cNvCxnSpPr/>
+          <p:nvPr/>
+        </p:nvCxnSpPr>
+        <p:spPr>
+          <a:xfrm>
+            <a:off x="914400" y="5285231"/>
+            <a:ext cx="10332720" cy="0"/>
+          </a:xfrm>
+          <a:prstGeom prst="line">
+            <a:avLst/>
+          </a:prstGeom>
+          <a:ln w="9525">
+            <a:solidFill>
+              <a:srgbClr val="EDEBEA"/>
+            </a:solidFill>
+          </a:ln>
+        </p:spPr>
+        <p:style>
+          <a:lnRef idx="2">
+            <a:schemeClr val="accent1"/>
+          </a:lnRef>
+          <a:fillRef idx="0">
+            <a:schemeClr val="accent1"/>
+          </a:fillRef>
+          <a:effectRef idx="1">
+            <a:schemeClr val="accent1"/>
+          </a:effectRef>
+          <a:fontRef idx="minor">
+            <a:schemeClr val="tx1"/>
+          </a:fontRef>
+        </p:style>
+      </p:cxnSp>
+      <p:sp>
+        <p:nvSpPr>
+          <p:cNvPr id="17" name="TextBox 16"/>
+          <p:cNvSpPr txBox="1"/>
+          <p:nvPr/>
+        </p:nvSpPr>
+        <p:spPr>
+          <a:xfrm>
+            <a:off x="914400" y="5413247"/>
+            <a:ext cx="2468880" cy="603503"/>
+          </a:xfrm>
+          <a:prstGeom prst="rect">
+            <a:avLst/>
+          </a:prstGeom>
+          <a:noFill/>
+        </p:spPr>
+        <p:txBody>
+          <a:bodyPr wrap="square" lIns="0" rIns="0" tIns="0" bIns="0" anchor="t">
+            <a:spAutoFit/>
+          </a:bodyPr>
+          <a:lstStyle/>
+          <a:p>
+            <a:pPr algn="l">
+              <a:lnSpc>
+                <a:spcPct val="130000"/>
+              </a:lnSpc>
+            </a:pPr>
+            <a:r>
+              <a:rPr sz="1300" b="1">
+                <a:solidFill>
+                  <a:srgbClr val="111111"/>
+                </a:solidFill>
+                <a:latin typeface="Poppins"/>
+              </a:rPr>
+              <a:t>Wholesale</a:t>
+            </a:r>
+          </a:p>
+        </p:txBody>
+      </p:sp>
+      <p:sp>
+        <p:nvSpPr>
+          <p:cNvPr id="18" name="TextBox 17"/>
+          <p:cNvSpPr txBox="1"/>
+          <p:nvPr/>
+        </p:nvSpPr>
+        <p:spPr>
+          <a:xfrm>
+            <a:off x="3657600" y="5413247"/>
+            <a:ext cx="7589520" cy="603503"/>
+          </a:xfrm>
+          <a:prstGeom prst="rect">
+            <a:avLst/>
+          </a:prstGeom>
+          <a:noFill/>
+        </p:spPr>
+        <p:txBody>
+          <a:bodyPr wrap="square" lIns="0" rIns="0" tIns="0" bIns="0" anchor="t">
+            <a:spAutoFit/>
+          </a:bodyPr>
+          <a:lstStyle/>
+          <a:p>
+            <a:pPr algn="l">
+              <a:lnSpc>
+                <a:spcPct val="138000"/>
+              </a:lnSpc>
+            </a:pPr>
+            <a:r>
+              <a:rPr sz="1300" b="0">
+                <a:solidFill>
+                  <a:srgbClr val="666666"/>
+                </a:solidFill>
+                <a:latin typeface="Poppins"/>
+              </a:rPr>
+              <a:t>No margin argument, no white label, no cuisine matching. Nothing to say yes to.</a:t>
+            </a:r>
+          </a:p>
+        </p:txBody>
+      </p:sp>
+      <p:cxnSp>
+        <p:nvCxnSpPr>
+          <p:cNvPr id="19" name="Connector 18"/>
+          <p:cNvCxnSpPr/>
+          <p:nvPr/>
+        </p:nvCxnSpPr>
+        <p:spPr>
+          <a:xfrm>
+            <a:off x="914400" y="5943599"/>
+            <a:ext cx="10332720" cy="0"/>
+          </a:xfrm>
+          <a:prstGeom prst="line">
+            <a:avLst/>
+          </a:prstGeom>
+          <a:ln w="9525">
+            <a:solidFill>
+              <a:srgbClr val="EDEBEA"/>
+            </a:solidFill>
+          </a:ln>
+        </p:spPr>
+        <p:style>
+          <a:lnRef idx="2">
+            <a:schemeClr val="accent1"/>
+          </a:lnRef>
+          <a:fillRef idx="0">
+            <a:schemeClr val="accent1"/>
+          </a:fillRef>
+          <a:effectRef idx="1">
+            <a:schemeClr val="accent1"/>
+          </a:effectRef>
+          <a:fontRef idx="minor">
+            <a:schemeClr val="tx1"/>
+          </a:fontRef>
+        </p:style>
+      </p:cxnSp>
+    </p:spTree>
+  </p:cSld>
+  <p:clrMapOvr>
+    <a:masterClrMapping/>
+  </p:clrMapOvr>
+</p:sld>
+</file>
+
+<file path=ppt/slides/slide14.xml><?xml version="1.0" encoding="utf-8"?>
+<p:sld xmlns:a="http://schemas.openxmlformats.org/drawingml/2006/main" xmlns:p="http://schemas.openxmlformats.org/presentationml/2006/main" xmlns:r="http://schemas.openxmlformats.org/officeDocument/2006/relationships">
+  <p:cSld>
+    <p:bg>
+      <p:bgPr>
+        <a:solidFill>
+          <a:srgbClr val="FAF8F4"/>
+        </a:solidFill>
+        <a:effectLst/>
+      </p:bgPr>
+    </p:bg>
+    <p:spTree>
+      <p:nvGrpSpPr>
+        <p:cNvPr id="1" name=""/>
+        <p:cNvGrpSpPr/>
+        <p:nvPr/>
+      </p:nvGrpSpPr>
+      <p:grpSpPr/>
+      <p:sp>
+        <p:nvSpPr>
+          <p:cNvPr id="2" name="TextBox 1"/>
+          <p:cNvSpPr txBox="1"/>
+          <p:nvPr/>
+        </p:nvSpPr>
+        <p:spPr>
+          <a:xfrm>
+            <a:off x="914400" y="914400"/>
+            <a:ext cx="10332720" cy="274320"/>
+          </a:xfrm>
+          <a:prstGeom prst="rect">
+            <a:avLst/>
+          </a:prstGeom>
+          <a:noFill/>
+        </p:spPr>
+        <p:txBody>
+          <a:bodyPr wrap="square" lIns="0" rIns="0" tIns="0" bIns="0" anchor="t">
+            <a:spAutoFit/>
+          </a:bodyPr>
+          <a:lstStyle/>
+          <a:p>
+            <a:pPr algn="l">
+              <a:lnSpc>
+                <a:spcPct val="150000"/>
+              </a:lnSpc>
+            </a:pPr>
+            <a:r>
+              <a:rPr sz="900" b="0" spc="200">
+                <a:solidFill>
+                  <a:srgbClr val="111111"/>
+                </a:solidFill>
+                <a:latin typeface="Poppins"/>
+              </a:rPr>
+              <a:t>WHAT WE NEED FROM YOU · SIX OF EIGHT DECISIONS</a:t>
+            </a:r>
+          </a:p>
+        </p:txBody>
+      </p:sp>
+      <p:sp>
+        <p:nvSpPr>
+          <p:cNvPr id="3" name="TextBox 2"/>
+          <p:cNvSpPr txBox="1"/>
+          <p:nvPr/>
+        </p:nvSpPr>
+        <p:spPr>
+          <a:xfrm>
+            <a:off x="914400" y="1737360"/>
+            <a:ext cx="10332720" cy="2103120"/>
+          </a:xfrm>
+          <a:prstGeom prst="rect">
+            <a:avLst/>
+          </a:prstGeom>
+          <a:noFill/>
+        </p:spPr>
+        <p:txBody>
+          <a:bodyPr wrap="square" lIns="0" rIns="0" tIns="0" bIns="0" anchor="t">
+            <a:spAutoFit/>
+          </a:bodyPr>
+          <a:lstStyle/>
+          <a:p>
+            <a:pPr algn="l">
+              <a:lnSpc>
+                <a:spcPct val="112000"/>
+              </a:lnSpc>
+            </a:pPr>
+            <a:r>
+              <a:rPr sz="3800" b="0">
+                <a:solidFill>
+                  <a:srgbClr val="111111"/>
+                </a:solidFill>
+                <a:latin typeface="Poppins"/>
+              </a:rPr>
+              <a:t>The six decisions that most change the plan.</a:t>
+            </a:r>
+          </a:p>
+        </p:txBody>
+      </p:sp>
+      <p:cxnSp>
+        <p:nvCxnSpPr>
+          <p:cNvPr id="4" name="Connector 3"/>
+          <p:cNvCxnSpPr/>
+          <p:nvPr/>
+        </p:nvCxnSpPr>
+        <p:spPr>
+          <a:xfrm>
+            <a:off x="914400" y="2286000"/>
+            <a:ext cx="10332720" cy="0"/>
+          </a:xfrm>
+          <a:prstGeom prst="line">
+            <a:avLst/>
+          </a:prstGeom>
+          <a:ln w="9525">
+            <a:solidFill>
+              <a:srgbClr val="EDEBEA"/>
+            </a:solidFill>
+          </a:ln>
+        </p:spPr>
+        <p:style>
+          <a:lnRef idx="2">
+            <a:schemeClr val="accent1"/>
+          </a:lnRef>
+          <a:fillRef idx="0">
+            <a:schemeClr val="accent1"/>
+          </a:fillRef>
+          <a:effectRef idx="1">
+            <a:schemeClr val="accent1"/>
+          </a:effectRef>
+          <a:fontRef idx="minor">
+            <a:schemeClr val="tx1"/>
+          </a:fontRef>
+        </p:style>
+      </p:cxnSp>
+      <p:sp>
+        <p:nvSpPr>
+          <p:cNvPr id="5" name="TextBox 4"/>
+          <p:cNvSpPr txBox="1"/>
+          <p:nvPr/>
+        </p:nvSpPr>
+        <p:spPr>
+          <a:xfrm>
+            <a:off x="914400" y="2414016"/>
+            <a:ext cx="2834640" cy="530352"/>
+          </a:xfrm>
+          <a:prstGeom prst="rect">
+            <a:avLst/>
+          </a:prstGeom>
+          <a:noFill/>
+        </p:spPr>
+        <p:txBody>
+          <a:bodyPr wrap="square" lIns="0" rIns="0" tIns="0" bIns="0" anchor="t">
+            <a:spAutoFit/>
+          </a:bodyPr>
+          <a:lstStyle/>
+          <a:p>
+            <a:pPr algn="l">
+              <a:lnSpc>
+                <a:spcPct val="130000"/>
+              </a:lnSpc>
+            </a:pPr>
+            <a:r>
+              <a:rPr sz="1300" b="1">
+                <a:solidFill>
+                  <a:srgbClr val="111111"/>
+                </a:solidFill>
+                <a:latin typeface="Poppins"/>
+              </a:rPr>
+              <a:t>The taproom</a:t>
+            </a:r>
+          </a:p>
+        </p:txBody>
+      </p:sp>
+      <p:sp>
+        <p:nvSpPr>
+          <p:cNvPr id="6" name="TextBox 5"/>
+          <p:cNvSpPr txBox="1"/>
+          <p:nvPr/>
+        </p:nvSpPr>
+        <p:spPr>
+          <a:xfrm>
+            <a:off x="4023360" y="2414016"/>
+            <a:ext cx="7223760" cy="530352"/>
+          </a:xfrm>
+          <a:prstGeom prst="rect">
+            <a:avLst/>
+          </a:prstGeom>
+          <a:noFill/>
+        </p:spPr>
+        <p:txBody>
+          <a:bodyPr wrap="square" lIns="0" rIns="0" tIns="0" bIns="0" anchor="t">
+            <a:spAutoFit/>
+          </a:bodyPr>
+          <a:lstStyle/>
+          <a:p>
+            <a:pPr algn="l">
+              <a:lnSpc>
+                <a:spcPct val="138000"/>
+              </a:lnSpc>
+            </a:pPr>
+            <a:r>
+              <a:rPr sz="1300" b="0">
+                <a:solidFill>
+                  <a:srgbClr val="666666"/>
+                </a:solidFill>
+                <a:latin typeface="Poppins"/>
+              </a:rPr>
+              <a:t>Tasting and event venue, or keep paying for a drop in.</a:t>
+            </a:r>
+          </a:p>
+        </p:txBody>
+      </p:sp>
+      <p:cxnSp>
+        <p:nvCxnSpPr>
+          <p:cNvPr id="7" name="Connector 6"/>
+          <p:cNvCxnSpPr/>
+          <p:nvPr/>
+        </p:nvCxnSpPr>
+        <p:spPr>
+          <a:xfrm>
+            <a:off x="914400" y="2871216"/>
+            <a:ext cx="10332720" cy="0"/>
+          </a:xfrm>
+          <a:prstGeom prst="line">
+            <a:avLst/>
+          </a:prstGeom>
+          <a:ln w="9525">
+            <a:solidFill>
+              <a:srgbClr val="EDEBEA"/>
+            </a:solidFill>
+          </a:ln>
+        </p:spPr>
+        <p:style>
+          <a:lnRef idx="2">
+            <a:schemeClr val="accent1"/>
+          </a:lnRef>
+          <a:fillRef idx="0">
+            <a:schemeClr val="accent1"/>
+          </a:fillRef>
+          <a:effectRef idx="1">
+            <a:schemeClr val="accent1"/>
+          </a:effectRef>
+          <a:fontRef idx="minor">
+            <a:schemeClr val="tx1"/>
+          </a:fontRef>
+        </p:style>
+      </p:cxnSp>
+      <p:sp>
+        <p:nvSpPr>
+          <p:cNvPr id="8" name="TextBox 7"/>
+          <p:cNvSpPr txBox="1"/>
+          <p:nvPr/>
+        </p:nvSpPr>
+        <p:spPr>
+          <a:xfrm>
+            <a:off x="914400" y="2999232"/>
+            <a:ext cx="2834640" cy="530352"/>
+          </a:xfrm>
+          <a:prstGeom prst="rect">
+            <a:avLst/>
+          </a:prstGeom>
+          <a:noFill/>
+        </p:spPr>
+        <p:txBody>
+          <a:bodyPr wrap="square" lIns="0" rIns="0" tIns="0" bIns="0" anchor="t">
+            <a:spAutoFit/>
+          </a:bodyPr>
+          <a:lstStyle/>
+          <a:p>
+            <a:pPr algn="l">
+              <a:lnSpc>
+                <a:spcPct val="130000"/>
+              </a:lnSpc>
+            </a:pPr>
+            <a:r>
+              <a:rPr sz="1300" b="1">
+                <a:solidFill>
+                  <a:srgbClr val="111111"/>
+                </a:solidFill>
+                <a:latin typeface="Poppins"/>
+              </a:rPr>
+              <a:t>The range</a:t>
+            </a:r>
+          </a:p>
+        </p:txBody>
+      </p:sp>
+      <p:sp>
+        <p:nvSpPr>
+          <p:cNvPr id="9" name="TextBox 8"/>
+          <p:cNvSpPr txBox="1"/>
+          <p:nvPr/>
+        </p:nvSpPr>
+        <p:spPr>
+          <a:xfrm>
+            <a:off x="4023360" y="2999232"/>
+            <a:ext cx="7223760" cy="530352"/>
+          </a:xfrm>
+          <a:prstGeom prst="rect">
+            <a:avLst/>
+          </a:prstGeom>
+          <a:noFill/>
+        </p:spPr>
+        <p:txBody>
+          <a:bodyPr wrap="square" lIns="0" rIns="0" tIns="0" bIns="0" anchor="t">
+            <a:spAutoFit/>
+          </a:bodyPr>
+          <a:lstStyle/>
+          <a:p>
+            <a:pPr algn="l">
+              <a:lnSpc>
+                <a:spcPct val="138000"/>
+              </a:lnSpc>
+            </a:pPr>
+            <a:r>
+              <a:rPr sz="1300" b="0">
+                <a:solidFill>
+                  <a:srgbClr val="666666"/>
+                </a:solidFill>
+                <a:latin typeface="Poppins"/>
+              </a:rPr>
+              <a:t>Six core beers, or twenty seven taps.</a:t>
+            </a:r>
+          </a:p>
+        </p:txBody>
+      </p:sp>
+      <p:cxnSp>
+        <p:nvCxnSpPr>
+          <p:cNvPr id="10" name="Connector 9"/>
+          <p:cNvCxnSpPr/>
+          <p:nvPr/>
+        </p:nvCxnSpPr>
+        <p:spPr>
+          <a:xfrm>
+            <a:off x="914400" y="3456432"/>
+            <a:ext cx="10332720" cy="0"/>
+          </a:xfrm>
+          <a:prstGeom prst="line">
+            <a:avLst/>
+          </a:prstGeom>
+          <a:ln w="9525">
+            <a:solidFill>
+              <a:srgbClr val="EDEBEA"/>
+            </a:solidFill>
+          </a:ln>
+        </p:spPr>
+        <p:style>
+          <a:lnRef idx="2">
+            <a:schemeClr val="accent1"/>
+          </a:lnRef>
+          <a:fillRef idx="0">
+            <a:schemeClr val="accent1"/>
+          </a:fillRef>
+          <a:effectRef idx="1">
+            <a:schemeClr val="accent1"/>
+          </a:effectRef>
+          <a:fontRef idx="minor">
+            <a:schemeClr val="tx1"/>
+          </a:fontRef>
+        </p:style>
+      </p:cxnSp>
+      <p:sp>
+        <p:nvSpPr>
+          <p:cNvPr id="11" name="TextBox 10"/>
+          <p:cNvSpPr txBox="1"/>
+          <p:nvPr/>
+        </p:nvSpPr>
+        <p:spPr>
+          <a:xfrm>
+            <a:off x="914400" y="3584448"/>
+            <a:ext cx="2834640" cy="530352"/>
+          </a:xfrm>
+          <a:prstGeom prst="rect">
+            <a:avLst/>
+          </a:prstGeom>
+          <a:noFill/>
+        </p:spPr>
+        <p:txBody>
+          <a:bodyPr wrap="square" lIns="0" rIns="0" tIns="0" bIns="0" anchor="t">
+            <a:spAutoFit/>
+          </a:bodyPr>
+          <a:lstStyle/>
+          <a:p>
+            <a:pPr algn="l">
+              <a:lnSpc>
+                <a:spcPct val="130000"/>
+              </a:lnSpc>
+            </a:pPr>
+            <a:r>
+              <a:rPr sz="1300" b="1">
+                <a:solidFill>
+                  <a:srgbClr val="111111"/>
+                </a:solidFill>
+                <a:latin typeface="Poppins"/>
+              </a:rPr>
+              <a:t>Membership price</a:t>
+            </a:r>
+          </a:p>
+        </p:txBody>
+      </p:sp>
+      <p:sp>
+        <p:nvSpPr>
+          <p:cNvPr id="12" name="TextBox 11"/>
+          <p:cNvSpPr txBox="1"/>
+          <p:nvPr/>
+        </p:nvSpPr>
+        <p:spPr>
+          <a:xfrm>
+            <a:off x="4023360" y="3584448"/>
+            <a:ext cx="7223760" cy="530352"/>
+          </a:xfrm>
+          <a:prstGeom prst="rect">
+            <a:avLst/>
+          </a:prstGeom>
+          <a:noFill/>
+        </p:spPr>
+        <p:txBody>
+          <a:bodyPr wrap="square" lIns="0" rIns="0" tIns="0" bIns="0" anchor="t">
+            <a:spAutoFit/>
+          </a:bodyPr>
+          <a:lstStyle/>
+          <a:p>
+            <a:pPr algn="l">
+              <a:lnSpc>
+                <a:spcPct val="138000"/>
+              </a:lnSpc>
+            </a:pPr>
+            <a:r>
+              <a:rPr sz="1300" b="0">
+                <a:solidFill>
+                  <a:srgbClr val="666666"/>
+                </a:solidFill>
+                <a:latin typeface="Poppins"/>
+              </a:rPr>
+              <a:t>Two posters, two prices, both live in your venue today.</a:t>
+            </a:r>
+          </a:p>
+        </p:txBody>
+      </p:sp>
+      <p:cxnSp>
+        <p:nvCxnSpPr>
+          <p:cNvPr id="13" name="Connector 12"/>
+          <p:cNvCxnSpPr/>
+          <p:nvPr/>
+        </p:nvCxnSpPr>
+        <p:spPr>
+          <a:xfrm>
+            <a:off x="914400" y="4041648"/>
+            <a:ext cx="10332720" cy="0"/>
+          </a:xfrm>
+          <a:prstGeom prst="line">
+            <a:avLst/>
+          </a:prstGeom>
+          <a:ln w="9525">
+            <a:solidFill>
+              <a:srgbClr val="EDEBEA"/>
+            </a:solidFill>
+          </a:ln>
+        </p:spPr>
+        <p:style>
+          <a:lnRef idx="2">
+            <a:schemeClr val="accent1"/>
+          </a:lnRef>
+          <a:fillRef idx="0">
+            <a:schemeClr val="accent1"/>
+          </a:fillRef>
+          <a:effectRef idx="1">
+            <a:schemeClr val="accent1"/>
+          </a:effectRef>
+          <a:fontRef idx="minor">
+            <a:schemeClr val="tx1"/>
+          </a:fontRef>
+        </p:style>
+      </p:cxnSp>
+      <p:sp>
+        <p:nvSpPr>
+          <p:cNvPr id="14" name="TextBox 13"/>
+          <p:cNvSpPr txBox="1"/>
+          <p:nvPr/>
+        </p:nvSpPr>
+        <p:spPr>
+          <a:xfrm>
+            <a:off x="914400" y="4169663"/>
+            <a:ext cx="2834640" cy="530352"/>
+          </a:xfrm>
+          <a:prstGeom prst="rect">
+            <a:avLst/>
+          </a:prstGeom>
+          <a:noFill/>
+        </p:spPr>
+        <p:txBody>
+          <a:bodyPr wrap="square" lIns="0" rIns="0" tIns="0" bIns="0" anchor="t">
+            <a:spAutoFit/>
+          </a:bodyPr>
+          <a:lstStyle/>
+          <a:p>
+            <a:pPr algn="l">
+              <a:lnSpc>
+                <a:spcPct val="130000"/>
+              </a:lnSpc>
+            </a:pPr>
+            <a:r>
+              <a:rPr sz="1300" b="1">
+                <a:solidFill>
+                  <a:srgbClr val="111111"/>
+                </a:solidFill>
+                <a:latin typeface="Poppins"/>
+              </a:rPr>
+              <a:t>Active customer</a:t>
+            </a:r>
+          </a:p>
+        </p:txBody>
+      </p:sp>
+      <p:sp>
+        <p:nvSpPr>
+          <p:cNvPr id="15" name="TextBox 14"/>
+          <p:cNvSpPr txBox="1"/>
+          <p:nvPr/>
+        </p:nvSpPr>
+        <p:spPr>
+          <a:xfrm>
+            <a:off x="4023360" y="4169663"/>
+            <a:ext cx="7223760" cy="530352"/>
+          </a:xfrm>
+          <a:prstGeom prst="rect">
+            <a:avLst/>
+          </a:prstGeom>
+          <a:noFill/>
+        </p:spPr>
+        <p:txBody>
+          <a:bodyPr wrap="square" lIns="0" rIns="0" tIns="0" bIns="0" anchor="t">
+            <a:spAutoFit/>
+          </a:bodyPr>
+          <a:lstStyle/>
+          <a:p>
+            <a:pPr algn="l">
+              <a:lnSpc>
+                <a:spcPct val="138000"/>
+              </a:lnSpc>
+            </a:pPr>
+            <a:r>
+              <a:rPr sz="1300" b="0">
+                <a:solidFill>
+                  <a:srgbClr val="666666"/>
+                </a:solidFill>
+                <a:latin typeface="Poppins"/>
+              </a:rPr>
+              <a:t>Forty five, seventy five or ninety days. It decides every number we report.</a:t>
+            </a:r>
+          </a:p>
+        </p:txBody>
+      </p:sp>
+      <p:cxnSp>
+        <p:nvCxnSpPr>
+          <p:cNvPr id="16" name="Connector 15"/>
+          <p:cNvCxnSpPr/>
+          <p:nvPr/>
+        </p:nvCxnSpPr>
+        <p:spPr>
+          <a:xfrm>
+            <a:off x="914400" y="4626864"/>
+            <a:ext cx="10332720" cy="0"/>
+          </a:xfrm>
+          <a:prstGeom prst="line">
+            <a:avLst/>
+          </a:prstGeom>
+          <a:ln w="9525">
+            <a:solidFill>
+              <a:srgbClr val="EDEBEA"/>
+            </a:solidFill>
+          </a:ln>
+        </p:spPr>
+        <p:style>
+          <a:lnRef idx="2">
+            <a:schemeClr val="accent1"/>
+          </a:lnRef>
+          <a:fillRef idx="0">
+            <a:schemeClr val="accent1"/>
+          </a:fillRef>
+          <a:effectRef idx="1">
+            <a:schemeClr val="accent1"/>
+          </a:effectRef>
+          <a:fontRef idx="minor">
+            <a:schemeClr val="tx1"/>
+          </a:fontRef>
+        </p:style>
+      </p:cxnSp>
+      <p:sp>
+        <p:nvSpPr>
+          <p:cNvPr id="17" name="TextBox 16"/>
+          <p:cNvSpPr txBox="1"/>
+          <p:nvPr/>
+        </p:nvSpPr>
+        <p:spPr>
+          <a:xfrm>
+            <a:off x="914400" y="4754879"/>
+            <a:ext cx="2834640" cy="530352"/>
+          </a:xfrm>
+          <a:prstGeom prst="rect">
+            <a:avLst/>
+          </a:prstGeom>
+          <a:noFill/>
+        </p:spPr>
+        <p:txBody>
+          <a:bodyPr wrap="square" lIns="0" rIns="0" tIns="0" bIns="0" anchor="t">
+            <a:spAutoFit/>
+          </a:bodyPr>
+          <a:lstStyle/>
+          <a:p>
+            <a:pPr algn="l">
+              <a:lnSpc>
+                <a:spcPct val="130000"/>
+              </a:lnSpc>
+            </a:pPr>
+            <a:r>
+              <a:rPr sz="1300" b="1">
+                <a:solidFill>
+                  <a:srgbClr val="111111"/>
+                </a:solidFill>
+                <a:latin typeface="Poppins"/>
+              </a:rPr>
+              <a:t>Which plan is live</a:t>
+            </a:r>
+          </a:p>
+        </p:txBody>
+      </p:sp>
+      <p:sp>
+        <p:nvSpPr>
+          <p:cNvPr id="18" name="TextBox 17"/>
+          <p:cNvSpPr txBox="1"/>
+          <p:nvPr/>
+        </p:nvSpPr>
+        <p:spPr>
+          <a:xfrm>
+            <a:off x="4023360" y="4754879"/>
+            <a:ext cx="7223760" cy="530352"/>
+          </a:xfrm>
+          <a:prstGeom prst="rect">
+            <a:avLst/>
+          </a:prstGeom>
+          <a:noFill/>
+        </p:spPr>
+        <p:txBody>
+          <a:bodyPr wrap="square" lIns="0" rIns="0" tIns="0" bIns="0" anchor="t">
+            <a:spAutoFit/>
+          </a:bodyPr>
+          <a:lstStyle/>
+          <a:p>
+            <a:pPr algn="l">
+              <a:lnSpc>
+                <a:spcPct val="138000"/>
+              </a:lnSpc>
+            </a:pPr>
+            <a:r>
+              <a:rPr sz="1300" b="0">
+                <a:solidFill>
+                  <a:srgbClr val="666666"/>
+                </a:solidFill>
+                <a:latin typeface="Poppins"/>
+              </a:rPr>
+              <a:t>Three of your documents name three different core metrics.</a:t>
+            </a:r>
+          </a:p>
+        </p:txBody>
+      </p:sp>
+      <p:cxnSp>
+        <p:nvCxnSpPr>
+          <p:cNvPr id="19" name="Connector 18"/>
+          <p:cNvCxnSpPr/>
+          <p:nvPr/>
+        </p:nvCxnSpPr>
+        <p:spPr>
+          <a:xfrm>
+            <a:off x="914400" y="5212079"/>
+            <a:ext cx="10332720" cy="0"/>
+          </a:xfrm>
+          <a:prstGeom prst="line">
+            <a:avLst/>
+          </a:prstGeom>
+          <a:ln w="9525">
+            <a:solidFill>
+              <a:srgbClr val="EDEBEA"/>
+            </a:solidFill>
+          </a:ln>
+        </p:spPr>
+        <p:style>
+          <a:lnRef idx="2">
+            <a:schemeClr val="accent1"/>
+          </a:lnRef>
+          <a:fillRef idx="0">
+            <a:schemeClr val="accent1"/>
+          </a:fillRef>
+          <a:effectRef idx="1">
+            <a:schemeClr val="accent1"/>
+          </a:effectRef>
+          <a:fontRef idx="minor">
+            <a:schemeClr val="tx1"/>
+          </a:fontRef>
+        </p:style>
+      </p:cxnSp>
+      <p:sp>
+        <p:nvSpPr>
+          <p:cNvPr id="20" name="TextBox 19"/>
+          <p:cNvSpPr txBox="1"/>
+          <p:nvPr/>
+        </p:nvSpPr>
+        <p:spPr>
+          <a:xfrm>
+            <a:off x="914400" y="5340095"/>
+            <a:ext cx="2834640" cy="530352"/>
+          </a:xfrm>
+          <a:prstGeom prst="rect">
+            <a:avLst/>
+          </a:prstGeom>
+          <a:noFill/>
+        </p:spPr>
+        <p:txBody>
+          <a:bodyPr wrap="square" lIns="0" rIns="0" tIns="0" bIns="0" anchor="t">
+            <a:spAutoFit/>
+          </a:bodyPr>
+          <a:lstStyle/>
+          <a:p>
+            <a:pPr algn="l">
+              <a:lnSpc>
+                <a:spcPct val="130000"/>
+              </a:lnSpc>
+            </a:pPr>
+            <a:r>
+              <a:rPr sz="1300" b="1">
+                <a:solidFill>
+                  <a:srgbClr val="111111"/>
+                </a:solidFill>
+                <a:latin typeface="Poppins"/>
+              </a:rPr>
+              <a:t>Model A or B</a:t>
+            </a:r>
+          </a:p>
+        </p:txBody>
+      </p:sp>
+      <p:sp>
+        <p:nvSpPr>
+          <p:cNvPr id="21" name="TextBox 20"/>
+          <p:cNvSpPr txBox="1"/>
+          <p:nvPr/>
+        </p:nvSpPr>
+        <p:spPr>
+          <a:xfrm>
+            <a:off x="4023360" y="5340095"/>
+            <a:ext cx="7223760" cy="530352"/>
+          </a:xfrm>
+          <a:prstGeom prst="rect">
+            <a:avLst/>
+          </a:prstGeom>
+          <a:noFill/>
+        </p:spPr>
+        <p:txBody>
+          <a:bodyPr wrap="square" lIns="0" rIns="0" tIns="0" bIns="0" anchor="t">
+            <a:spAutoFit/>
+          </a:bodyPr>
+          <a:lstStyle/>
+          <a:p>
+            <a:pPr algn="l">
+              <a:lnSpc>
+                <a:spcPct val="138000"/>
+              </a:lnSpc>
+            </a:pPr>
+            <a:r>
+              <a:rPr sz="1300" b="0">
+                <a:solidFill>
+                  <a:srgbClr val="666666"/>
+                </a:solidFill>
+                <a:latin typeface="Poppins"/>
+              </a:rPr>
+              <a:t>Sell more systems, or convert the 116 who bought elsewhere.</a:t>
+            </a:r>
+          </a:p>
+        </p:txBody>
+      </p:sp>
+      <p:cxnSp>
+        <p:nvCxnSpPr>
+          <p:cNvPr id="22" name="Connector 21"/>
+          <p:cNvCxnSpPr/>
+          <p:nvPr/>
+        </p:nvCxnSpPr>
+        <p:spPr>
+          <a:xfrm>
+            <a:off x="914400" y="5797295"/>
+            <a:ext cx="10332720" cy="0"/>
+          </a:xfrm>
+          <a:prstGeom prst="line">
+            <a:avLst/>
+          </a:prstGeom>
+          <a:ln w="9525">
+            <a:solidFill>
+              <a:srgbClr val="EDEBEA"/>
+            </a:solidFill>
+          </a:ln>
+        </p:spPr>
+        <p:style>
+          <a:lnRef idx="2">
+            <a:schemeClr val="accent1"/>
+          </a:lnRef>
+          <a:fillRef idx="0">
+            <a:schemeClr val="accent1"/>
+          </a:fillRef>
+          <a:effectRef idx="1">
+            <a:schemeClr val="accent1"/>
+          </a:effectRef>
+          <a:fontRef idx="minor">
+            <a:schemeClr val="tx1"/>
+          </a:fontRef>
+        </p:style>
+      </p:cxnSp>
+      <p:sp>
+        <p:nvSpPr>
+          <p:cNvPr id="23" name="TextBox 22"/>
+          <p:cNvSpPr txBox="1"/>
+          <p:nvPr/>
+        </p:nvSpPr>
+        <p:spPr>
+          <a:xfrm>
+            <a:off x="914400" y="5925311"/>
+            <a:ext cx="2834640" cy="530352"/>
+          </a:xfrm>
+          <a:prstGeom prst="rect">
+            <a:avLst/>
+          </a:prstGeom>
+          <a:noFill/>
+        </p:spPr>
+        <p:txBody>
+          <a:bodyPr wrap="square" lIns="0" rIns="0" tIns="0" bIns="0" anchor="t">
+            <a:spAutoFit/>
+          </a:bodyPr>
+          <a:lstStyle/>
+          <a:p>
+            <a:pPr algn="l">
+              <a:lnSpc>
+                <a:spcPct val="130000"/>
+              </a:lnSpc>
+            </a:pPr>
+            <a:r>
+              <a:rPr sz="1300" b="1">
+                <a:solidFill>
+                  <a:srgbClr val="111111"/>
+                </a:solidFill>
+                <a:latin typeface="Poppins"/>
+              </a:rPr>
+              <a:t>Two more behind these</a:t>
+            </a:r>
+          </a:p>
+        </p:txBody>
+      </p:sp>
+      <p:sp>
+        <p:nvSpPr>
+          <p:cNvPr id="24" name="TextBox 23"/>
+          <p:cNvSpPr txBox="1"/>
+          <p:nvPr/>
+        </p:nvSpPr>
+        <p:spPr>
+          <a:xfrm>
+            <a:off x="4023360" y="5925311"/>
+            <a:ext cx="7223760" cy="530352"/>
+          </a:xfrm>
+          <a:prstGeom prst="rect">
+            <a:avLst/>
+          </a:prstGeom>
+          <a:noFill/>
+        </p:spPr>
+        <p:txBody>
+          <a:bodyPr wrap="square" lIns="0" rIns="0" tIns="0" bIns="0" anchor="t">
+            <a:spAutoFit/>
+          </a:bodyPr>
+          <a:lstStyle/>
+          <a:p>
+            <a:pPr algn="l">
+              <a:lnSpc>
+                <a:spcPct val="138000"/>
+              </a:lnSpc>
+            </a:pPr>
+            <a:r>
+              <a:rPr sz="1300" b="0">
+                <a:solidFill>
+                  <a:srgbClr val="666666"/>
+                </a:solidFill>
+                <a:latin typeface="Poppins"/>
+              </a:rPr>
+              <a:t>Whether cost is on the table at all, and the name against the signage.</a:t>
+            </a:r>
+          </a:p>
+        </p:txBody>
+      </p:sp>
+      <p:cxnSp>
+        <p:nvCxnSpPr>
+          <p:cNvPr id="25" name="Connector 24"/>
+          <p:cNvCxnSpPr/>
+          <p:nvPr/>
+        </p:nvCxnSpPr>
+        <p:spPr>
+          <a:xfrm>
+            <a:off x="914400" y="6382511"/>
+            <a:ext cx="10332720" cy="0"/>
+          </a:xfrm>
+          <a:prstGeom prst="line">
+            <a:avLst/>
+          </a:prstGeom>
+          <a:ln w="9525">
+            <a:solidFill>
+              <a:srgbClr val="EDEBEA"/>
+            </a:solidFill>
+          </a:ln>
+        </p:spPr>
+        <p:style>
+          <a:lnRef idx="2">
+            <a:schemeClr val="accent1"/>
+          </a:lnRef>
+          <a:fillRef idx="0">
+            <a:schemeClr val="accent1"/>
+          </a:fillRef>
+          <a:effectRef idx="1">
+            <a:schemeClr val="accent1"/>
+          </a:effectRef>
+          <a:fontRef idx="minor">
+            <a:schemeClr val="tx1"/>
+          </a:fontRef>
+        </p:style>
+      </p:cxnSp>
+    </p:spTree>
+  </p:cSld>
+  <p:clrMapOvr>
+    <a:masterClrMapping/>
+  </p:clrMapOvr>
+</p:sld>
+</file>
+
+<file path=ppt/slides/slide15.xml><?xml version="1.0" encoding="utf-8"?>
+<p:sld xmlns:a="http://schemas.openxmlformats.org/drawingml/2006/main" xmlns:p="http://schemas.openxmlformats.org/presentationml/2006/main" xmlns:r="http://schemas.openxmlformats.org/officeDocument/2006/relationships">
+  <p:cSld>
+    <p:bg>
+      <p:bgPr>
+        <a:solidFill>
+          <a:srgbClr val="FAF8F4"/>
+        </a:solidFill>
+        <a:effectLst/>
+      </p:bgPr>
+    </p:bg>
+    <p:spTree>
+      <p:nvGrpSpPr>
+        <p:cNvPr id="1" name=""/>
+        <p:cNvGrpSpPr/>
+        <p:nvPr/>
+      </p:nvGrpSpPr>
+      <p:grpSpPr/>
+      <p:sp>
+        <p:nvSpPr>
+          <p:cNvPr id="2" name="TextBox 1"/>
+          <p:cNvSpPr txBox="1"/>
+          <p:nvPr/>
+        </p:nvSpPr>
+        <p:spPr>
+          <a:xfrm>
+            <a:off x="914400" y="914400"/>
+            <a:ext cx="10332720" cy="274320"/>
+          </a:xfrm>
+          <a:prstGeom prst="rect">
+            <a:avLst/>
+          </a:prstGeom>
+          <a:noFill/>
+        </p:spPr>
+        <p:txBody>
+          <a:bodyPr wrap="square" lIns="0" rIns="0" tIns="0" bIns="0" anchor="t">
+            <a:spAutoFit/>
+          </a:bodyPr>
+          <a:lstStyle/>
+          <a:p>
+            <a:pPr algn="l">
+              <a:lnSpc>
+                <a:spcPct val="150000"/>
+              </a:lnSpc>
+            </a:pPr>
+            <a:r>
+              <a:rPr sz="900" b="0" spc="200">
+                <a:solidFill>
+                  <a:srgbClr val="111111"/>
+                </a:solidFill>
+                <a:latin typeface="Poppins"/>
+              </a:rPr>
+              <a:t>HOW THIS SPLITS</a:t>
+            </a:r>
+          </a:p>
+        </p:txBody>
+      </p:sp>
+      <p:sp>
+        <p:nvSpPr>
+          <p:cNvPr id="3" name="TextBox 2"/>
+          <p:cNvSpPr txBox="1"/>
+          <p:nvPr/>
+        </p:nvSpPr>
+        <p:spPr>
+          <a:xfrm>
+            <a:off x="914400" y="1737360"/>
+            <a:ext cx="10332720" cy="2103120"/>
+          </a:xfrm>
+          <a:prstGeom prst="rect">
+            <a:avLst/>
+          </a:prstGeom>
+          <a:noFill/>
+        </p:spPr>
+        <p:txBody>
+          <a:bodyPr wrap="square" lIns="0" rIns="0" tIns="0" bIns="0" anchor="t">
+            <a:spAutoFit/>
+          </a:bodyPr>
+          <a:lstStyle/>
+          <a:p>
+            <a:pPr algn="l">
+              <a:lnSpc>
+                <a:spcPct val="112000"/>
+              </a:lnSpc>
+            </a:pPr>
+            <a:r>
+              <a:rPr sz="3800" b="0">
+                <a:solidFill>
+                  <a:srgbClr val="111111"/>
+                </a:solidFill>
+                <a:latin typeface="Poppins"/>
+              </a:rPr>
+              <a:t>Harry takes these. We would do these for you.</a:t>
+            </a:r>
+          </a:p>
+        </p:txBody>
+      </p:sp>
+      <p:cxnSp>
+        <p:nvCxnSpPr>
+          <p:cNvPr id="4" name="Connector 3"/>
+          <p:cNvCxnSpPr/>
+          <p:nvPr/>
+        </p:nvCxnSpPr>
+        <p:spPr>
+          <a:xfrm>
+            <a:off x="914400" y="2926080"/>
+            <a:ext cx="10332720" cy="0"/>
+          </a:xfrm>
+          <a:prstGeom prst="line">
+            <a:avLst/>
+          </a:prstGeom>
+          <a:ln w="9525">
+            <a:solidFill>
+              <a:srgbClr val="EDEBEA"/>
+            </a:solidFill>
+          </a:ln>
+        </p:spPr>
+        <p:style>
+          <a:lnRef idx="2">
+            <a:schemeClr val="accent1"/>
+          </a:lnRef>
+          <a:fillRef idx="0">
+            <a:schemeClr val="accent1"/>
+          </a:fillRef>
+          <a:effectRef idx="1">
+            <a:schemeClr val="accent1"/>
+          </a:effectRef>
+          <a:fontRef idx="minor">
+            <a:schemeClr val="tx1"/>
+          </a:fontRef>
+        </p:style>
+      </p:cxnSp>
+      <p:sp>
+        <p:nvSpPr>
+          <p:cNvPr id="5" name="TextBox 4"/>
+          <p:cNvSpPr txBox="1"/>
+          <p:nvPr/>
+        </p:nvSpPr>
+        <p:spPr>
+          <a:xfrm>
+            <a:off x="914400" y="3054096"/>
+            <a:ext cx="2103120" cy="658368"/>
+          </a:xfrm>
+          <a:prstGeom prst="rect">
+            <a:avLst/>
+          </a:prstGeom>
+          <a:noFill/>
+        </p:spPr>
+        <p:txBody>
+          <a:bodyPr wrap="square" lIns="0" rIns="0" tIns="0" bIns="0" anchor="t">
+            <a:spAutoFit/>
+          </a:bodyPr>
+          <a:lstStyle/>
+          <a:p>
+            <a:pPr algn="l">
+              <a:lnSpc>
+                <a:spcPct val="130000"/>
+              </a:lnSpc>
+            </a:pPr>
+            <a:r>
+              <a:rPr sz="1300" b="1">
+                <a:solidFill>
+                  <a:srgbClr val="111111"/>
+                </a:solidFill>
+                <a:latin typeface="Poppins"/>
+              </a:rPr>
+              <a:t>Harry</a:t>
+            </a:r>
+          </a:p>
+        </p:txBody>
+      </p:sp>
+      <p:sp>
+        <p:nvSpPr>
+          <p:cNvPr id="6" name="TextBox 5"/>
+          <p:cNvSpPr txBox="1"/>
+          <p:nvPr/>
+        </p:nvSpPr>
+        <p:spPr>
+          <a:xfrm>
+            <a:off x="3291840" y="3054096"/>
+            <a:ext cx="7955280" cy="658368"/>
+          </a:xfrm>
+          <a:prstGeom prst="rect">
+            <a:avLst/>
+          </a:prstGeom>
+          <a:noFill/>
+        </p:spPr>
+        <p:txBody>
+          <a:bodyPr wrap="square" lIns="0" rIns="0" tIns="0" bIns="0" anchor="t">
+            <a:spAutoFit/>
+          </a:bodyPr>
+          <a:lstStyle/>
+          <a:p>
+            <a:pPr algn="l">
+              <a:lnSpc>
+                <a:spcPct val="138000"/>
+              </a:lnSpc>
+            </a:pPr>
+            <a:r>
+              <a:rPr sz="1300" b="0">
+                <a:solidFill>
+                  <a:srgbClr val="666666"/>
+                </a:solidFill>
+                <a:latin typeface="Poppins"/>
+              </a:rPr>
+              <a:t>Tour operator outreach. Fresh copy, photos, reviews and the award to each operator. The referral reward nobody knows about.</a:t>
+            </a:r>
+          </a:p>
+        </p:txBody>
+      </p:sp>
+      <p:cxnSp>
+        <p:nvCxnSpPr>
+          <p:cNvPr id="7" name="Connector 6"/>
+          <p:cNvCxnSpPr/>
+          <p:nvPr/>
+        </p:nvCxnSpPr>
+        <p:spPr>
+          <a:xfrm>
+            <a:off x="914400" y="3639312"/>
+            <a:ext cx="10332720" cy="0"/>
+          </a:xfrm>
+          <a:prstGeom prst="line">
+            <a:avLst/>
+          </a:prstGeom>
+          <a:ln w="9525">
+            <a:solidFill>
+              <a:srgbClr val="EDEBEA"/>
+            </a:solidFill>
+          </a:ln>
+        </p:spPr>
+        <p:style>
+          <a:lnRef idx="2">
+            <a:schemeClr val="accent1"/>
+          </a:lnRef>
+          <a:fillRef idx="0">
+            <a:schemeClr val="accent1"/>
+          </a:fillRef>
+          <a:effectRef idx="1">
+            <a:schemeClr val="accent1"/>
+          </a:effectRef>
+          <a:fontRef idx="minor">
+            <a:schemeClr val="tx1"/>
+          </a:fontRef>
+        </p:style>
+      </p:cxnSp>
+      <p:sp>
+        <p:nvSpPr>
+          <p:cNvPr id="8" name="TextBox 7"/>
+          <p:cNvSpPr txBox="1"/>
+          <p:nvPr/>
+        </p:nvSpPr>
+        <p:spPr>
+          <a:xfrm>
+            <a:off x="914400" y="3767328"/>
+            <a:ext cx="2103120" cy="658368"/>
+          </a:xfrm>
+          <a:prstGeom prst="rect">
+            <a:avLst/>
+          </a:prstGeom>
+          <a:noFill/>
+        </p:spPr>
+        <p:txBody>
+          <a:bodyPr wrap="square" lIns="0" rIns="0" tIns="0" bIns="0" anchor="t">
+            <a:spAutoFit/>
+          </a:bodyPr>
+          <a:lstStyle/>
+          <a:p>
+            <a:pPr algn="l">
+              <a:lnSpc>
+                <a:spcPct val="130000"/>
+              </a:lnSpc>
+            </a:pPr>
+            <a:r>
+              <a:rPr sz="1300" b="1">
+                <a:solidFill>
+                  <a:srgbClr val="111111"/>
+                </a:solidFill>
+                <a:latin typeface="Poppins"/>
+              </a:rPr>
+              <a:t>Justin</a:t>
+            </a:r>
+          </a:p>
+        </p:txBody>
+      </p:sp>
+      <p:sp>
+        <p:nvSpPr>
+          <p:cNvPr id="9" name="TextBox 8"/>
+          <p:cNvSpPr txBox="1"/>
+          <p:nvPr/>
+        </p:nvSpPr>
+        <p:spPr>
+          <a:xfrm>
+            <a:off x="3291840" y="3767328"/>
+            <a:ext cx="7955280" cy="658368"/>
+          </a:xfrm>
+          <a:prstGeom prst="rect">
+            <a:avLst/>
+          </a:prstGeom>
+          <a:noFill/>
+        </p:spPr>
+        <p:txBody>
+          <a:bodyPr wrap="square" lIns="0" rIns="0" tIns="0" bIns="0" anchor="t">
+            <a:spAutoFit/>
+          </a:bodyPr>
+          <a:lstStyle/>
+          <a:p>
+            <a:pPr algn="l">
+              <a:lnSpc>
+                <a:spcPct val="138000"/>
+              </a:lnSpc>
+            </a:pPr>
+            <a:r>
+              <a:rPr sz="1300" b="0">
+                <a:solidFill>
+                  <a:srgbClr val="666666"/>
+                </a:solidFill>
+                <a:latin typeface="Poppins"/>
+              </a:rPr>
+              <a:t>The Harvey Norman conversation. Wholesale structure and targets. The six decisions above.</a:t>
+            </a:r>
+          </a:p>
+        </p:txBody>
+      </p:sp>
+      <p:cxnSp>
+        <p:nvCxnSpPr>
+          <p:cNvPr id="10" name="Connector 9"/>
+          <p:cNvCxnSpPr/>
+          <p:nvPr/>
+        </p:nvCxnSpPr>
+        <p:spPr>
+          <a:xfrm>
+            <a:off x="914400" y="4352544"/>
+            <a:ext cx="10332720" cy="0"/>
+          </a:xfrm>
+          <a:prstGeom prst="line">
+            <a:avLst/>
+          </a:prstGeom>
+          <a:ln w="9525">
+            <a:solidFill>
+              <a:srgbClr val="EDEBEA"/>
+            </a:solidFill>
+          </a:ln>
+        </p:spPr>
+        <p:style>
+          <a:lnRef idx="2">
+            <a:schemeClr val="accent1"/>
+          </a:lnRef>
+          <a:fillRef idx="0">
+            <a:schemeClr val="accent1"/>
+          </a:fillRef>
+          <a:effectRef idx="1">
+            <a:schemeClr val="accent1"/>
+          </a:effectRef>
+          <a:fontRef idx="minor">
+            <a:schemeClr val="tx1"/>
+          </a:fontRef>
+        </p:style>
+      </p:cxnSp>
+      <p:sp>
+        <p:nvSpPr>
+          <p:cNvPr id="11" name="TextBox 10"/>
+          <p:cNvSpPr txBox="1"/>
+          <p:nvPr/>
+        </p:nvSpPr>
+        <p:spPr>
+          <a:xfrm>
+            <a:off x="914400" y="4480560"/>
+            <a:ext cx="2103120" cy="658368"/>
+          </a:xfrm>
+          <a:prstGeom prst="rect">
+            <a:avLst/>
+          </a:prstGeom>
+          <a:noFill/>
+        </p:spPr>
+        <p:txBody>
+          <a:bodyPr wrap="square" lIns="0" rIns="0" tIns="0" bIns="0" anchor="t">
+            <a:spAutoFit/>
+          </a:bodyPr>
+          <a:lstStyle/>
+          <a:p>
+            <a:pPr algn="l">
+              <a:lnSpc>
+                <a:spcPct val="130000"/>
+              </a:lnSpc>
+            </a:pPr>
+            <a:r>
+              <a:rPr sz="1300" b="1">
+                <a:solidFill>
+                  <a:srgbClr val="111111"/>
+                </a:solidFill>
+                <a:latin typeface="Poppins"/>
+              </a:rPr>
+              <a:t>Jewell</a:t>
+            </a:r>
+          </a:p>
+        </p:txBody>
+      </p:sp>
+      <p:sp>
+        <p:nvSpPr>
+          <p:cNvPr id="12" name="TextBox 11"/>
+          <p:cNvSpPr txBox="1"/>
+          <p:nvPr/>
+        </p:nvSpPr>
+        <p:spPr>
+          <a:xfrm>
+            <a:off x="3291840" y="4480560"/>
+            <a:ext cx="7955280" cy="658368"/>
+          </a:xfrm>
+          <a:prstGeom prst="rect">
+            <a:avLst/>
+          </a:prstGeom>
+          <a:noFill/>
+        </p:spPr>
+        <p:txBody>
+          <a:bodyPr wrap="square" lIns="0" rIns="0" tIns="0" bIns="0" anchor="t">
+            <a:spAutoFit/>
+          </a:bodyPr>
+          <a:lstStyle/>
+          <a:p>
+            <a:pPr algn="l">
+              <a:lnSpc>
+                <a:spcPct val="138000"/>
+              </a:lnSpc>
+            </a:pPr>
+            <a:r>
+              <a:rPr sz="1300" b="0">
+                <a:solidFill>
+                  <a:srgbClr val="666666"/>
+                </a:solidFill>
+                <a:latin typeface="Poppins"/>
+              </a:rPr>
+              <a:t>Database acquisition and the campaign against it. The Urban Legends booking tool. Tracking, so you can see what any of it did.</a:t>
+            </a:r>
+          </a:p>
+        </p:txBody>
+      </p:sp>
+      <p:cxnSp>
+        <p:nvCxnSpPr>
+          <p:cNvPr id="13" name="Connector 12"/>
+          <p:cNvCxnSpPr/>
+          <p:nvPr/>
+        </p:nvCxnSpPr>
+        <p:spPr>
+          <a:xfrm>
+            <a:off x="914400" y="5065776"/>
+            <a:ext cx="10332720" cy="0"/>
+          </a:xfrm>
+          <a:prstGeom prst="line">
+            <a:avLst/>
+          </a:prstGeom>
+          <a:ln w="9525">
+            <a:solidFill>
+              <a:srgbClr val="EDEBEA"/>
+            </a:solidFill>
+          </a:ln>
+        </p:spPr>
+        <p:style>
+          <a:lnRef idx="2">
+            <a:schemeClr val="accent1"/>
+          </a:lnRef>
+          <a:fillRef idx="0">
+            <a:schemeClr val="accent1"/>
+          </a:fillRef>
+          <a:effectRef idx="1">
+            <a:schemeClr val="accent1"/>
+          </a:effectRef>
+          <a:fontRef idx="minor">
+            <a:schemeClr val="tx1"/>
+          </a:fontRef>
+        </p:style>
+      </p:cxnSp>
+    </p:spTree>
+  </p:cSld>
+  <p:clrMapOvr>
+    <a:masterClrMapping/>
+  </p:clrMapOvr>
+</p:sld>
+</file>
+
+<file path=ppt/slides/slide16.xml><?xml version="1.0" encoding="utf-8"?>
+<p:sld xmlns:a="http://schemas.openxmlformats.org/drawingml/2006/main" xmlns:p="http://schemas.openxmlformats.org/presentationml/2006/main" xmlns:r="http://schemas.openxmlformats.org/officeDocument/2006/relationships">
+  <p:cSld>
+    <p:bg>
+      <p:bgPr>
+        <a:solidFill>
+          <a:srgbClr val="FAF8F4"/>
+        </a:solidFill>
+        <a:effectLst/>
+      </p:bgPr>
+    </p:bg>
+    <p:spTree>
+      <p:nvGrpSpPr>
+        <p:cNvPr id="1" name=""/>
+        <p:cNvGrpSpPr/>
+        <p:nvPr/>
+      </p:nvGrpSpPr>
+      <p:grpSpPr/>
+      <p:sp>
+        <p:nvSpPr>
+          <p:cNvPr id="2" name="TextBox 1"/>
+          <p:cNvSpPr txBox="1"/>
+          <p:nvPr/>
+        </p:nvSpPr>
+        <p:spPr>
+          <a:xfrm>
             <a:off x="914400" y="1828800"/>
             <a:ext cx="10332720" cy="1828800"/>
           </a:xfrm>
@@ -5119,7 +6725,7 @@
                 </a:solidFill>
                 <a:latin typeface="Poppins"/>
               </a:rPr>
-              <a:t>A refill business is being run with a</a:t>
+              <a:t>You are running two businesses that</a:t>
             </a:r>
           </a:p>
           <a:p>
@@ -5135,23 +6741,7 @@
                 </a:solidFill>
                 <a:latin typeface="Poppins"/>
               </a:rPr>
-              <a:t>hospitality venue's attention. And it is</a:t>
-            </a:r>
-          </a:p>
-          <a:p>
-            <a:pPr algn="l">
-              <a:lnSpc>
-                <a:spcPct val="112000"/>
-              </a:lnSpc>
-            </a:pPr>
-            <a:r>
-              <a:rPr sz="3600" b="0">
-                <a:solidFill>
-                  <a:srgbClr val="111111"/>
-                </a:solidFill>
-                <a:latin typeface="Poppins"/>
-              </a:rPr>
-              <a:t>losing money.</a:t>
+              <a:t>cancel each other out.</a:t>
             </a:r>
           </a:p>
         </p:txBody>
@@ -5762,7 +7352,7 @@
                 </a:solidFill>
                 <a:latin typeface="Poppins"/>
               </a:rPr>
-              <a:t>The refill business is built on people not coming in. So every campaign that fills the taproom fills the half that loses money. We had the taproom down as a funnel. It is at least as much a cost, and nobody has priced what carrying 27 taps actually costs you.</a:t>
+              <a:t>Refills are a subscription business. It works when people stay home and the keg runs out. The taproom is a hospitality business. It works when people come in. For eighteen months the attention went to the taproom, because a venue is visible and always urgent, and it is the half that loses money. This is not a marketing problem. It is a decision about what the taproom is for.</a:t>
             </a:r>
           </a:p>
         </p:txBody>
@@ -5827,6 +7417,149 @@
                 </a:solidFill>
                 <a:latin typeface="Poppins"/>
               </a:rPr>
+              <a:t>THE GAP UNDERNEATH EVERYTHING</a:t>
+            </a:r>
+          </a:p>
+        </p:txBody>
+      </p:sp>
+      <p:sp>
+        <p:nvSpPr>
+          <p:cNvPr id="3" name="TextBox 2"/>
+          <p:cNvSpPr txBox="1"/>
+          <p:nvPr/>
+        </p:nvSpPr>
+        <p:spPr>
+          <a:xfrm>
+            <a:off x="914400" y="1737360"/>
+            <a:ext cx="10332720" cy="2103120"/>
+          </a:xfrm>
+          <a:prstGeom prst="rect">
+            <a:avLst/>
+          </a:prstGeom>
+          <a:noFill/>
+        </p:spPr>
+        <p:txBody>
+          <a:bodyPr wrap="square" lIns="0" rIns="0" tIns="0" bIns="0" anchor="t">
+            <a:spAutoFit/>
+          </a:bodyPr>
+          <a:lstStyle/>
+          <a:p>
+            <a:pPr algn="l">
+              <a:lnSpc>
+                <a:spcPct val="112000"/>
+              </a:lnSpc>
+            </a:pPr>
+            <a:r>
+              <a:rPr sz="3800" b="0">
+                <a:solidFill>
+                  <a:srgbClr val="111111"/>
+                </a:solidFill>
+                <a:latin typeface="Poppins"/>
+              </a:rPr>
+              <a:t>Nobody has priced any of it.</a:t>
+            </a:r>
+          </a:p>
+        </p:txBody>
+      </p:sp>
+      <p:sp>
+        <p:nvSpPr>
+          <p:cNvPr id="4" name="TextBox 3"/>
+          <p:cNvSpPr txBox="1"/>
+          <p:nvPr/>
+        </p:nvSpPr>
+        <p:spPr>
+          <a:xfrm>
+            <a:off x="914400" y="4114800"/>
+            <a:ext cx="9144000" cy="2194560"/>
+          </a:xfrm>
+          <a:prstGeom prst="rect">
+            <a:avLst/>
+          </a:prstGeom>
+          <a:noFill/>
+        </p:spPr>
+        <p:txBody>
+          <a:bodyPr wrap="square" lIns="0" rIns="0" tIns="0" bIns="0" anchor="t">
+            <a:spAutoFit/>
+          </a:bodyPr>
+          <a:lstStyle/>
+          <a:p>
+            <a:pPr algn="l">
+              <a:lnSpc>
+                <a:spcPct val="155000"/>
+              </a:lnSpc>
+            </a:pPr>
+            <a:r>
+              <a:rPr sz="1400" b="0">
+                <a:solidFill>
+                  <a:srgbClr val="111111"/>
+                </a:solidFill>
+                <a:latin typeface="Poppins"/>
+              </a:rPr>
+              <a:t>There is no cost of goods, no figure for what carrying twenty seven taps costs in ingredients, kegs, storage and refrigeration, and no number for what the taproom loses each month. Until those land, everything we have written for you is a revenue plan. We would rather say that than dress it up as a business case.</a:t>
+            </a:r>
+          </a:p>
+        </p:txBody>
+      </p:sp>
+    </p:spTree>
+  </p:cSld>
+  <p:clrMapOvr>
+    <a:masterClrMapping/>
+  </p:clrMapOvr>
+</p:sld>
+</file>
+
+<file path=ppt/slides/slide6.xml><?xml version="1.0" encoding="utf-8"?>
+<p:sld xmlns:a="http://schemas.openxmlformats.org/drawingml/2006/main" xmlns:p="http://schemas.openxmlformats.org/presentationml/2006/main" xmlns:r="http://schemas.openxmlformats.org/officeDocument/2006/relationships">
+  <p:cSld>
+    <p:bg>
+      <p:bgPr>
+        <a:solidFill>
+          <a:srgbClr val="FAF8F4"/>
+        </a:solidFill>
+        <a:effectLst/>
+      </p:bgPr>
+    </p:bg>
+    <p:spTree>
+      <p:nvGrpSpPr>
+        <p:cNvPr id="1" name=""/>
+        <p:cNvGrpSpPr/>
+        <p:nvPr/>
+      </p:nvGrpSpPr>
+      <p:grpSpPr/>
+      <p:sp>
+        <p:nvSpPr>
+          <p:cNvPr id="2" name="TextBox 1"/>
+          <p:cNvSpPr txBox="1"/>
+          <p:nvPr/>
+        </p:nvSpPr>
+        <p:spPr>
+          <a:xfrm>
+            <a:off x="914400" y="914400"/>
+            <a:ext cx="10332720" cy="274320"/>
+          </a:xfrm>
+          <a:prstGeom prst="rect">
+            <a:avLst/>
+          </a:prstGeom>
+          <a:noFill/>
+        </p:spPr>
+        <p:txBody>
+          <a:bodyPr wrap="square" lIns="0" rIns="0" tIns="0" bIns="0" anchor="t">
+            <a:spAutoFit/>
+          </a:bodyPr>
+          <a:lstStyle/>
+          <a:p>
+            <a:pPr algn="l">
+              <a:lnSpc>
+                <a:spcPct val="150000"/>
+              </a:lnSpc>
+            </a:pPr>
+            <a:r>
+              <a:rPr sz="900" b="0" spc="200">
+                <a:solidFill>
+                  <a:srgbClr val="111111"/>
+                </a:solidFill>
+                <a:latin typeface="Poppins"/>
+              </a:rPr>
               <a:t>BEFORE ANYTHING ELSE</a:t>
             </a:r>
           </a:p>
@@ -6318,7 +8051,7 @@
                 </a:solidFill>
                 <a:latin typeface="Poppins"/>
               </a:rPr>
-              <a:t>Fifty self selected people cannot carry a strategy on their own.</a:t>
+              <a:t>Forty nine self selected people cannot carry a strategy on their own.</a:t>
             </a:r>
           </a:p>
         </p:txBody>
@@ -6479,7 +8212,7 @@
 </p:sld>
 </file>
 
-<file path=ppt/slides/slide6.xml><?xml version="1.0" encoding="utf-8"?>
+<file path=ppt/slides/slide7.xml><?xml version="1.0" encoding="utf-8"?>
 <p:sld xmlns:a="http://schemas.openxmlformats.org/drawingml/2006/main" xmlns:p="http://schemas.openxmlformats.org/presentationml/2006/main" xmlns:r="http://schemas.openxmlformats.org/officeDocument/2006/relationships">
   <p:cSld>
     <p:bg>
@@ -6610,165 +8343,6 @@
                 <a:latin typeface="Poppins"/>
               </a:rPr>
               <a:t>Three moves, ranked. And one we have ranked below them.</a:t>
-            </a:r>
-          </a:p>
-        </p:txBody>
-      </p:sp>
-    </p:spTree>
-  </p:cSld>
-  <p:clrMapOvr>
-    <a:masterClrMapping/>
-  </p:clrMapOvr>
-</p:sld>
-</file>
-
-<file path=ppt/slides/slide7.xml><?xml version="1.0" encoding="utf-8"?>
-<p:sld xmlns:a="http://schemas.openxmlformats.org/drawingml/2006/main" xmlns:p="http://schemas.openxmlformats.org/presentationml/2006/main" xmlns:r="http://schemas.openxmlformats.org/officeDocument/2006/relationships">
-  <p:cSld>
-    <p:bg>
-      <p:bgPr>
-        <a:solidFill>
-          <a:srgbClr val="FAF8F4"/>
-        </a:solidFill>
-        <a:effectLst/>
-      </p:bgPr>
-    </p:bg>
-    <p:spTree>
-      <p:nvGrpSpPr>
-        <p:cNvPr id="1" name=""/>
-        <p:cNvGrpSpPr/>
-        <p:nvPr/>
-      </p:nvGrpSpPr>
-      <p:grpSpPr/>
-      <p:sp>
-        <p:nvSpPr>
-          <p:cNvPr id="2" name="TextBox 1"/>
-          <p:cNvSpPr txBox="1"/>
-          <p:nvPr/>
-        </p:nvSpPr>
-        <p:spPr>
-          <a:xfrm>
-            <a:off x="914400" y="914400"/>
-            <a:ext cx="10332720" cy="274320"/>
-          </a:xfrm>
-          <a:prstGeom prst="rect">
-            <a:avLst/>
-          </a:prstGeom>
-          <a:noFill/>
-        </p:spPr>
-        <p:txBody>
-          <a:bodyPr wrap="square" lIns="0" rIns="0" tIns="0" bIns="0" anchor="t">
-            <a:spAutoFit/>
-          </a:bodyPr>
-          <a:lstStyle/>
-          <a:p>
-            <a:pPr algn="l">
-              <a:lnSpc>
-                <a:spcPct val="150000"/>
-              </a:lnSpc>
-            </a:pPr>
-            <a:r>
-              <a:rPr sz="900" b="0" spc="200">
-                <a:solidFill>
-                  <a:srgbClr val="111111"/>
-                </a:solidFill>
-                <a:latin typeface="Poppins"/>
-              </a:rPr>
-              <a:t>MOVE 01</a:t>
-            </a:r>
-          </a:p>
-        </p:txBody>
-      </p:sp>
-      <p:sp>
-        <p:nvSpPr>
-          <p:cNvPr id="3" name="TextBox 2"/>
-          <p:cNvSpPr txBox="1"/>
-          <p:nvPr/>
-        </p:nvSpPr>
-        <p:spPr>
-          <a:xfrm>
-            <a:off x="914400" y="1737360"/>
-            <a:ext cx="10332720" cy="2103120"/>
-          </a:xfrm>
-          <a:prstGeom prst="rect">
-            <a:avLst/>
-          </a:prstGeom>
-          <a:noFill/>
-        </p:spPr>
-        <p:txBody>
-          <a:bodyPr wrap="square" lIns="0" rIns="0" tIns="0" bIns="0" anchor="t">
-            <a:spAutoFit/>
-          </a:bodyPr>
-          <a:lstStyle/>
-          <a:p>
-            <a:pPr algn="l">
-              <a:lnSpc>
-                <a:spcPct val="112000"/>
-              </a:lnSpc>
-            </a:pPr>
-            <a:r>
-              <a:rPr sz="3800" b="0">
-                <a:solidFill>
-                  <a:srgbClr val="111111"/>
-                </a:solidFill>
-                <a:latin typeface="Poppins"/>
-              </a:rPr>
-              <a:t>Buy the databases of people who</a:t>
-            </a:r>
-          </a:p>
-          <a:p>
-            <a:pPr algn="l">
-              <a:lnSpc>
-                <a:spcPct val="112000"/>
-              </a:lnSpc>
-            </a:pPr>
-            <a:r>
-              <a:rPr sz="3800" b="0">
-                <a:solidFill>
-                  <a:srgbClr val="111111"/>
-                </a:solidFill>
-                <a:latin typeface="Poppins"/>
-              </a:rPr>
-              <a:t>already own a system.</a:t>
-            </a:r>
-          </a:p>
-        </p:txBody>
-      </p:sp>
-      <p:sp>
-        <p:nvSpPr>
-          <p:cNvPr id="4" name="TextBox 3"/>
-          <p:cNvSpPr txBox="1"/>
-          <p:nvPr/>
-        </p:nvSpPr>
-        <p:spPr>
-          <a:xfrm>
-            <a:off x="914400" y="4114800"/>
-            <a:ext cx="9144000" cy="2194560"/>
-          </a:xfrm>
-          <a:prstGeom prst="rect">
-            <a:avLst/>
-          </a:prstGeom>
-          <a:noFill/>
-        </p:spPr>
-        <p:txBody>
-          <a:bodyPr wrap="square" lIns="0" rIns="0" tIns="0" bIns="0" anchor="t">
-            <a:spAutoFit/>
-          </a:bodyPr>
-          <a:lstStyle/>
-          <a:p>
-            <a:pPr algn="l">
-              <a:lnSpc>
-                <a:spcPct val="155000"/>
-              </a:lnSpc>
-            </a:pPr>
-            <a:r>
-              <a:rPr sz="1400" b="0">
-                <a:solidFill>
-                  <a:srgbClr val="111111"/>
-                </a:solidFill>
-                <a:latin typeface="Poppins"/>
-              </a:rPr>
-              <a:t>Harvey Norman lists six kegerator models plus a tap unit. Keg Land, Kegmaster and BenchTop hold buyer lists of their own. Every name on those lists owns hardware, so the price of the system, the most expensive objection your marketing fights, is already cleared. At about seventy dollars gross a keg, the data pays for itself quickly.</a:t>
             </a:r>
           </a:p>
         </p:txBody>
@@ -6833,7 +8407,7 @@
                 </a:solidFill>
                 <a:latin typeface="Poppins"/>
               </a:rPr>
-              <a:t>MOVE 02</a:t>
+              <a:t>MOVE 01</a:t>
             </a:r>
           </a:p>
         </p:txBody>
@@ -6872,7 +8446,7 @@
                 </a:solidFill>
                 <a:latin typeface="Poppins"/>
               </a:rPr>
-              <a:t>Do a deal with Harvey Norman</a:t>
+              <a:t>Buy the databases of people who</a:t>
             </a:r>
           </a:p>
           <a:p>
@@ -6888,7 +8462,7 @@
                 </a:solidFill>
                 <a:latin typeface="Poppins"/>
               </a:rPr>
-              <a:t>directly.</a:t>
+              <a:t>already own a system.</a:t>
             </a:r>
           </a:p>
         </p:txBody>
@@ -6927,7 +8501,7 @@
                 </a:solidFill>
                 <a:latin typeface="Poppins"/>
               </a:rPr>
-              <a:t>A QR code at the point of sale. A referral rebate on each keg. Or a free keg with purchase if the liquor rules allow it. Monk is one of their closest allies and holds point contacts. This is a conversation, not a campaign, and it is worth having before any budget moves.</a:t>
+              <a:t>Harvey Norman lists six kegerator models plus a tap unit. Keg Land, Kegmaster and BenchTop hold buyer lists of their own. Every name on those lists owns hardware, so the price of the system, the most expensive objection your marketing fights, is already cleared. At about seventy dollars gross a keg, the data pays for itself quickly.</a:t>
             </a:r>
           </a:p>
         </p:txBody>
@@ -6992,7 +8566,7 @@
                 </a:solidFill>
                 <a:latin typeface="Poppins"/>
               </a:rPr>
-              <a:t>MOVE 03</a:t>
+              <a:t>MOVE 02</a:t>
             </a:r>
           </a:p>
         </p:txBody>
@@ -7031,7 +8605,7 @@
                 </a:solidFill>
                 <a:latin typeface="Poppins"/>
               </a:rPr>
-              <a:t>Go at the tour operators, and run</a:t>
+              <a:t>Do a deal with Harvey Norman</a:t>
             </a:r>
           </a:p>
           <a:p>
@@ -7047,7 +8621,7 @@
                 </a:solidFill>
                 <a:latin typeface="Poppins"/>
               </a:rPr>
-              <a:t>wholesale properly.</a:t>
+              <a:t>directly.</a:t>
             </a:r>
           </a:p>
         </p:txBody>
@@ -7086,7 +8660,7 @@
                 </a:solidFill>
                 <a:latin typeface="Poppins"/>
               </a:rPr>
-              <a:t>Hop On, Urban Legends and Pineapple Tours all let the customer choose which breweries to visit. So your write up decides whether you get picked, and yours does not mention Midnight in Tokyo while Balter gets the imagery. On wholesale, one commercial account is worth about ten households, and it currently has no structure, no targets and nobody carrying it.</a:t>
+              <a:t>A QR code at the point of sale. A referral rebate on each keg. Or a free keg with purchase if the liquor rules allow it. Monk is one of their closest allies and holds point contacts. This is a conversation, not a campaign, and it is worth having before any budget moves.</a:t>
             </a:r>
           </a:p>
         </p:txBody>

--- a/00 Admin/06 Presentations/JP_TapThat_WhereYouAre_v01.pptx
+++ b/00 Admin/06 Presentations/JP_TapThat_WhereYouAre_v01.pptx
@@ -20,7 +20,6 @@
     <p:sldId id="268" r:id="rId19"/>
     <p:sldId id="269" r:id="rId20"/>
     <p:sldId id="270" r:id="rId21"/>
-    <p:sldId id="271" r:id="rId22"/>
   </p:sldIdLst>
   <p:sldSz cx="12191695" cy="6858000" type="screen4x3"/>
   <p:notesSz cx="6858000" cy="9144000"/>
@@ -3343,7 +3342,7 @@
                 </a:solidFill>
                 <a:latin typeface="Poppins"/>
               </a:rPr>
-              <a:t>MOVE 03</a:t>
+              <a:t>AND ONE THAT SITS BELOW ALL THREE</a:t>
             </a:r>
           </a:p>
         </p:txBody>
@@ -3382,7 +3381,7 @@
                 </a:solidFill>
                 <a:latin typeface="Poppins"/>
               </a:rPr>
-              <a:t>Go at the tour operators, and run</a:t>
+              <a:t>Filling the taproom through social</a:t>
             </a:r>
           </a:p>
           <a:p>
@@ -3398,7 +3397,7 @@
                 </a:solidFill>
                 <a:latin typeface="Poppins"/>
               </a:rPr>
-              <a:t>wholesale properly.</a:t>
+              <a:t>media is not the lead move.</a:t>
             </a:r>
           </a:p>
         </p:txBody>
@@ -3437,7 +3436,7 @@
                 </a:solidFill>
                 <a:latin typeface="Poppins"/>
               </a:rPr>
-              <a:t>Hop On, Urban Legends and Pineapple Tours all let the customer choose which breweries to visit. So your write up decides whether you get picked, and yours does not mention Midnight in Tokyo while Balter gets the imagery. On wholesale, one commercial account is worth about ten households, and it currently has no structure, no targets and nobody carrying it.</a:t>
+              <a:t>It is the obvious thing to do and it is the wrong thing to do first. The taproom is the half of the business that loses money, and the refill model works when people stay home. Spending the marketing budget filling the room means paying twice: once for the campaign, and again for the trade it brings through the door.</a:t>
             </a:r>
           </a:p>
         </p:txBody>
@@ -3502,7 +3501,7 @@
                 </a:solidFill>
                 <a:latin typeface="Poppins"/>
               </a:rPr>
-              <a:t>AND ONE WE HAVE RANKED BELOW THEM</a:t>
+              <a:t>THE OPPORTUNITY NOBODY HAS WORKED</a:t>
             </a:r>
           </a:p>
         </p:txBody>
@@ -3541,7 +3540,7 @@
                 </a:solidFill>
                 <a:latin typeface="Poppins"/>
               </a:rPr>
-              <a:t>Pulling people into the taproom</a:t>
+              <a:t>Four in ten of your customers have</a:t>
             </a:r>
           </a:p>
           <a:p>
@@ -3557,7 +3556,7 @@
                 </a:solidFill>
                 <a:latin typeface="Poppins"/>
               </a:rPr>
-              <a:t>through social media.</a:t>
+              <a:t>quietly slowed down.</a:t>
             </a:r>
           </a:p>
         </p:txBody>
@@ -3596,7 +3595,459 @@
                 </a:solidFill>
                 <a:latin typeface="Poppins"/>
               </a:rPr>
-              <a:t>That was close to the centre of the plan we wrote for you. On this read it should not be. If the taproom is the half that loses money, spending the marketing budget filling it is the wrong instinct, however good the content is.</a:t>
+              <a:t>They have cut back on beer, not on thirst. A lighter or lower alcohol line puts something back in their taps without asking anyone to drink more. Where they are also members, they are paying for something they have stopped using.</a:t>
+            </a:r>
+          </a:p>
+        </p:txBody>
+      </p:sp>
+      <p:cxnSp>
+        <p:nvCxnSpPr>
+          <p:cNvPr id="5" name="Connector 4"/>
+          <p:cNvCxnSpPr/>
+          <p:nvPr/>
+        </p:nvCxnSpPr>
+        <p:spPr>
+          <a:xfrm>
+            <a:off x="914400" y="4023360"/>
+            <a:ext cx="2217420" cy="0"/>
+          </a:xfrm>
+          <a:prstGeom prst="line">
+            <a:avLst/>
+          </a:prstGeom>
+          <a:ln w="9525">
+            <a:solidFill>
+              <a:srgbClr val="EDEBEA"/>
+            </a:solidFill>
+          </a:ln>
+        </p:spPr>
+        <p:style>
+          <a:lnRef idx="2">
+            <a:schemeClr val="accent1"/>
+          </a:lnRef>
+          <a:fillRef idx="0">
+            <a:schemeClr val="accent1"/>
+          </a:fillRef>
+          <a:effectRef idx="1">
+            <a:schemeClr val="accent1"/>
+          </a:effectRef>
+          <a:fontRef idx="minor">
+            <a:schemeClr val="tx1"/>
+          </a:fontRef>
+        </p:style>
+      </p:cxnSp>
+      <p:sp>
+        <p:nvSpPr>
+          <p:cNvPr id="6" name="TextBox 5"/>
+          <p:cNvSpPr txBox="1"/>
+          <p:nvPr/>
+        </p:nvSpPr>
+        <p:spPr>
+          <a:xfrm>
+            <a:off x="914400" y="4187952"/>
+            <a:ext cx="2217420" cy="640080"/>
+          </a:xfrm>
+          <a:prstGeom prst="rect">
+            <a:avLst/>
+          </a:prstGeom>
+          <a:noFill/>
+        </p:spPr>
+        <p:txBody>
+          <a:bodyPr wrap="square" lIns="0" rIns="0" tIns="0" bIns="0" anchor="t">
+            <a:spAutoFit/>
+          </a:bodyPr>
+          <a:lstStyle/>
+          <a:p>
+            <a:pPr algn="l">
+              <a:lnSpc>
+                <a:spcPct val="100000"/>
+              </a:lnSpc>
+            </a:pPr>
+            <a:r>
+              <a:rPr sz="3200" b="1">
+                <a:solidFill>
+                  <a:srgbClr val="111111"/>
+                </a:solidFill>
+                <a:latin typeface="Poppins"/>
+              </a:rPr>
+              <a:t>10%</a:t>
+            </a:r>
+          </a:p>
+        </p:txBody>
+      </p:sp>
+      <p:sp>
+        <p:nvSpPr>
+          <p:cNvPr id="7" name="TextBox 6"/>
+          <p:cNvSpPr txBox="1"/>
+          <p:nvPr/>
+        </p:nvSpPr>
+        <p:spPr>
+          <a:xfrm>
+            <a:off x="914400" y="4892040"/>
+            <a:ext cx="2125980" cy="822960"/>
+          </a:xfrm>
+          <a:prstGeom prst="rect">
+            <a:avLst/>
+          </a:prstGeom>
+          <a:noFill/>
+        </p:spPr>
+        <p:txBody>
+          <a:bodyPr wrap="square" lIns="0" rIns="0" tIns="0" bIns="0" anchor="t">
+            <a:spAutoFit/>
+          </a:bodyPr>
+          <a:lstStyle/>
+          <a:p>
+            <a:pPr algn="l">
+              <a:lnSpc>
+                <a:spcPct val="135000"/>
+              </a:lnSpc>
+            </a:pPr>
+            <a:r>
+              <a:rPr sz="1100" b="0">
+                <a:solidFill>
+                  <a:srgbClr val="666666"/>
+                </a:solidFill>
+                <a:latin typeface="Poppins"/>
+              </a:rPr>
+              <a:t>Buy about every month. Already at their ceiling</a:t>
+            </a:r>
+          </a:p>
+        </p:txBody>
+      </p:sp>
+      <p:cxnSp>
+        <p:nvCxnSpPr>
+          <p:cNvPr id="8" name="Connector 7"/>
+          <p:cNvCxnSpPr/>
+          <p:nvPr/>
+        </p:nvCxnSpPr>
+        <p:spPr>
+          <a:xfrm>
+            <a:off x="3497580" y="4023360"/>
+            <a:ext cx="2217420" cy="0"/>
+          </a:xfrm>
+          <a:prstGeom prst="line">
+            <a:avLst/>
+          </a:prstGeom>
+          <a:ln w="9525">
+            <a:solidFill>
+              <a:srgbClr val="EDEBEA"/>
+            </a:solidFill>
+          </a:ln>
+        </p:spPr>
+        <p:style>
+          <a:lnRef idx="2">
+            <a:schemeClr val="accent1"/>
+          </a:lnRef>
+          <a:fillRef idx="0">
+            <a:schemeClr val="accent1"/>
+          </a:fillRef>
+          <a:effectRef idx="1">
+            <a:schemeClr val="accent1"/>
+          </a:effectRef>
+          <a:fontRef idx="minor">
+            <a:schemeClr val="tx1"/>
+          </a:fontRef>
+        </p:style>
+      </p:cxnSp>
+      <p:sp>
+        <p:nvSpPr>
+          <p:cNvPr id="9" name="TextBox 8"/>
+          <p:cNvSpPr txBox="1"/>
+          <p:nvPr/>
+        </p:nvSpPr>
+        <p:spPr>
+          <a:xfrm>
+            <a:off x="3497580" y="4187952"/>
+            <a:ext cx="2217420" cy="640080"/>
+          </a:xfrm>
+          <a:prstGeom prst="rect">
+            <a:avLst/>
+          </a:prstGeom>
+          <a:noFill/>
+        </p:spPr>
+        <p:txBody>
+          <a:bodyPr wrap="square" lIns="0" rIns="0" tIns="0" bIns="0" anchor="t">
+            <a:spAutoFit/>
+          </a:bodyPr>
+          <a:lstStyle/>
+          <a:p>
+            <a:pPr algn="l">
+              <a:lnSpc>
+                <a:spcPct val="100000"/>
+              </a:lnSpc>
+            </a:pPr>
+            <a:r>
+              <a:rPr sz="3200" b="1">
+                <a:solidFill>
+                  <a:srgbClr val="111111"/>
+                </a:solidFill>
+                <a:latin typeface="Poppins"/>
+              </a:rPr>
+              <a:t>60%</a:t>
+            </a:r>
+          </a:p>
+        </p:txBody>
+      </p:sp>
+      <p:sp>
+        <p:nvSpPr>
+          <p:cNvPr id="10" name="TextBox 9"/>
+          <p:cNvSpPr txBox="1"/>
+          <p:nvPr/>
+        </p:nvSpPr>
+        <p:spPr>
+          <a:xfrm>
+            <a:off x="3497580" y="4892040"/>
+            <a:ext cx="2125980" cy="822960"/>
+          </a:xfrm>
+          <a:prstGeom prst="rect">
+            <a:avLst/>
+          </a:prstGeom>
+          <a:noFill/>
+        </p:spPr>
+        <p:txBody>
+          <a:bodyPr wrap="square" lIns="0" rIns="0" tIns="0" bIns="0" anchor="t">
+            <a:spAutoFit/>
+          </a:bodyPr>
+          <a:lstStyle/>
+          <a:p>
+            <a:pPr algn="l">
+              <a:lnSpc>
+                <a:spcPct val="135000"/>
+              </a:lnSpc>
+            </a:pPr>
+            <a:r>
+              <a:rPr sz="1100" b="0">
+                <a:solidFill>
+                  <a:srgbClr val="666666"/>
+                </a:solidFill>
+                <a:latin typeface="Poppins"/>
+              </a:rPr>
+              <a:t>Buy about every three months. This is the core</a:t>
+            </a:r>
+          </a:p>
+        </p:txBody>
+      </p:sp>
+      <p:cxnSp>
+        <p:nvCxnSpPr>
+          <p:cNvPr id="11" name="Connector 10"/>
+          <p:cNvCxnSpPr/>
+          <p:nvPr/>
+        </p:nvCxnSpPr>
+        <p:spPr>
+          <a:xfrm>
+            <a:off x="6080760" y="4023360"/>
+            <a:ext cx="2217420" cy="0"/>
+          </a:xfrm>
+          <a:prstGeom prst="line">
+            <a:avLst/>
+          </a:prstGeom>
+          <a:ln w="9525">
+            <a:solidFill>
+              <a:srgbClr val="EDEBEA"/>
+            </a:solidFill>
+          </a:ln>
+        </p:spPr>
+        <p:style>
+          <a:lnRef idx="2">
+            <a:schemeClr val="accent1"/>
+          </a:lnRef>
+          <a:fillRef idx="0">
+            <a:schemeClr val="accent1"/>
+          </a:fillRef>
+          <a:effectRef idx="1">
+            <a:schemeClr val="accent1"/>
+          </a:effectRef>
+          <a:fontRef idx="minor">
+            <a:schemeClr val="tx1"/>
+          </a:fontRef>
+        </p:style>
+      </p:cxnSp>
+      <p:sp>
+        <p:nvSpPr>
+          <p:cNvPr id="12" name="TextBox 11"/>
+          <p:cNvSpPr txBox="1"/>
+          <p:nvPr/>
+        </p:nvSpPr>
+        <p:spPr>
+          <a:xfrm>
+            <a:off x="6080760" y="4187952"/>
+            <a:ext cx="2217420" cy="640080"/>
+          </a:xfrm>
+          <a:prstGeom prst="rect">
+            <a:avLst/>
+          </a:prstGeom>
+          <a:noFill/>
+        </p:spPr>
+        <p:txBody>
+          <a:bodyPr wrap="square" lIns="0" rIns="0" tIns="0" bIns="0" anchor="t">
+            <a:spAutoFit/>
+          </a:bodyPr>
+          <a:lstStyle/>
+          <a:p>
+            <a:pPr algn="l">
+              <a:lnSpc>
+                <a:spcPct val="100000"/>
+              </a:lnSpc>
+            </a:pPr>
+            <a:r>
+              <a:rPr sz="3200" b="1">
+                <a:solidFill>
+                  <a:srgbClr val="111111"/>
+                </a:solidFill>
+                <a:latin typeface="Poppins"/>
+              </a:rPr>
+              <a:t>40%</a:t>
+            </a:r>
+          </a:p>
+        </p:txBody>
+      </p:sp>
+      <p:sp>
+        <p:nvSpPr>
+          <p:cNvPr id="13" name="TextBox 12"/>
+          <p:cNvSpPr txBox="1"/>
+          <p:nvPr/>
+        </p:nvSpPr>
+        <p:spPr>
+          <a:xfrm>
+            <a:off x="6080760" y="4892040"/>
+            <a:ext cx="2125980" cy="822960"/>
+          </a:xfrm>
+          <a:prstGeom prst="rect">
+            <a:avLst/>
+          </a:prstGeom>
+          <a:noFill/>
+        </p:spPr>
+        <p:txBody>
+          <a:bodyPr wrap="square" lIns="0" rIns="0" tIns="0" bIns="0" anchor="t">
+            <a:spAutoFit/>
+          </a:bodyPr>
+          <a:lstStyle/>
+          <a:p>
+            <a:pPr algn="l">
+              <a:lnSpc>
+                <a:spcPct val="135000"/>
+              </a:lnSpc>
+            </a:pPr>
+            <a:r>
+              <a:rPr sz="1100" b="0">
+                <a:solidFill>
+                  <a:srgbClr val="666666"/>
+                </a:solidFill>
+                <a:latin typeface="Poppins"/>
+              </a:rPr>
+              <a:t>Take longer than that. The system is still in the backyard</a:t>
+            </a:r>
+          </a:p>
+        </p:txBody>
+      </p:sp>
+      <p:cxnSp>
+        <p:nvCxnSpPr>
+          <p:cNvPr id="14" name="Connector 13"/>
+          <p:cNvCxnSpPr/>
+          <p:nvPr/>
+        </p:nvCxnSpPr>
+        <p:spPr>
+          <a:xfrm>
+            <a:off x="8663940" y="4023360"/>
+            <a:ext cx="2217420" cy="0"/>
+          </a:xfrm>
+          <a:prstGeom prst="line">
+            <a:avLst/>
+          </a:prstGeom>
+          <a:ln w="9525">
+            <a:solidFill>
+              <a:srgbClr val="EDEBEA"/>
+            </a:solidFill>
+          </a:ln>
+        </p:spPr>
+        <p:style>
+          <a:lnRef idx="2">
+            <a:schemeClr val="accent1"/>
+          </a:lnRef>
+          <a:fillRef idx="0">
+            <a:schemeClr val="accent1"/>
+          </a:fillRef>
+          <a:effectRef idx="1">
+            <a:schemeClr val="accent1"/>
+          </a:effectRef>
+          <a:fontRef idx="minor">
+            <a:schemeClr val="tx1"/>
+          </a:fontRef>
+        </p:style>
+      </p:cxnSp>
+      <p:sp>
+        <p:nvSpPr>
+          <p:cNvPr id="15" name="TextBox 14"/>
+          <p:cNvSpPr txBox="1"/>
+          <p:nvPr/>
+        </p:nvSpPr>
+        <p:spPr>
+          <a:xfrm>
+            <a:off x="8663940" y="4187952"/>
+            <a:ext cx="2217420" cy="640080"/>
+          </a:xfrm>
+          <a:prstGeom prst="rect">
+            <a:avLst/>
+          </a:prstGeom>
+          <a:noFill/>
+        </p:spPr>
+        <p:txBody>
+          <a:bodyPr wrap="square" lIns="0" rIns="0" tIns="0" bIns="0" anchor="t">
+            <a:spAutoFit/>
+          </a:bodyPr>
+          <a:lstStyle/>
+          <a:p>
+            <a:pPr algn="l">
+              <a:lnSpc>
+                <a:spcPct val="100000"/>
+              </a:lnSpc>
+            </a:pPr>
+            <a:r>
+              <a:rPr sz="3200" b="1">
+                <a:solidFill>
+                  <a:srgbClr val="111111"/>
+                </a:solidFill>
+                <a:latin typeface="Poppins"/>
+              </a:rPr>
+              <a:t>1 in 3</a:t>
+            </a:r>
+          </a:p>
+        </p:txBody>
+      </p:sp>
+      <p:sp>
+        <p:nvSpPr>
+          <p:cNvPr id="16" name="TextBox 15"/>
+          <p:cNvSpPr txBox="1"/>
+          <p:nvPr/>
+        </p:nvSpPr>
+        <p:spPr>
+          <a:xfrm>
+            <a:off x="8663940" y="4892040"/>
+            <a:ext cx="2125980" cy="822960"/>
+          </a:xfrm>
+          <a:prstGeom prst="rect">
+            <a:avLst/>
+          </a:prstGeom>
+          <a:noFill/>
+        </p:spPr>
+        <p:txBody>
+          <a:bodyPr wrap="square" lIns="0" rIns="0" tIns="0" bIns="0" anchor="t">
+            <a:spAutoFit/>
+          </a:bodyPr>
+          <a:lstStyle/>
+          <a:p>
+            <a:pPr algn="l">
+              <a:lnSpc>
+                <a:spcPct val="135000"/>
+              </a:lnSpc>
+            </a:pPr>
+            <a:r>
+              <a:rPr sz="1100" b="0">
+                <a:solidFill>
+                  <a:srgbClr val="666666"/>
+                </a:solidFill>
+                <a:latin typeface="Poppins"/>
+              </a:rPr>
+              <a:t>Of your taps are not beer, which is the answer to this</a:t>
             </a:r>
           </a:p>
         </p:txBody>
@@ -3661,7 +4112,7 @@
                 </a:solidFill>
                 <a:latin typeface="Poppins"/>
               </a:rPr>
-              <a:t>THE OPPORTUNITY NOBODY HAS WORKED</a:t>
+              <a:t>YOUR WEBSITE</a:t>
             </a:r>
           </a:p>
         </p:txBody>
@@ -3700,7 +4151,7 @@
                 </a:solidFill>
                 <a:latin typeface="Poppins"/>
               </a:rPr>
-              <a:t>Four in ten of your customers have</a:t>
+              <a:t>Four business units, given equal</a:t>
             </a:r>
           </a:p>
           <a:p>
@@ -3716,60 +4167,21 @@
                 </a:solidFill>
                 <a:latin typeface="Poppins"/>
               </a:rPr>
-              <a:t>quietly slowed down.</a:t>
-            </a:r>
-          </a:p>
-        </p:txBody>
-      </p:sp>
-      <p:sp>
-        <p:nvSpPr>
-          <p:cNvPr id="4" name="TextBox 3"/>
-          <p:cNvSpPr txBox="1"/>
-          <p:nvPr/>
-        </p:nvSpPr>
-        <p:spPr>
-          <a:xfrm>
-            <a:off x="914400" y="4114800"/>
-            <a:ext cx="9144000" cy="2194560"/>
-          </a:xfrm>
-          <a:prstGeom prst="rect">
-            <a:avLst/>
-          </a:prstGeom>
-          <a:noFill/>
-        </p:spPr>
-        <p:txBody>
-          <a:bodyPr wrap="square" lIns="0" rIns="0" tIns="0" bIns="0" anchor="t">
-            <a:spAutoFit/>
-          </a:bodyPr>
-          <a:lstStyle/>
-          <a:p>
-            <a:pPr algn="l">
-              <a:lnSpc>
-                <a:spcPct val="155000"/>
-              </a:lnSpc>
-            </a:pPr>
-            <a:r>
-              <a:rPr sz="1400" b="0">
-                <a:solidFill>
-                  <a:srgbClr val="111111"/>
-                </a:solidFill>
-                <a:latin typeface="Poppins"/>
-              </a:rPr>
-              <a:t>They have cut back on beer, not on thirst. A lighter or lower alcohol line puts something back in their taps without asking anyone to drink more. Where they are also members, they are paying for something they have stopped using.</a:t>
+              <a:t>billing, and the award is buried.</a:t>
             </a:r>
           </a:p>
         </p:txBody>
       </p:sp>
       <p:cxnSp>
         <p:nvCxnSpPr>
-          <p:cNvPr id="5" name="Connector 4"/>
+          <p:cNvPr id="4" name="Connector 3"/>
           <p:cNvCxnSpPr/>
           <p:nvPr/>
         </p:nvCxnSpPr>
         <p:spPr>
           <a:xfrm>
-            <a:off x="914400" y="4023360"/>
-            <a:ext cx="2217420" cy="0"/>
+            <a:off x="914400" y="2651760"/>
+            <a:ext cx="10332720" cy="0"/>
           </a:xfrm>
           <a:prstGeom prst="line">
             <a:avLst/>
@@ -3797,92 +4209,92 @@
       </p:cxnSp>
       <p:sp>
         <p:nvSpPr>
+          <p:cNvPr id="5" name="TextBox 4"/>
+          <p:cNvSpPr txBox="1"/>
+          <p:nvPr/>
+        </p:nvSpPr>
+        <p:spPr>
+          <a:xfrm>
+            <a:off x="914400" y="2779776"/>
+            <a:ext cx="2468880" cy="603503"/>
+          </a:xfrm>
+          <a:prstGeom prst="rect">
+            <a:avLst/>
+          </a:prstGeom>
+          <a:noFill/>
+        </p:spPr>
+        <p:txBody>
+          <a:bodyPr wrap="square" lIns="0" rIns="0" tIns="0" bIns="0" anchor="t">
+            <a:spAutoFit/>
+          </a:bodyPr>
+          <a:lstStyle/>
+          <a:p>
+            <a:pPr algn="l">
+              <a:lnSpc>
+                <a:spcPct val="130000"/>
+              </a:lnSpc>
+            </a:pPr>
+            <a:r>
+              <a:rPr sz="1300" b="1">
+                <a:solidFill>
+                  <a:srgbClr val="111111"/>
+                </a:solidFill>
+                <a:latin typeface="Poppins"/>
+              </a:rPr>
+              <a:t>Above the fold</a:t>
+            </a:r>
+          </a:p>
+        </p:txBody>
+      </p:sp>
+      <p:sp>
+        <p:nvSpPr>
           <p:cNvPr id="6" name="TextBox 5"/>
           <p:cNvSpPr txBox="1"/>
           <p:nvPr/>
         </p:nvSpPr>
         <p:spPr>
           <a:xfrm>
-            <a:off x="914400" y="4187952"/>
-            <a:ext cx="2217420" cy="640080"/>
-          </a:xfrm>
-          <a:prstGeom prst="rect">
-            <a:avLst/>
-          </a:prstGeom>
-          <a:noFill/>
-        </p:spPr>
-        <p:txBody>
-          <a:bodyPr wrap="square" lIns="0" rIns="0" tIns="0" bIns="0" anchor="t">
-            <a:spAutoFit/>
-          </a:bodyPr>
-          <a:lstStyle/>
-          <a:p>
-            <a:pPr algn="l">
-              <a:lnSpc>
-                <a:spcPct val="100000"/>
-              </a:lnSpc>
-            </a:pPr>
-            <a:r>
-              <a:rPr sz="3200" b="1">
-                <a:solidFill>
-                  <a:srgbClr val="111111"/>
-                </a:solidFill>
-                <a:latin typeface="Poppins"/>
-              </a:rPr>
-              <a:t>10%</a:t>
-            </a:r>
-          </a:p>
-        </p:txBody>
-      </p:sp>
-      <p:sp>
-        <p:nvSpPr>
-          <p:cNvPr id="7" name="TextBox 6"/>
-          <p:cNvSpPr txBox="1"/>
-          <p:nvPr/>
-        </p:nvSpPr>
-        <p:spPr>
-          <a:xfrm>
-            <a:off x="914400" y="4892040"/>
-            <a:ext cx="2125980" cy="822960"/>
-          </a:xfrm>
-          <a:prstGeom prst="rect">
-            <a:avLst/>
-          </a:prstGeom>
-          <a:noFill/>
-        </p:spPr>
-        <p:txBody>
-          <a:bodyPr wrap="square" lIns="0" rIns="0" tIns="0" bIns="0" anchor="t">
-            <a:spAutoFit/>
-          </a:bodyPr>
-          <a:lstStyle/>
-          <a:p>
-            <a:pPr algn="l">
-              <a:lnSpc>
-                <a:spcPct val="135000"/>
-              </a:lnSpc>
-            </a:pPr>
-            <a:r>
-              <a:rPr sz="1100" b="0">
+            <a:off x="3657600" y="2779776"/>
+            <a:ext cx="7589520" cy="603503"/>
+          </a:xfrm>
+          <a:prstGeom prst="rect">
+            <a:avLst/>
+          </a:prstGeom>
+          <a:noFill/>
+        </p:spPr>
+        <p:txBody>
+          <a:bodyPr wrap="square" lIns="0" rIns="0" tIns="0" bIns="0" anchor="t">
+            <a:spAutoFit/>
+          </a:bodyPr>
+          <a:lstStyle/>
+          <a:p>
+            <a:pPr algn="l">
+              <a:lnSpc>
+                <a:spcPct val="138000"/>
+              </a:lnSpc>
+            </a:pPr>
+            <a:r>
+              <a:rPr sz="1300" b="0">
                 <a:solidFill>
                   <a:srgbClr val="666666"/>
                 </a:solidFill>
                 <a:latin typeface="Poppins"/>
               </a:rPr>
-              <a:t>Buy about every month. Already at their ceiling</a:t>
+              <a:t>Nothing arresting. The film cuts too fast to read the message under it.</a:t>
             </a:r>
           </a:p>
         </p:txBody>
       </p:sp>
       <p:cxnSp>
         <p:nvCxnSpPr>
-          <p:cNvPr id="8" name="Connector 7"/>
+          <p:cNvPr id="7" name="Connector 6"/>
           <p:cNvCxnSpPr/>
           <p:nvPr/>
         </p:nvCxnSpPr>
         <p:spPr>
           <a:xfrm>
-            <a:off x="3497580" y="4023360"/>
-            <a:ext cx="2217420" cy="0"/>
+            <a:off x="914400" y="3310128"/>
+            <a:ext cx="10332720" cy="0"/>
           </a:xfrm>
           <a:prstGeom prst="line">
             <a:avLst/>
@@ -3910,92 +4322,92 @@
       </p:cxnSp>
       <p:sp>
         <p:nvSpPr>
+          <p:cNvPr id="8" name="TextBox 7"/>
+          <p:cNvSpPr txBox="1"/>
+          <p:nvPr/>
+        </p:nvSpPr>
+        <p:spPr>
+          <a:xfrm>
+            <a:off x="914400" y="3438144"/>
+            <a:ext cx="2468880" cy="603503"/>
+          </a:xfrm>
+          <a:prstGeom prst="rect">
+            <a:avLst/>
+          </a:prstGeom>
+          <a:noFill/>
+        </p:spPr>
+        <p:txBody>
+          <a:bodyPr wrap="square" lIns="0" rIns="0" tIns="0" bIns="0" anchor="t">
+            <a:spAutoFit/>
+          </a:bodyPr>
+          <a:lstStyle/>
+          <a:p>
+            <a:pPr algn="l">
+              <a:lnSpc>
+                <a:spcPct val="130000"/>
+              </a:lnSpc>
+            </a:pPr>
+            <a:r>
+              <a:rPr sz="1300" b="1">
+                <a:solidFill>
+                  <a:srgbClr val="111111"/>
+                </a:solidFill>
+                <a:latin typeface="Poppins"/>
+              </a:rPr>
+              <a:t>The award</a:t>
+            </a:r>
+          </a:p>
+        </p:txBody>
+      </p:sp>
+      <p:sp>
+        <p:nvSpPr>
           <p:cNvPr id="9" name="TextBox 8"/>
           <p:cNvSpPr txBox="1"/>
           <p:nvPr/>
         </p:nvSpPr>
         <p:spPr>
           <a:xfrm>
-            <a:off x="3497580" y="4187952"/>
-            <a:ext cx="2217420" cy="640080"/>
-          </a:xfrm>
-          <a:prstGeom prst="rect">
-            <a:avLst/>
-          </a:prstGeom>
-          <a:noFill/>
-        </p:spPr>
-        <p:txBody>
-          <a:bodyPr wrap="square" lIns="0" rIns="0" tIns="0" bIns="0" anchor="t">
-            <a:spAutoFit/>
-          </a:bodyPr>
-          <a:lstStyle/>
-          <a:p>
-            <a:pPr algn="l">
-              <a:lnSpc>
-                <a:spcPct val="100000"/>
-              </a:lnSpc>
-            </a:pPr>
-            <a:r>
-              <a:rPr sz="3200" b="1">
-                <a:solidFill>
-                  <a:srgbClr val="111111"/>
-                </a:solidFill>
-                <a:latin typeface="Poppins"/>
-              </a:rPr>
-              <a:t>60%</a:t>
-            </a:r>
-          </a:p>
-        </p:txBody>
-      </p:sp>
-      <p:sp>
-        <p:nvSpPr>
-          <p:cNvPr id="10" name="TextBox 9"/>
-          <p:cNvSpPr txBox="1"/>
-          <p:nvPr/>
-        </p:nvSpPr>
-        <p:spPr>
-          <a:xfrm>
-            <a:off x="3497580" y="4892040"/>
-            <a:ext cx="2125980" cy="822960"/>
-          </a:xfrm>
-          <a:prstGeom prst="rect">
-            <a:avLst/>
-          </a:prstGeom>
-          <a:noFill/>
-        </p:spPr>
-        <p:txBody>
-          <a:bodyPr wrap="square" lIns="0" rIns="0" tIns="0" bIns="0" anchor="t">
-            <a:spAutoFit/>
-          </a:bodyPr>
-          <a:lstStyle/>
-          <a:p>
-            <a:pPr algn="l">
-              <a:lnSpc>
-                <a:spcPct val="135000"/>
-              </a:lnSpc>
-            </a:pPr>
-            <a:r>
-              <a:rPr sz="1100" b="0">
+            <a:off x="3657600" y="3438144"/>
+            <a:ext cx="7589520" cy="603503"/>
+          </a:xfrm>
+          <a:prstGeom prst="rect">
+            <a:avLst/>
+          </a:prstGeom>
+          <a:noFill/>
+        </p:spPr>
+        <p:txBody>
+          <a:bodyPr wrap="square" lIns="0" rIns="0" tIns="0" bIns="0" anchor="t">
+            <a:spAutoFit/>
+          </a:bodyPr>
+          <a:lstStyle/>
+          <a:p>
+            <a:pPr algn="l">
+              <a:lnSpc>
+                <a:spcPct val="138000"/>
+              </a:lnSpc>
+            </a:pPr>
+            <a:r>
+              <a:rPr sz="1300" b="0">
                 <a:solidFill>
                   <a:srgbClr val="666666"/>
                 </a:solidFill>
                 <a:latin typeface="Poppins"/>
               </a:rPr>
-              <a:t>Buy about every three months. This is the core</a:t>
+              <a:t>Brewer's Choice at Crafted is not the first thing a visitor sees. It should be.</a:t>
             </a:r>
           </a:p>
         </p:txBody>
       </p:sp>
       <p:cxnSp>
         <p:nvCxnSpPr>
-          <p:cNvPr id="11" name="Connector 10"/>
+          <p:cNvPr id="10" name="Connector 9"/>
           <p:cNvCxnSpPr/>
           <p:nvPr/>
         </p:nvCxnSpPr>
         <p:spPr>
           <a:xfrm>
-            <a:off x="6080760" y="4023360"/>
-            <a:ext cx="2217420" cy="0"/>
+            <a:off x="914400" y="3968496"/>
+            <a:ext cx="10332720" cy="0"/>
           </a:xfrm>
           <a:prstGeom prst="line">
             <a:avLst/>
@@ -4023,92 +4435,92 @@
       </p:cxnSp>
       <p:sp>
         <p:nvSpPr>
+          <p:cNvPr id="11" name="TextBox 10"/>
+          <p:cNvSpPr txBox="1"/>
+          <p:nvPr/>
+        </p:nvSpPr>
+        <p:spPr>
+          <a:xfrm>
+            <a:off x="914400" y="4096511"/>
+            <a:ext cx="2468880" cy="603503"/>
+          </a:xfrm>
+          <a:prstGeom prst="rect">
+            <a:avLst/>
+          </a:prstGeom>
+          <a:noFill/>
+        </p:spPr>
+        <p:txBody>
+          <a:bodyPr wrap="square" lIns="0" rIns="0" tIns="0" bIns="0" anchor="t">
+            <a:spAutoFit/>
+          </a:bodyPr>
+          <a:lstStyle/>
+          <a:p>
+            <a:pPr algn="l">
+              <a:lnSpc>
+                <a:spcPct val="130000"/>
+              </a:lnSpc>
+            </a:pPr>
+            <a:r>
+              <a:rPr sz="1300" b="1">
+                <a:solidFill>
+                  <a:srgbClr val="111111"/>
+                </a:solidFill>
+                <a:latin typeface="Poppins"/>
+              </a:rPr>
+              <a:t>Fits any system</a:t>
+            </a:r>
+          </a:p>
+        </p:txBody>
+      </p:sp>
+      <p:sp>
+        <p:nvSpPr>
           <p:cNvPr id="12" name="TextBox 11"/>
           <p:cNvSpPr txBox="1"/>
           <p:nvPr/>
         </p:nvSpPr>
         <p:spPr>
           <a:xfrm>
-            <a:off x="6080760" y="4187952"/>
-            <a:ext cx="2217420" cy="640080"/>
-          </a:xfrm>
-          <a:prstGeom prst="rect">
-            <a:avLst/>
-          </a:prstGeom>
-          <a:noFill/>
-        </p:spPr>
-        <p:txBody>
-          <a:bodyPr wrap="square" lIns="0" rIns="0" tIns="0" bIns="0" anchor="t">
-            <a:spAutoFit/>
-          </a:bodyPr>
-          <a:lstStyle/>
-          <a:p>
-            <a:pPr algn="l">
-              <a:lnSpc>
-                <a:spcPct val="100000"/>
-              </a:lnSpc>
-            </a:pPr>
-            <a:r>
-              <a:rPr sz="3200" b="1">
-                <a:solidFill>
-                  <a:srgbClr val="111111"/>
-                </a:solidFill>
-                <a:latin typeface="Poppins"/>
-              </a:rPr>
-              <a:t>40%</a:t>
-            </a:r>
-          </a:p>
-        </p:txBody>
-      </p:sp>
-      <p:sp>
-        <p:nvSpPr>
-          <p:cNvPr id="13" name="TextBox 12"/>
-          <p:cNvSpPr txBox="1"/>
-          <p:nvPr/>
-        </p:nvSpPr>
-        <p:spPr>
-          <a:xfrm>
-            <a:off x="6080760" y="4892040"/>
-            <a:ext cx="2125980" cy="822960"/>
-          </a:xfrm>
-          <a:prstGeom prst="rect">
-            <a:avLst/>
-          </a:prstGeom>
-          <a:noFill/>
-        </p:spPr>
-        <p:txBody>
-          <a:bodyPr wrap="square" lIns="0" rIns="0" tIns="0" bIns="0" anchor="t">
-            <a:spAutoFit/>
-          </a:bodyPr>
-          <a:lstStyle/>
-          <a:p>
-            <a:pPr algn="l">
-              <a:lnSpc>
-                <a:spcPct val="135000"/>
-              </a:lnSpc>
-            </a:pPr>
-            <a:r>
-              <a:rPr sz="1100" b="0">
+            <a:off x="3657600" y="4096511"/>
+            <a:ext cx="7589520" cy="603503"/>
+          </a:xfrm>
+          <a:prstGeom prst="rect">
+            <a:avLst/>
+          </a:prstGeom>
+          <a:noFill/>
+        </p:spPr>
+        <p:txBody>
+          <a:bodyPr wrap="square" lIns="0" rIns="0" tIns="0" bIns="0" anchor="t">
+            <a:spAutoFit/>
+          </a:bodyPr>
+          <a:lstStyle/>
+          <a:p>
+            <a:pPr algn="l">
+              <a:lnSpc>
+                <a:spcPct val="138000"/>
+              </a:lnSpc>
+            </a:pPr>
+            <a:r>
+              <a:rPr sz="1300" b="0">
                 <a:solidFill>
                   <a:srgbClr val="666666"/>
                 </a:solidFill>
                 <a:latin typeface="Poppins"/>
               </a:rPr>
-              <a:t>Take longer than that. The system is still in the backyard</a:t>
+              <a:t>Your cheapest source of customers, and the site does not say it on arrival.</a:t>
             </a:r>
           </a:p>
         </p:txBody>
       </p:sp>
       <p:cxnSp>
         <p:nvCxnSpPr>
-          <p:cNvPr id="14" name="Connector 13"/>
+          <p:cNvPr id="13" name="Connector 12"/>
           <p:cNvCxnSpPr/>
           <p:nvPr/>
         </p:nvCxnSpPr>
         <p:spPr>
           <a:xfrm>
-            <a:off x="8663940" y="4023360"/>
-            <a:ext cx="2217420" cy="0"/>
+            <a:off x="914400" y="4626864"/>
+            <a:ext cx="10332720" cy="0"/>
           </a:xfrm>
           <a:prstGeom prst="line">
             <a:avLst/>
@@ -4136,82 +4548,230 @@
       </p:cxnSp>
       <p:sp>
         <p:nvSpPr>
+          <p:cNvPr id="14" name="TextBox 13"/>
+          <p:cNvSpPr txBox="1"/>
+          <p:nvPr/>
+        </p:nvSpPr>
+        <p:spPr>
+          <a:xfrm>
+            <a:off x="914400" y="4754879"/>
+            <a:ext cx="2468880" cy="603503"/>
+          </a:xfrm>
+          <a:prstGeom prst="rect">
+            <a:avLst/>
+          </a:prstGeom>
+          <a:noFill/>
+        </p:spPr>
+        <p:txBody>
+          <a:bodyPr wrap="square" lIns="0" rIns="0" tIns="0" bIns="0" anchor="t">
+            <a:spAutoFit/>
+          </a:bodyPr>
+          <a:lstStyle/>
+          <a:p>
+            <a:pPr algn="l">
+              <a:lnSpc>
+                <a:spcPct val="130000"/>
+              </a:lnSpc>
+            </a:pPr>
+            <a:r>
+              <a:rPr sz="1300" b="1">
+                <a:solidFill>
+                  <a:srgbClr val="111111"/>
+                </a:solidFill>
+                <a:latin typeface="Poppins"/>
+              </a:rPr>
+              <a:t>Reviews</a:t>
+            </a:r>
+          </a:p>
+        </p:txBody>
+      </p:sp>
+      <p:sp>
+        <p:nvSpPr>
           <p:cNvPr id="15" name="TextBox 14"/>
           <p:cNvSpPr txBox="1"/>
           <p:nvPr/>
         </p:nvSpPr>
         <p:spPr>
           <a:xfrm>
-            <a:off x="8663940" y="4187952"/>
-            <a:ext cx="2217420" cy="640080"/>
-          </a:xfrm>
-          <a:prstGeom prst="rect">
-            <a:avLst/>
-          </a:prstGeom>
-          <a:noFill/>
-        </p:spPr>
-        <p:txBody>
-          <a:bodyPr wrap="square" lIns="0" rIns="0" tIns="0" bIns="0" anchor="t">
-            <a:spAutoFit/>
-          </a:bodyPr>
-          <a:lstStyle/>
-          <a:p>
-            <a:pPr algn="l">
-              <a:lnSpc>
-                <a:spcPct val="100000"/>
-              </a:lnSpc>
-            </a:pPr>
-            <a:r>
-              <a:rPr sz="3200" b="1">
+            <a:off x="3657600" y="4754879"/>
+            <a:ext cx="7589520" cy="603503"/>
+          </a:xfrm>
+          <a:prstGeom prst="rect">
+            <a:avLst/>
+          </a:prstGeom>
+          <a:noFill/>
+        </p:spPr>
+        <p:txBody>
+          <a:bodyPr wrap="square" lIns="0" rIns="0" tIns="0" bIns="0" anchor="t">
+            <a:spAutoFit/>
+          </a:bodyPr>
+          <a:lstStyle/>
+          <a:p>
+            <a:pPr algn="l">
+              <a:lnSpc>
+                <a:spcPct val="138000"/>
+              </a:lnSpc>
+            </a:pPr>
+            <a:r>
+              <a:rPr sz="1300" b="0">
+                <a:solidFill>
+                  <a:srgbClr val="666666"/>
+                </a:solidFill>
+                <a:latin typeface="Poppins"/>
+              </a:rPr>
+              <a:t>Behind click dots that do not scroll, so nobody reaches them.</a:t>
+            </a:r>
+          </a:p>
+        </p:txBody>
+      </p:sp>
+      <p:cxnSp>
+        <p:nvCxnSpPr>
+          <p:cNvPr id="16" name="Connector 15"/>
+          <p:cNvCxnSpPr/>
+          <p:nvPr/>
+        </p:nvCxnSpPr>
+        <p:spPr>
+          <a:xfrm>
+            <a:off x="914400" y="5285231"/>
+            <a:ext cx="10332720" cy="0"/>
+          </a:xfrm>
+          <a:prstGeom prst="line">
+            <a:avLst/>
+          </a:prstGeom>
+          <a:ln w="9525">
+            <a:solidFill>
+              <a:srgbClr val="EDEBEA"/>
+            </a:solidFill>
+          </a:ln>
+        </p:spPr>
+        <p:style>
+          <a:lnRef idx="2">
+            <a:schemeClr val="accent1"/>
+          </a:lnRef>
+          <a:fillRef idx="0">
+            <a:schemeClr val="accent1"/>
+          </a:fillRef>
+          <a:effectRef idx="1">
+            <a:schemeClr val="accent1"/>
+          </a:effectRef>
+          <a:fontRef idx="minor">
+            <a:schemeClr val="tx1"/>
+          </a:fontRef>
+        </p:style>
+      </p:cxnSp>
+      <p:sp>
+        <p:nvSpPr>
+          <p:cNvPr id="17" name="TextBox 16"/>
+          <p:cNvSpPr txBox="1"/>
+          <p:nvPr/>
+        </p:nvSpPr>
+        <p:spPr>
+          <a:xfrm>
+            <a:off x="914400" y="5413247"/>
+            <a:ext cx="2468880" cy="603503"/>
+          </a:xfrm>
+          <a:prstGeom prst="rect">
+            <a:avLst/>
+          </a:prstGeom>
+          <a:noFill/>
+        </p:spPr>
+        <p:txBody>
+          <a:bodyPr wrap="square" lIns="0" rIns="0" tIns="0" bIns="0" anchor="t">
+            <a:spAutoFit/>
+          </a:bodyPr>
+          <a:lstStyle/>
+          <a:p>
+            <a:pPr algn="l">
+              <a:lnSpc>
+                <a:spcPct val="130000"/>
+              </a:lnSpc>
+            </a:pPr>
+            <a:r>
+              <a:rPr sz="1300" b="1">
                 <a:solidFill>
                   <a:srgbClr val="111111"/>
                 </a:solidFill>
                 <a:latin typeface="Poppins"/>
               </a:rPr>
-              <a:t>1 in 3</a:t>
-            </a:r>
-          </a:p>
-        </p:txBody>
-      </p:sp>
-      <p:sp>
-        <p:nvSpPr>
-          <p:cNvPr id="16" name="TextBox 15"/>
-          <p:cNvSpPr txBox="1"/>
-          <p:nvPr/>
-        </p:nvSpPr>
-        <p:spPr>
-          <a:xfrm>
-            <a:off x="8663940" y="4892040"/>
-            <a:ext cx="2125980" cy="822960"/>
-          </a:xfrm>
-          <a:prstGeom prst="rect">
-            <a:avLst/>
-          </a:prstGeom>
-          <a:noFill/>
-        </p:spPr>
-        <p:txBody>
-          <a:bodyPr wrap="square" lIns="0" rIns="0" tIns="0" bIns="0" anchor="t">
-            <a:spAutoFit/>
-          </a:bodyPr>
-          <a:lstStyle/>
-          <a:p>
-            <a:pPr algn="l">
-              <a:lnSpc>
-                <a:spcPct val="135000"/>
-              </a:lnSpc>
-            </a:pPr>
-            <a:r>
-              <a:rPr sz="1100" b="0">
+              <a:t>Wholesale</a:t>
+            </a:r>
+          </a:p>
+        </p:txBody>
+      </p:sp>
+      <p:sp>
+        <p:nvSpPr>
+          <p:cNvPr id="18" name="TextBox 17"/>
+          <p:cNvSpPr txBox="1"/>
+          <p:nvPr/>
+        </p:nvSpPr>
+        <p:spPr>
+          <a:xfrm>
+            <a:off x="3657600" y="5413247"/>
+            <a:ext cx="7589520" cy="603503"/>
+          </a:xfrm>
+          <a:prstGeom prst="rect">
+            <a:avLst/>
+          </a:prstGeom>
+          <a:noFill/>
+        </p:spPr>
+        <p:txBody>
+          <a:bodyPr wrap="square" lIns="0" rIns="0" tIns="0" bIns="0" anchor="t">
+            <a:spAutoFit/>
+          </a:bodyPr>
+          <a:lstStyle/>
+          <a:p>
+            <a:pPr algn="l">
+              <a:lnSpc>
+                <a:spcPct val="138000"/>
+              </a:lnSpc>
+            </a:pPr>
+            <a:r>
+              <a:rPr sz="1300" b="0">
                 <a:solidFill>
                   <a:srgbClr val="666666"/>
                 </a:solidFill>
                 <a:latin typeface="Poppins"/>
               </a:rPr>
-              <a:t>Of your taps are not beer, which is the answer to this</a:t>
-            </a:r>
-          </a:p>
-        </p:txBody>
-      </p:sp>
+              <a:t>No margin argument, no white label, no cuisine matching. Nothing to say yes to.</a:t>
+            </a:r>
+          </a:p>
+        </p:txBody>
+      </p:sp>
+      <p:cxnSp>
+        <p:nvCxnSpPr>
+          <p:cNvPr id="19" name="Connector 18"/>
+          <p:cNvCxnSpPr/>
+          <p:nvPr/>
+        </p:nvCxnSpPr>
+        <p:spPr>
+          <a:xfrm>
+            <a:off x="914400" y="5943599"/>
+            <a:ext cx="10332720" cy="0"/>
+          </a:xfrm>
+          <a:prstGeom prst="line">
+            <a:avLst/>
+          </a:prstGeom>
+          <a:ln w="9525">
+            <a:solidFill>
+              <a:srgbClr val="EDEBEA"/>
+            </a:solidFill>
+          </a:ln>
+        </p:spPr>
+        <p:style>
+          <a:lnRef idx="2">
+            <a:schemeClr val="accent1"/>
+          </a:lnRef>
+          <a:fillRef idx="0">
+            <a:schemeClr val="accent1"/>
+          </a:fillRef>
+          <a:effectRef idx="1">
+            <a:schemeClr val="accent1"/>
+          </a:effectRef>
+          <a:fontRef idx="minor">
+            <a:schemeClr val="tx1"/>
+          </a:fontRef>
+        </p:style>
+      </p:cxnSp>
     </p:spTree>
   </p:cSld>
   <p:clrMapOvr>
@@ -4272,7 +4832,7 @@
                 </a:solidFill>
                 <a:latin typeface="Poppins"/>
               </a:rPr>
-              <a:t>YOUR WEBSITE</a:t>
+              <a:t>WHAT WE NEED FROM YOU · SIX OF EIGHT DECISIONS</a:t>
             </a:r>
           </a:p>
         </p:txBody>
@@ -4311,23 +4871,7 @@
                 </a:solidFill>
                 <a:latin typeface="Poppins"/>
               </a:rPr>
-              <a:t>Four business units, given equal</a:t>
-            </a:r>
-          </a:p>
-          <a:p>
-            <a:pPr algn="l">
-              <a:lnSpc>
-                <a:spcPct val="112000"/>
-              </a:lnSpc>
-            </a:pPr>
-            <a:r>
-              <a:rPr sz="3800" b="0">
-                <a:solidFill>
-                  <a:srgbClr val="111111"/>
-                </a:solidFill>
-                <a:latin typeface="Poppins"/>
-              </a:rPr>
-              <a:t>billing, and the award is buried.</a:t>
+              <a:t>The six decisions that most change the plan.</a:t>
             </a:r>
           </a:p>
         </p:txBody>
@@ -4340,7 +4884,7 @@
         </p:nvCxnSpPr>
         <p:spPr>
           <a:xfrm>
-            <a:off x="914400" y="2651760"/>
+            <a:off x="914400" y="2286000"/>
             <a:ext cx="10332720" cy="0"/>
           </a:xfrm>
           <a:prstGeom prst="line">
@@ -4375,8 +4919,8 @@
         </p:nvSpPr>
         <p:spPr>
           <a:xfrm>
-            <a:off x="914400" y="2779776"/>
-            <a:ext cx="2468880" cy="603503"/>
+            <a:off x="914400" y="2414016"/>
+            <a:ext cx="2834640" cy="530352"/>
           </a:xfrm>
           <a:prstGeom prst="rect">
             <a:avLst/>
@@ -4401,7 +4945,7 @@
                 </a:solidFill>
                 <a:latin typeface="Poppins"/>
               </a:rPr>
-              <a:t>Above the fold</a:t>
+              <a:t>The taproom</a:t>
             </a:r>
           </a:p>
         </p:txBody>
@@ -4414,8 +4958,8 @@
         </p:nvSpPr>
         <p:spPr>
           <a:xfrm>
-            <a:off x="3657600" y="2779776"/>
-            <a:ext cx="7589520" cy="603503"/>
+            <a:off x="4023360" y="2414016"/>
+            <a:ext cx="7223760" cy="530352"/>
           </a:xfrm>
           <a:prstGeom prst="rect">
             <a:avLst/>
@@ -4440,7 +4984,7 @@
                 </a:solidFill>
                 <a:latin typeface="Poppins"/>
               </a:rPr>
-              <a:t>Nothing arresting. The film cuts too fast to read the message under it.</a:t>
+              <a:t>Tasting and event venue, or keep paying for a drop in.</a:t>
             </a:r>
           </a:p>
         </p:txBody>
@@ -4453,7 +4997,7 @@
         </p:nvCxnSpPr>
         <p:spPr>
           <a:xfrm>
-            <a:off x="914400" y="3310128"/>
+            <a:off x="914400" y="2871216"/>
             <a:ext cx="10332720" cy="0"/>
           </a:xfrm>
           <a:prstGeom prst="line">
@@ -4488,8 +5032,8 @@
         </p:nvSpPr>
         <p:spPr>
           <a:xfrm>
-            <a:off x="914400" y="3438144"/>
-            <a:ext cx="2468880" cy="603503"/>
+            <a:off x="914400" y="2999232"/>
+            <a:ext cx="2834640" cy="530352"/>
           </a:xfrm>
           <a:prstGeom prst="rect">
             <a:avLst/>
@@ -4514,7 +5058,7 @@
                 </a:solidFill>
                 <a:latin typeface="Poppins"/>
               </a:rPr>
-              <a:t>The award</a:t>
+              <a:t>The range</a:t>
             </a:r>
           </a:p>
         </p:txBody>
@@ -4527,8 +5071,8 @@
         </p:nvSpPr>
         <p:spPr>
           <a:xfrm>
-            <a:off x="3657600" y="3438144"/>
-            <a:ext cx="7589520" cy="603503"/>
+            <a:off x="4023360" y="2999232"/>
+            <a:ext cx="7223760" cy="530352"/>
           </a:xfrm>
           <a:prstGeom prst="rect">
             <a:avLst/>
@@ -4553,7 +5097,7 @@
                 </a:solidFill>
                 <a:latin typeface="Poppins"/>
               </a:rPr>
-              <a:t>Brewer's Choice at Crafted is not the first thing a visitor sees. It should be.</a:t>
+              <a:t>Six core beers, or twenty seven taps.</a:t>
             </a:r>
           </a:p>
         </p:txBody>
@@ -4566,7 +5110,7 @@
         </p:nvCxnSpPr>
         <p:spPr>
           <a:xfrm>
-            <a:off x="914400" y="3968496"/>
+            <a:off x="914400" y="3456432"/>
             <a:ext cx="10332720" cy="0"/>
           </a:xfrm>
           <a:prstGeom prst="line">
@@ -4601,8 +5145,8 @@
         </p:nvSpPr>
         <p:spPr>
           <a:xfrm>
-            <a:off x="914400" y="4096511"/>
-            <a:ext cx="2468880" cy="603503"/>
+            <a:off x="914400" y="3584448"/>
+            <a:ext cx="2834640" cy="530352"/>
           </a:xfrm>
           <a:prstGeom prst="rect">
             <a:avLst/>
@@ -4627,7 +5171,7 @@
                 </a:solidFill>
                 <a:latin typeface="Poppins"/>
               </a:rPr>
-              <a:t>Fits any system</a:t>
+              <a:t>Membership price</a:t>
             </a:r>
           </a:p>
         </p:txBody>
@@ -4640,8 +5184,8 @@
         </p:nvSpPr>
         <p:spPr>
           <a:xfrm>
-            <a:off x="3657600" y="4096511"/>
-            <a:ext cx="7589520" cy="603503"/>
+            <a:off x="4023360" y="3584448"/>
+            <a:ext cx="7223760" cy="530352"/>
           </a:xfrm>
           <a:prstGeom prst="rect">
             <a:avLst/>
@@ -4666,7 +5210,7 @@
                 </a:solidFill>
                 <a:latin typeface="Poppins"/>
               </a:rPr>
-              <a:t>Your cheapest source of customers, and the site does not say it on arrival.</a:t>
+              <a:t>Two posters, two prices, both live in your venue today.</a:t>
             </a:r>
           </a:p>
         </p:txBody>
@@ -4679,7 +5223,7 @@
         </p:nvCxnSpPr>
         <p:spPr>
           <a:xfrm>
-            <a:off x="914400" y="4626864"/>
+            <a:off x="914400" y="4041648"/>
             <a:ext cx="10332720" cy="0"/>
           </a:xfrm>
           <a:prstGeom prst="line">
@@ -4714,8 +5258,8 @@
         </p:nvSpPr>
         <p:spPr>
           <a:xfrm>
-            <a:off x="914400" y="4754879"/>
-            <a:ext cx="2468880" cy="603503"/>
+            <a:off x="914400" y="4169663"/>
+            <a:ext cx="2834640" cy="530352"/>
           </a:xfrm>
           <a:prstGeom prst="rect">
             <a:avLst/>
@@ -4740,7 +5284,7 @@
                 </a:solidFill>
                 <a:latin typeface="Poppins"/>
               </a:rPr>
-              <a:t>Reviews</a:t>
+              <a:t>Active customer</a:t>
             </a:r>
           </a:p>
         </p:txBody>
@@ -4753,8 +5297,8 @@
         </p:nvSpPr>
         <p:spPr>
           <a:xfrm>
-            <a:off x="3657600" y="4754879"/>
-            <a:ext cx="7589520" cy="603503"/>
+            <a:off x="4023360" y="4169663"/>
+            <a:ext cx="7223760" cy="530352"/>
           </a:xfrm>
           <a:prstGeom prst="rect">
             <a:avLst/>
@@ -4779,7 +5323,7 @@
                 </a:solidFill>
                 <a:latin typeface="Poppins"/>
               </a:rPr>
-              <a:t>Behind click dots that do not scroll, so nobody reaches them.</a:t>
+              <a:t>Forty five, seventy five or ninety days. It decides every number we report.</a:t>
             </a:r>
           </a:p>
         </p:txBody>
@@ -4792,7 +5336,7 @@
         </p:nvCxnSpPr>
         <p:spPr>
           <a:xfrm>
-            <a:off x="914400" y="5285231"/>
+            <a:off x="914400" y="4626864"/>
             <a:ext cx="10332720" cy="0"/>
           </a:xfrm>
           <a:prstGeom prst="line">
@@ -4827,8 +5371,8 @@
         </p:nvSpPr>
         <p:spPr>
           <a:xfrm>
-            <a:off x="914400" y="5413247"/>
-            <a:ext cx="2468880" cy="603503"/>
+            <a:off x="914400" y="4754879"/>
+            <a:ext cx="2834640" cy="530352"/>
           </a:xfrm>
           <a:prstGeom prst="rect">
             <a:avLst/>
@@ -4853,7 +5397,7 @@
                 </a:solidFill>
                 <a:latin typeface="Poppins"/>
               </a:rPr>
-              <a:t>Wholesale</a:t>
+              <a:t>Which plan is live</a:t>
             </a:r>
           </a:p>
         </p:txBody>
@@ -4866,8 +5410,8 @@
         </p:nvSpPr>
         <p:spPr>
           <a:xfrm>
-            <a:off x="3657600" y="5413247"/>
-            <a:ext cx="7589520" cy="603503"/>
+            <a:off x="4023360" y="4754879"/>
+            <a:ext cx="7223760" cy="530352"/>
           </a:xfrm>
           <a:prstGeom prst="rect">
             <a:avLst/>
@@ -4892,7 +5436,7 @@
                 </a:solidFill>
                 <a:latin typeface="Poppins"/>
               </a:rPr>
-              <a:t>No margin argument, no white label, no cuisine matching. Nothing to say yes to.</a:t>
+              <a:t>Three of your documents name three different core metrics.</a:t>
             </a:r>
           </a:p>
         </p:txBody>
@@ -4905,7 +5449,233 @@
         </p:nvCxnSpPr>
         <p:spPr>
           <a:xfrm>
-            <a:off x="914400" y="5943599"/>
+            <a:off x="914400" y="5212079"/>
+            <a:ext cx="10332720" cy="0"/>
+          </a:xfrm>
+          <a:prstGeom prst="line">
+            <a:avLst/>
+          </a:prstGeom>
+          <a:ln w="9525">
+            <a:solidFill>
+              <a:srgbClr val="EDEBEA"/>
+            </a:solidFill>
+          </a:ln>
+        </p:spPr>
+        <p:style>
+          <a:lnRef idx="2">
+            <a:schemeClr val="accent1"/>
+          </a:lnRef>
+          <a:fillRef idx="0">
+            <a:schemeClr val="accent1"/>
+          </a:fillRef>
+          <a:effectRef idx="1">
+            <a:schemeClr val="accent1"/>
+          </a:effectRef>
+          <a:fontRef idx="minor">
+            <a:schemeClr val="tx1"/>
+          </a:fontRef>
+        </p:style>
+      </p:cxnSp>
+      <p:sp>
+        <p:nvSpPr>
+          <p:cNvPr id="20" name="TextBox 19"/>
+          <p:cNvSpPr txBox="1"/>
+          <p:nvPr/>
+        </p:nvSpPr>
+        <p:spPr>
+          <a:xfrm>
+            <a:off x="914400" y="5340095"/>
+            <a:ext cx="2834640" cy="530352"/>
+          </a:xfrm>
+          <a:prstGeom prst="rect">
+            <a:avLst/>
+          </a:prstGeom>
+          <a:noFill/>
+        </p:spPr>
+        <p:txBody>
+          <a:bodyPr wrap="square" lIns="0" rIns="0" tIns="0" bIns="0" anchor="t">
+            <a:spAutoFit/>
+          </a:bodyPr>
+          <a:lstStyle/>
+          <a:p>
+            <a:pPr algn="l">
+              <a:lnSpc>
+                <a:spcPct val="130000"/>
+              </a:lnSpc>
+            </a:pPr>
+            <a:r>
+              <a:rPr sz="1300" b="1">
+                <a:solidFill>
+                  <a:srgbClr val="111111"/>
+                </a:solidFill>
+                <a:latin typeface="Poppins"/>
+              </a:rPr>
+              <a:t>Model A or B</a:t>
+            </a:r>
+          </a:p>
+        </p:txBody>
+      </p:sp>
+      <p:sp>
+        <p:nvSpPr>
+          <p:cNvPr id="21" name="TextBox 20"/>
+          <p:cNvSpPr txBox="1"/>
+          <p:nvPr/>
+        </p:nvSpPr>
+        <p:spPr>
+          <a:xfrm>
+            <a:off x="4023360" y="5340095"/>
+            <a:ext cx="7223760" cy="530352"/>
+          </a:xfrm>
+          <a:prstGeom prst="rect">
+            <a:avLst/>
+          </a:prstGeom>
+          <a:noFill/>
+        </p:spPr>
+        <p:txBody>
+          <a:bodyPr wrap="square" lIns="0" rIns="0" tIns="0" bIns="0" anchor="t">
+            <a:spAutoFit/>
+          </a:bodyPr>
+          <a:lstStyle/>
+          <a:p>
+            <a:pPr algn="l">
+              <a:lnSpc>
+                <a:spcPct val="138000"/>
+              </a:lnSpc>
+            </a:pPr>
+            <a:r>
+              <a:rPr sz="1300" b="0">
+                <a:solidFill>
+                  <a:srgbClr val="666666"/>
+                </a:solidFill>
+                <a:latin typeface="Poppins"/>
+              </a:rPr>
+              <a:t>Sell more systems, or convert the 116 who bought elsewhere.</a:t>
+            </a:r>
+          </a:p>
+        </p:txBody>
+      </p:sp>
+      <p:cxnSp>
+        <p:nvCxnSpPr>
+          <p:cNvPr id="22" name="Connector 21"/>
+          <p:cNvCxnSpPr/>
+          <p:nvPr/>
+        </p:nvCxnSpPr>
+        <p:spPr>
+          <a:xfrm>
+            <a:off x="914400" y="5797295"/>
+            <a:ext cx="10332720" cy="0"/>
+          </a:xfrm>
+          <a:prstGeom prst="line">
+            <a:avLst/>
+          </a:prstGeom>
+          <a:ln w="9525">
+            <a:solidFill>
+              <a:srgbClr val="EDEBEA"/>
+            </a:solidFill>
+          </a:ln>
+        </p:spPr>
+        <p:style>
+          <a:lnRef idx="2">
+            <a:schemeClr val="accent1"/>
+          </a:lnRef>
+          <a:fillRef idx="0">
+            <a:schemeClr val="accent1"/>
+          </a:fillRef>
+          <a:effectRef idx="1">
+            <a:schemeClr val="accent1"/>
+          </a:effectRef>
+          <a:fontRef idx="minor">
+            <a:schemeClr val="tx1"/>
+          </a:fontRef>
+        </p:style>
+      </p:cxnSp>
+      <p:sp>
+        <p:nvSpPr>
+          <p:cNvPr id="23" name="TextBox 22"/>
+          <p:cNvSpPr txBox="1"/>
+          <p:nvPr/>
+        </p:nvSpPr>
+        <p:spPr>
+          <a:xfrm>
+            <a:off x="914400" y="5925311"/>
+            <a:ext cx="2834640" cy="530352"/>
+          </a:xfrm>
+          <a:prstGeom prst="rect">
+            <a:avLst/>
+          </a:prstGeom>
+          <a:noFill/>
+        </p:spPr>
+        <p:txBody>
+          <a:bodyPr wrap="square" lIns="0" rIns="0" tIns="0" bIns="0" anchor="t">
+            <a:spAutoFit/>
+          </a:bodyPr>
+          <a:lstStyle/>
+          <a:p>
+            <a:pPr algn="l">
+              <a:lnSpc>
+                <a:spcPct val="130000"/>
+              </a:lnSpc>
+            </a:pPr>
+            <a:r>
+              <a:rPr sz="1300" b="1">
+                <a:solidFill>
+                  <a:srgbClr val="111111"/>
+                </a:solidFill>
+                <a:latin typeface="Poppins"/>
+              </a:rPr>
+              <a:t>Two more behind these</a:t>
+            </a:r>
+          </a:p>
+        </p:txBody>
+      </p:sp>
+      <p:sp>
+        <p:nvSpPr>
+          <p:cNvPr id="24" name="TextBox 23"/>
+          <p:cNvSpPr txBox="1"/>
+          <p:nvPr/>
+        </p:nvSpPr>
+        <p:spPr>
+          <a:xfrm>
+            <a:off x="4023360" y="5925311"/>
+            <a:ext cx="7223760" cy="530352"/>
+          </a:xfrm>
+          <a:prstGeom prst="rect">
+            <a:avLst/>
+          </a:prstGeom>
+          <a:noFill/>
+        </p:spPr>
+        <p:txBody>
+          <a:bodyPr wrap="square" lIns="0" rIns="0" tIns="0" bIns="0" anchor="t">
+            <a:spAutoFit/>
+          </a:bodyPr>
+          <a:lstStyle/>
+          <a:p>
+            <a:pPr algn="l">
+              <a:lnSpc>
+                <a:spcPct val="138000"/>
+              </a:lnSpc>
+            </a:pPr>
+            <a:r>
+              <a:rPr sz="1300" b="0">
+                <a:solidFill>
+                  <a:srgbClr val="666666"/>
+                </a:solidFill>
+                <a:latin typeface="Poppins"/>
+              </a:rPr>
+              <a:t>Whether cost is on the table at all, and the name against the signage.</a:t>
+            </a:r>
+          </a:p>
+        </p:txBody>
+      </p:sp>
+      <p:cxnSp>
+        <p:nvCxnSpPr>
+          <p:cNvPr id="25" name="Connector 24"/>
+          <p:cNvCxnSpPr/>
+          <p:nvPr/>
+        </p:nvCxnSpPr>
+        <p:spPr>
+          <a:xfrm>
+            <a:off x="914400" y="6382511"/>
             <a:ext cx="10332720" cy="0"/>
           </a:xfrm>
           <a:prstGeom prst="line">
@@ -4992,7 +5762,7 @@
                 </a:solidFill>
                 <a:latin typeface="Poppins"/>
               </a:rPr>
-              <a:t>WHAT WE NEED FROM YOU · SIX OF EIGHT DECISIONS</a:t>
+              <a:t>HOW THIS SPLITS</a:t>
             </a:r>
           </a:p>
         </p:txBody>
@@ -5031,7 +5801,7 @@
                 </a:solidFill>
                 <a:latin typeface="Poppins"/>
               </a:rPr>
-              <a:t>The six decisions that most change the plan.</a:t>
+              <a:t>Harry takes these. We would do these for you.</a:t>
             </a:r>
           </a:p>
         </p:txBody>
@@ -5044,7 +5814,7 @@
         </p:nvCxnSpPr>
         <p:spPr>
           <a:xfrm>
-            <a:off x="914400" y="2286000"/>
+            <a:off x="914400" y="2926080"/>
             <a:ext cx="10332720" cy="0"/>
           </a:xfrm>
           <a:prstGeom prst="line">
@@ -5079,8 +5849,8 @@
         </p:nvSpPr>
         <p:spPr>
           <a:xfrm>
-            <a:off x="914400" y="2414016"/>
-            <a:ext cx="2834640" cy="530352"/>
+            <a:off x="914400" y="3054096"/>
+            <a:ext cx="2103120" cy="658368"/>
           </a:xfrm>
           <a:prstGeom prst="rect">
             <a:avLst/>
@@ -5105,7 +5875,7 @@
                 </a:solidFill>
                 <a:latin typeface="Poppins"/>
               </a:rPr>
-              <a:t>The taproom</a:t>
+              <a:t>Harry</a:t>
             </a:r>
           </a:p>
         </p:txBody>
@@ -5118,8 +5888,8 @@
         </p:nvSpPr>
         <p:spPr>
           <a:xfrm>
-            <a:off x="4023360" y="2414016"/>
-            <a:ext cx="7223760" cy="530352"/>
+            <a:off x="3291840" y="3054096"/>
+            <a:ext cx="7955280" cy="658368"/>
           </a:xfrm>
           <a:prstGeom prst="rect">
             <a:avLst/>
@@ -5144,7 +5914,7 @@
                 </a:solidFill>
                 <a:latin typeface="Poppins"/>
               </a:rPr>
-              <a:t>Tasting and event venue, or keep paying for a drop in.</a:t>
+              <a:t>Tour operator outreach. Fresh copy, photos, reviews and the award to each operator. The referral reward nobody knows about.</a:t>
             </a:r>
           </a:p>
         </p:txBody>
@@ -5157,7 +5927,7 @@
         </p:nvCxnSpPr>
         <p:spPr>
           <a:xfrm>
-            <a:off x="914400" y="2871216"/>
+            <a:off x="914400" y="3639312"/>
             <a:ext cx="10332720" cy="0"/>
           </a:xfrm>
           <a:prstGeom prst="line">
@@ -5192,8 +5962,8 @@
         </p:nvSpPr>
         <p:spPr>
           <a:xfrm>
-            <a:off x="914400" y="2999232"/>
-            <a:ext cx="2834640" cy="530352"/>
+            <a:off x="914400" y="3767328"/>
+            <a:ext cx="2103120" cy="658368"/>
           </a:xfrm>
           <a:prstGeom prst="rect">
             <a:avLst/>
@@ -5218,7 +5988,7 @@
                 </a:solidFill>
                 <a:latin typeface="Poppins"/>
               </a:rPr>
-              <a:t>The range</a:t>
+              <a:t>Justin</a:t>
             </a:r>
           </a:p>
         </p:txBody>
@@ -5231,8 +6001,8 @@
         </p:nvSpPr>
         <p:spPr>
           <a:xfrm>
-            <a:off x="4023360" y="2999232"/>
-            <a:ext cx="7223760" cy="530352"/>
+            <a:off x="3291840" y="3767328"/>
+            <a:ext cx="7955280" cy="658368"/>
           </a:xfrm>
           <a:prstGeom prst="rect">
             <a:avLst/>
@@ -5257,7 +6027,7 @@
                 </a:solidFill>
                 <a:latin typeface="Poppins"/>
               </a:rPr>
-              <a:t>Six core beers, or twenty seven taps.</a:t>
+              <a:t>The Harvey Norman conversation. Wholesale structure and targets. The six decisions above.</a:t>
             </a:r>
           </a:p>
         </p:txBody>
@@ -5270,7 +6040,7 @@
         </p:nvCxnSpPr>
         <p:spPr>
           <a:xfrm>
-            <a:off x="914400" y="3456432"/>
+            <a:off x="914400" y="4352544"/>
             <a:ext cx="10332720" cy="0"/>
           </a:xfrm>
           <a:prstGeom prst="line">
@@ -5305,8 +6075,8 @@
         </p:nvSpPr>
         <p:spPr>
           <a:xfrm>
-            <a:off x="914400" y="3584448"/>
-            <a:ext cx="2834640" cy="530352"/>
+            <a:off x="914400" y="4480560"/>
+            <a:ext cx="2103120" cy="658368"/>
           </a:xfrm>
           <a:prstGeom prst="rect">
             <a:avLst/>
@@ -5331,7 +6101,7 @@
                 </a:solidFill>
                 <a:latin typeface="Poppins"/>
               </a:rPr>
-              <a:t>Membership price</a:t>
+              <a:t>Jewell</a:t>
             </a:r>
           </a:p>
         </p:txBody>
@@ -5344,8 +6114,8 @@
         </p:nvSpPr>
         <p:spPr>
           <a:xfrm>
-            <a:off x="4023360" y="3584448"/>
-            <a:ext cx="7223760" cy="530352"/>
+            <a:off x="3291840" y="4480560"/>
+            <a:ext cx="7955280" cy="658368"/>
           </a:xfrm>
           <a:prstGeom prst="rect">
             <a:avLst/>
@@ -5370,7 +6140,7 @@
                 </a:solidFill>
                 <a:latin typeface="Poppins"/>
               </a:rPr>
-              <a:t>Two posters, two prices, both live in your venue today.</a:t>
+              <a:t>Database acquisition and the campaign against it. The Urban Legends booking tool. Tracking, so you can see what any of it did.</a:t>
             </a:r>
           </a:p>
         </p:txBody>
@@ -5383,459 +6153,7 @@
         </p:nvCxnSpPr>
         <p:spPr>
           <a:xfrm>
-            <a:off x="914400" y="4041648"/>
-            <a:ext cx="10332720" cy="0"/>
-          </a:xfrm>
-          <a:prstGeom prst="line">
-            <a:avLst/>
-          </a:prstGeom>
-          <a:ln w="9525">
-            <a:solidFill>
-              <a:srgbClr val="EDEBEA"/>
-            </a:solidFill>
-          </a:ln>
-        </p:spPr>
-        <p:style>
-          <a:lnRef idx="2">
-            <a:schemeClr val="accent1"/>
-          </a:lnRef>
-          <a:fillRef idx="0">
-            <a:schemeClr val="accent1"/>
-          </a:fillRef>
-          <a:effectRef idx="1">
-            <a:schemeClr val="accent1"/>
-          </a:effectRef>
-          <a:fontRef idx="minor">
-            <a:schemeClr val="tx1"/>
-          </a:fontRef>
-        </p:style>
-      </p:cxnSp>
-      <p:sp>
-        <p:nvSpPr>
-          <p:cNvPr id="14" name="TextBox 13"/>
-          <p:cNvSpPr txBox="1"/>
-          <p:nvPr/>
-        </p:nvSpPr>
-        <p:spPr>
-          <a:xfrm>
-            <a:off x="914400" y="4169663"/>
-            <a:ext cx="2834640" cy="530352"/>
-          </a:xfrm>
-          <a:prstGeom prst="rect">
-            <a:avLst/>
-          </a:prstGeom>
-          <a:noFill/>
-        </p:spPr>
-        <p:txBody>
-          <a:bodyPr wrap="square" lIns="0" rIns="0" tIns="0" bIns="0" anchor="t">
-            <a:spAutoFit/>
-          </a:bodyPr>
-          <a:lstStyle/>
-          <a:p>
-            <a:pPr algn="l">
-              <a:lnSpc>
-                <a:spcPct val="130000"/>
-              </a:lnSpc>
-            </a:pPr>
-            <a:r>
-              <a:rPr sz="1300" b="1">
-                <a:solidFill>
-                  <a:srgbClr val="111111"/>
-                </a:solidFill>
-                <a:latin typeface="Poppins"/>
-              </a:rPr>
-              <a:t>Active customer</a:t>
-            </a:r>
-          </a:p>
-        </p:txBody>
-      </p:sp>
-      <p:sp>
-        <p:nvSpPr>
-          <p:cNvPr id="15" name="TextBox 14"/>
-          <p:cNvSpPr txBox="1"/>
-          <p:nvPr/>
-        </p:nvSpPr>
-        <p:spPr>
-          <a:xfrm>
-            <a:off x="4023360" y="4169663"/>
-            <a:ext cx="7223760" cy="530352"/>
-          </a:xfrm>
-          <a:prstGeom prst="rect">
-            <a:avLst/>
-          </a:prstGeom>
-          <a:noFill/>
-        </p:spPr>
-        <p:txBody>
-          <a:bodyPr wrap="square" lIns="0" rIns="0" tIns="0" bIns="0" anchor="t">
-            <a:spAutoFit/>
-          </a:bodyPr>
-          <a:lstStyle/>
-          <a:p>
-            <a:pPr algn="l">
-              <a:lnSpc>
-                <a:spcPct val="138000"/>
-              </a:lnSpc>
-            </a:pPr>
-            <a:r>
-              <a:rPr sz="1300" b="0">
-                <a:solidFill>
-                  <a:srgbClr val="666666"/>
-                </a:solidFill>
-                <a:latin typeface="Poppins"/>
-              </a:rPr>
-              <a:t>Forty five, seventy five or ninety days. It decides every number we report.</a:t>
-            </a:r>
-          </a:p>
-        </p:txBody>
-      </p:sp>
-      <p:cxnSp>
-        <p:nvCxnSpPr>
-          <p:cNvPr id="16" name="Connector 15"/>
-          <p:cNvCxnSpPr/>
-          <p:nvPr/>
-        </p:nvCxnSpPr>
-        <p:spPr>
-          <a:xfrm>
-            <a:off x="914400" y="4626864"/>
-            <a:ext cx="10332720" cy="0"/>
-          </a:xfrm>
-          <a:prstGeom prst="line">
-            <a:avLst/>
-          </a:prstGeom>
-          <a:ln w="9525">
-            <a:solidFill>
-              <a:srgbClr val="EDEBEA"/>
-            </a:solidFill>
-          </a:ln>
-        </p:spPr>
-        <p:style>
-          <a:lnRef idx="2">
-            <a:schemeClr val="accent1"/>
-          </a:lnRef>
-          <a:fillRef idx="0">
-            <a:schemeClr val="accent1"/>
-          </a:fillRef>
-          <a:effectRef idx="1">
-            <a:schemeClr val="accent1"/>
-          </a:effectRef>
-          <a:fontRef idx="minor">
-            <a:schemeClr val="tx1"/>
-          </a:fontRef>
-        </p:style>
-      </p:cxnSp>
-      <p:sp>
-        <p:nvSpPr>
-          <p:cNvPr id="17" name="TextBox 16"/>
-          <p:cNvSpPr txBox="1"/>
-          <p:nvPr/>
-        </p:nvSpPr>
-        <p:spPr>
-          <a:xfrm>
-            <a:off x="914400" y="4754879"/>
-            <a:ext cx="2834640" cy="530352"/>
-          </a:xfrm>
-          <a:prstGeom prst="rect">
-            <a:avLst/>
-          </a:prstGeom>
-          <a:noFill/>
-        </p:spPr>
-        <p:txBody>
-          <a:bodyPr wrap="square" lIns="0" rIns="0" tIns="0" bIns="0" anchor="t">
-            <a:spAutoFit/>
-          </a:bodyPr>
-          <a:lstStyle/>
-          <a:p>
-            <a:pPr algn="l">
-              <a:lnSpc>
-                <a:spcPct val="130000"/>
-              </a:lnSpc>
-            </a:pPr>
-            <a:r>
-              <a:rPr sz="1300" b="1">
-                <a:solidFill>
-                  <a:srgbClr val="111111"/>
-                </a:solidFill>
-                <a:latin typeface="Poppins"/>
-              </a:rPr>
-              <a:t>Which plan is live</a:t>
-            </a:r>
-          </a:p>
-        </p:txBody>
-      </p:sp>
-      <p:sp>
-        <p:nvSpPr>
-          <p:cNvPr id="18" name="TextBox 17"/>
-          <p:cNvSpPr txBox="1"/>
-          <p:nvPr/>
-        </p:nvSpPr>
-        <p:spPr>
-          <a:xfrm>
-            <a:off x="4023360" y="4754879"/>
-            <a:ext cx="7223760" cy="530352"/>
-          </a:xfrm>
-          <a:prstGeom prst="rect">
-            <a:avLst/>
-          </a:prstGeom>
-          <a:noFill/>
-        </p:spPr>
-        <p:txBody>
-          <a:bodyPr wrap="square" lIns="0" rIns="0" tIns="0" bIns="0" anchor="t">
-            <a:spAutoFit/>
-          </a:bodyPr>
-          <a:lstStyle/>
-          <a:p>
-            <a:pPr algn="l">
-              <a:lnSpc>
-                <a:spcPct val="138000"/>
-              </a:lnSpc>
-            </a:pPr>
-            <a:r>
-              <a:rPr sz="1300" b="0">
-                <a:solidFill>
-                  <a:srgbClr val="666666"/>
-                </a:solidFill>
-                <a:latin typeface="Poppins"/>
-              </a:rPr>
-              <a:t>Three of your documents name three different core metrics.</a:t>
-            </a:r>
-          </a:p>
-        </p:txBody>
-      </p:sp>
-      <p:cxnSp>
-        <p:nvCxnSpPr>
-          <p:cNvPr id="19" name="Connector 18"/>
-          <p:cNvCxnSpPr/>
-          <p:nvPr/>
-        </p:nvCxnSpPr>
-        <p:spPr>
-          <a:xfrm>
-            <a:off x="914400" y="5212079"/>
-            <a:ext cx="10332720" cy="0"/>
-          </a:xfrm>
-          <a:prstGeom prst="line">
-            <a:avLst/>
-          </a:prstGeom>
-          <a:ln w="9525">
-            <a:solidFill>
-              <a:srgbClr val="EDEBEA"/>
-            </a:solidFill>
-          </a:ln>
-        </p:spPr>
-        <p:style>
-          <a:lnRef idx="2">
-            <a:schemeClr val="accent1"/>
-          </a:lnRef>
-          <a:fillRef idx="0">
-            <a:schemeClr val="accent1"/>
-          </a:fillRef>
-          <a:effectRef idx="1">
-            <a:schemeClr val="accent1"/>
-          </a:effectRef>
-          <a:fontRef idx="minor">
-            <a:schemeClr val="tx1"/>
-          </a:fontRef>
-        </p:style>
-      </p:cxnSp>
-      <p:sp>
-        <p:nvSpPr>
-          <p:cNvPr id="20" name="TextBox 19"/>
-          <p:cNvSpPr txBox="1"/>
-          <p:nvPr/>
-        </p:nvSpPr>
-        <p:spPr>
-          <a:xfrm>
-            <a:off x="914400" y="5340095"/>
-            <a:ext cx="2834640" cy="530352"/>
-          </a:xfrm>
-          <a:prstGeom prst="rect">
-            <a:avLst/>
-          </a:prstGeom>
-          <a:noFill/>
-        </p:spPr>
-        <p:txBody>
-          <a:bodyPr wrap="square" lIns="0" rIns="0" tIns="0" bIns="0" anchor="t">
-            <a:spAutoFit/>
-          </a:bodyPr>
-          <a:lstStyle/>
-          <a:p>
-            <a:pPr algn="l">
-              <a:lnSpc>
-                <a:spcPct val="130000"/>
-              </a:lnSpc>
-            </a:pPr>
-            <a:r>
-              <a:rPr sz="1300" b="1">
-                <a:solidFill>
-                  <a:srgbClr val="111111"/>
-                </a:solidFill>
-                <a:latin typeface="Poppins"/>
-              </a:rPr>
-              <a:t>Model A or B</a:t>
-            </a:r>
-          </a:p>
-        </p:txBody>
-      </p:sp>
-      <p:sp>
-        <p:nvSpPr>
-          <p:cNvPr id="21" name="TextBox 20"/>
-          <p:cNvSpPr txBox="1"/>
-          <p:nvPr/>
-        </p:nvSpPr>
-        <p:spPr>
-          <a:xfrm>
-            <a:off x="4023360" y="5340095"/>
-            <a:ext cx="7223760" cy="530352"/>
-          </a:xfrm>
-          <a:prstGeom prst="rect">
-            <a:avLst/>
-          </a:prstGeom>
-          <a:noFill/>
-        </p:spPr>
-        <p:txBody>
-          <a:bodyPr wrap="square" lIns="0" rIns="0" tIns="0" bIns="0" anchor="t">
-            <a:spAutoFit/>
-          </a:bodyPr>
-          <a:lstStyle/>
-          <a:p>
-            <a:pPr algn="l">
-              <a:lnSpc>
-                <a:spcPct val="138000"/>
-              </a:lnSpc>
-            </a:pPr>
-            <a:r>
-              <a:rPr sz="1300" b="0">
-                <a:solidFill>
-                  <a:srgbClr val="666666"/>
-                </a:solidFill>
-                <a:latin typeface="Poppins"/>
-              </a:rPr>
-              <a:t>Sell more systems, or convert the 116 who bought elsewhere.</a:t>
-            </a:r>
-          </a:p>
-        </p:txBody>
-      </p:sp>
-      <p:cxnSp>
-        <p:nvCxnSpPr>
-          <p:cNvPr id="22" name="Connector 21"/>
-          <p:cNvCxnSpPr/>
-          <p:nvPr/>
-        </p:nvCxnSpPr>
-        <p:spPr>
-          <a:xfrm>
-            <a:off x="914400" y="5797295"/>
-            <a:ext cx="10332720" cy="0"/>
-          </a:xfrm>
-          <a:prstGeom prst="line">
-            <a:avLst/>
-          </a:prstGeom>
-          <a:ln w="9525">
-            <a:solidFill>
-              <a:srgbClr val="EDEBEA"/>
-            </a:solidFill>
-          </a:ln>
-        </p:spPr>
-        <p:style>
-          <a:lnRef idx="2">
-            <a:schemeClr val="accent1"/>
-          </a:lnRef>
-          <a:fillRef idx="0">
-            <a:schemeClr val="accent1"/>
-          </a:fillRef>
-          <a:effectRef idx="1">
-            <a:schemeClr val="accent1"/>
-          </a:effectRef>
-          <a:fontRef idx="minor">
-            <a:schemeClr val="tx1"/>
-          </a:fontRef>
-        </p:style>
-      </p:cxnSp>
-      <p:sp>
-        <p:nvSpPr>
-          <p:cNvPr id="23" name="TextBox 22"/>
-          <p:cNvSpPr txBox="1"/>
-          <p:nvPr/>
-        </p:nvSpPr>
-        <p:spPr>
-          <a:xfrm>
-            <a:off x="914400" y="5925311"/>
-            <a:ext cx="2834640" cy="530352"/>
-          </a:xfrm>
-          <a:prstGeom prst="rect">
-            <a:avLst/>
-          </a:prstGeom>
-          <a:noFill/>
-        </p:spPr>
-        <p:txBody>
-          <a:bodyPr wrap="square" lIns="0" rIns="0" tIns="0" bIns="0" anchor="t">
-            <a:spAutoFit/>
-          </a:bodyPr>
-          <a:lstStyle/>
-          <a:p>
-            <a:pPr algn="l">
-              <a:lnSpc>
-                <a:spcPct val="130000"/>
-              </a:lnSpc>
-            </a:pPr>
-            <a:r>
-              <a:rPr sz="1300" b="1">
-                <a:solidFill>
-                  <a:srgbClr val="111111"/>
-                </a:solidFill>
-                <a:latin typeface="Poppins"/>
-              </a:rPr>
-              <a:t>Two more behind these</a:t>
-            </a:r>
-          </a:p>
-        </p:txBody>
-      </p:sp>
-      <p:sp>
-        <p:nvSpPr>
-          <p:cNvPr id="24" name="TextBox 23"/>
-          <p:cNvSpPr txBox="1"/>
-          <p:nvPr/>
-        </p:nvSpPr>
-        <p:spPr>
-          <a:xfrm>
-            <a:off x="4023360" y="5925311"/>
-            <a:ext cx="7223760" cy="530352"/>
-          </a:xfrm>
-          <a:prstGeom prst="rect">
-            <a:avLst/>
-          </a:prstGeom>
-          <a:noFill/>
-        </p:spPr>
-        <p:txBody>
-          <a:bodyPr wrap="square" lIns="0" rIns="0" tIns="0" bIns="0" anchor="t">
-            <a:spAutoFit/>
-          </a:bodyPr>
-          <a:lstStyle/>
-          <a:p>
-            <a:pPr algn="l">
-              <a:lnSpc>
-                <a:spcPct val="138000"/>
-              </a:lnSpc>
-            </a:pPr>
-            <a:r>
-              <a:rPr sz="1300" b="0">
-                <a:solidFill>
-                  <a:srgbClr val="666666"/>
-                </a:solidFill>
-                <a:latin typeface="Poppins"/>
-              </a:rPr>
-              <a:t>Whether cost is on the table at all, and the name against the signage.</a:t>
-            </a:r>
-          </a:p>
-        </p:txBody>
-      </p:sp>
-      <p:cxnSp>
-        <p:nvCxnSpPr>
-          <p:cNvPr id="25" name="Connector 24"/>
-          <p:cNvCxnSpPr/>
-          <p:nvPr/>
-        </p:nvCxnSpPr>
-        <p:spPr>
-          <a:xfrm>
-            <a:off x="914400" y="6382511"/>
+            <a:off x="914400" y="5065776"/>
             <a:ext cx="10332720" cy="0"/>
           </a:xfrm>
           <a:prstGeom prst="line">
@@ -5896,484 +6214,6 @@
         </p:nvSpPr>
         <p:spPr>
           <a:xfrm>
-            <a:off x="914400" y="914400"/>
-            <a:ext cx="10332720" cy="274320"/>
-          </a:xfrm>
-          <a:prstGeom prst="rect">
-            <a:avLst/>
-          </a:prstGeom>
-          <a:noFill/>
-        </p:spPr>
-        <p:txBody>
-          <a:bodyPr wrap="square" lIns="0" rIns="0" tIns="0" bIns="0" anchor="t">
-            <a:spAutoFit/>
-          </a:bodyPr>
-          <a:lstStyle/>
-          <a:p>
-            <a:pPr algn="l">
-              <a:lnSpc>
-                <a:spcPct val="150000"/>
-              </a:lnSpc>
-            </a:pPr>
-            <a:r>
-              <a:rPr sz="900" b="0" spc="200">
-                <a:solidFill>
-                  <a:srgbClr val="111111"/>
-                </a:solidFill>
-                <a:latin typeface="Poppins"/>
-              </a:rPr>
-              <a:t>HOW THIS SPLITS</a:t>
-            </a:r>
-          </a:p>
-        </p:txBody>
-      </p:sp>
-      <p:sp>
-        <p:nvSpPr>
-          <p:cNvPr id="3" name="TextBox 2"/>
-          <p:cNvSpPr txBox="1"/>
-          <p:nvPr/>
-        </p:nvSpPr>
-        <p:spPr>
-          <a:xfrm>
-            <a:off x="914400" y="1737360"/>
-            <a:ext cx="10332720" cy="2103120"/>
-          </a:xfrm>
-          <a:prstGeom prst="rect">
-            <a:avLst/>
-          </a:prstGeom>
-          <a:noFill/>
-        </p:spPr>
-        <p:txBody>
-          <a:bodyPr wrap="square" lIns="0" rIns="0" tIns="0" bIns="0" anchor="t">
-            <a:spAutoFit/>
-          </a:bodyPr>
-          <a:lstStyle/>
-          <a:p>
-            <a:pPr algn="l">
-              <a:lnSpc>
-                <a:spcPct val="112000"/>
-              </a:lnSpc>
-            </a:pPr>
-            <a:r>
-              <a:rPr sz="3800" b="0">
-                <a:solidFill>
-                  <a:srgbClr val="111111"/>
-                </a:solidFill>
-                <a:latin typeface="Poppins"/>
-              </a:rPr>
-              <a:t>Harry takes these. We would do these for you.</a:t>
-            </a:r>
-          </a:p>
-        </p:txBody>
-      </p:sp>
-      <p:cxnSp>
-        <p:nvCxnSpPr>
-          <p:cNvPr id="4" name="Connector 3"/>
-          <p:cNvCxnSpPr/>
-          <p:nvPr/>
-        </p:nvCxnSpPr>
-        <p:spPr>
-          <a:xfrm>
-            <a:off x="914400" y="2926080"/>
-            <a:ext cx="10332720" cy="0"/>
-          </a:xfrm>
-          <a:prstGeom prst="line">
-            <a:avLst/>
-          </a:prstGeom>
-          <a:ln w="9525">
-            <a:solidFill>
-              <a:srgbClr val="EDEBEA"/>
-            </a:solidFill>
-          </a:ln>
-        </p:spPr>
-        <p:style>
-          <a:lnRef idx="2">
-            <a:schemeClr val="accent1"/>
-          </a:lnRef>
-          <a:fillRef idx="0">
-            <a:schemeClr val="accent1"/>
-          </a:fillRef>
-          <a:effectRef idx="1">
-            <a:schemeClr val="accent1"/>
-          </a:effectRef>
-          <a:fontRef idx="minor">
-            <a:schemeClr val="tx1"/>
-          </a:fontRef>
-        </p:style>
-      </p:cxnSp>
-      <p:sp>
-        <p:nvSpPr>
-          <p:cNvPr id="5" name="TextBox 4"/>
-          <p:cNvSpPr txBox="1"/>
-          <p:nvPr/>
-        </p:nvSpPr>
-        <p:spPr>
-          <a:xfrm>
-            <a:off x="914400" y="3054096"/>
-            <a:ext cx="2103120" cy="658368"/>
-          </a:xfrm>
-          <a:prstGeom prst="rect">
-            <a:avLst/>
-          </a:prstGeom>
-          <a:noFill/>
-        </p:spPr>
-        <p:txBody>
-          <a:bodyPr wrap="square" lIns="0" rIns="0" tIns="0" bIns="0" anchor="t">
-            <a:spAutoFit/>
-          </a:bodyPr>
-          <a:lstStyle/>
-          <a:p>
-            <a:pPr algn="l">
-              <a:lnSpc>
-                <a:spcPct val="130000"/>
-              </a:lnSpc>
-            </a:pPr>
-            <a:r>
-              <a:rPr sz="1300" b="1">
-                <a:solidFill>
-                  <a:srgbClr val="111111"/>
-                </a:solidFill>
-                <a:latin typeface="Poppins"/>
-              </a:rPr>
-              <a:t>Harry</a:t>
-            </a:r>
-          </a:p>
-        </p:txBody>
-      </p:sp>
-      <p:sp>
-        <p:nvSpPr>
-          <p:cNvPr id="6" name="TextBox 5"/>
-          <p:cNvSpPr txBox="1"/>
-          <p:nvPr/>
-        </p:nvSpPr>
-        <p:spPr>
-          <a:xfrm>
-            <a:off x="3291840" y="3054096"/>
-            <a:ext cx="7955280" cy="658368"/>
-          </a:xfrm>
-          <a:prstGeom prst="rect">
-            <a:avLst/>
-          </a:prstGeom>
-          <a:noFill/>
-        </p:spPr>
-        <p:txBody>
-          <a:bodyPr wrap="square" lIns="0" rIns="0" tIns="0" bIns="0" anchor="t">
-            <a:spAutoFit/>
-          </a:bodyPr>
-          <a:lstStyle/>
-          <a:p>
-            <a:pPr algn="l">
-              <a:lnSpc>
-                <a:spcPct val="138000"/>
-              </a:lnSpc>
-            </a:pPr>
-            <a:r>
-              <a:rPr sz="1300" b="0">
-                <a:solidFill>
-                  <a:srgbClr val="666666"/>
-                </a:solidFill>
-                <a:latin typeface="Poppins"/>
-              </a:rPr>
-              <a:t>Tour operator outreach. Fresh copy, photos, reviews and the award to each operator. The referral reward nobody knows about.</a:t>
-            </a:r>
-          </a:p>
-        </p:txBody>
-      </p:sp>
-      <p:cxnSp>
-        <p:nvCxnSpPr>
-          <p:cNvPr id="7" name="Connector 6"/>
-          <p:cNvCxnSpPr/>
-          <p:nvPr/>
-        </p:nvCxnSpPr>
-        <p:spPr>
-          <a:xfrm>
-            <a:off x="914400" y="3639312"/>
-            <a:ext cx="10332720" cy="0"/>
-          </a:xfrm>
-          <a:prstGeom prst="line">
-            <a:avLst/>
-          </a:prstGeom>
-          <a:ln w="9525">
-            <a:solidFill>
-              <a:srgbClr val="EDEBEA"/>
-            </a:solidFill>
-          </a:ln>
-        </p:spPr>
-        <p:style>
-          <a:lnRef idx="2">
-            <a:schemeClr val="accent1"/>
-          </a:lnRef>
-          <a:fillRef idx="0">
-            <a:schemeClr val="accent1"/>
-          </a:fillRef>
-          <a:effectRef idx="1">
-            <a:schemeClr val="accent1"/>
-          </a:effectRef>
-          <a:fontRef idx="minor">
-            <a:schemeClr val="tx1"/>
-          </a:fontRef>
-        </p:style>
-      </p:cxnSp>
-      <p:sp>
-        <p:nvSpPr>
-          <p:cNvPr id="8" name="TextBox 7"/>
-          <p:cNvSpPr txBox="1"/>
-          <p:nvPr/>
-        </p:nvSpPr>
-        <p:spPr>
-          <a:xfrm>
-            <a:off x="914400" y="3767328"/>
-            <a:ext cx="2103120" cy="658368"/>
-          </a:xfrm>
-          <a:prstGeom prst="rect">
-            <a:avLst/>
-          </a:prstGeom>
-          <a:noFill/>
-        </p:spPr>
-        <p:txBody>
-          <a:bodyPr wrap="square" lIns="0" rIns="0" tIns="0" bIns="0" anchor="t">
-            <a:spAutoFit/>
-          </a:bodyPr>
-          <a:lstStyle/>
-          <a:p>
-            <a:pPr algn="l">
-              <a:lnSpc>
-                <a:spcPct val="130000"/>
-              </a:lnSpc>
-            </a:pPr>
-            <a:r>
-              <a:rPr sz="1300" b="1">
-                <a:solidFill>
-                  <a:srgbClr val="111111"/>
-                </a:solidFill>
-                <a:latin typeface="Poppins"/>
-              </a:rPr>
-              <a:t>Justin</a:t>
-            </a:r>
-          </a:p>
-        </p:txBody>
-      </p:sp>
-      <p:sp>
-        <p:nvSpPr>
-          <p:cNvPr id="9" name="TextBox 8"/>
-          <p:cNvSpPr txBox="1"/>
-          <p:nvPr/>
-        </p:nvSpPr>
-        <p:spPr>
-          <a:xfrm>
-            <a:off x="3291840" y="3767328"/>
-            <a:ext cx="7955280" cy="658368"/>
-          </a:xfrm>
-          <a:prstGeom prst="rect">
-            <a:avLst/>
-          </a:prstGeom>
-          <a:noFill/>
-        </p:spPr>
-        <p:txBody>
-          <a:bodyPr wrap="square" lIns="0" rIns="0" tIns="0" bIns="0" anchor="t">
-            <a:spAutoFit/>
-          </a:bodyPr>
-          <a:lstStyle/>
-          <a:p>
-            <a:pPr algn="l">
-              <a:lnSpc>
-                <a:spcPct val="138000"/>
-              </a:lnSpc>
-            </a:pPr>
-            <a:r>
-              <a:rPr sz="1300" b="0">
-                <a:solidFill>
-                  <a:srgbClr val="666666"/>
-                </a:solidFill>
-                <a:latin typeface="Poppins"/>
-              </a:rPr>
-              <a:t>The Harvey Norman conversation. Wholesale structure and targets. The six decisions above.</a:t>
-            </a:r>
-          </a:p>
-        </p:txBody>
-      </p:sp>
-      <p:cxnSp>
-        <p:nvCxnSpPr>
-          <p:cNvPr id="10" name="Connector 9"/>
-          <p:cNvCxnSpPr/>
-          <p:nvPr/>
-        </p:nvCxnSpPr>
-        <p:spPr>
-          <a:xfrm>
-            <a:off x="914400" y="4352544"/>
-            <a:ext cx="10332720" cy="0"/>
-          </a:xfrm>
-          <a:prstGeom prst="line">
-            <a:avLst/>
-          </a:prstGeom>
-          <a:ln w="9525">
-            <a:solidFill>
-              <a:srgbClr val="EDEBEA"/>
-            </a:solidFill>
-          </a:ln>
-        </p:spPr>
-        <p:style>
-          <a:lnRef idx="2">
-            <a:schemeClr val="accent1"/>
-          </a:lnRef>
-          <a:fillRef idx="0">
-            <a:schemeClr val="accent1"/>
-          </a:fillRef>
-          <a:effectRef idx="1">
-            <a:schemeClr val="accent1"/>
-          </a:effectRef>
-          <a:fontRef idx="minor">
-            <a:schemeClr val="tx1"/>
-          </a:fontRef>
-        </p:style>
-      </p:cxnSp>
-      <p:sp>
-        <p:nvSpPr>
-          <p:cNvPr id="11" name="TextBox 10"/>
-          <p:cNvSpPr txBox="1"/>
-          <p:nvPr/>
-        </p:nvSpPr>
-        <p:spPr>
-          <a:xfrm>
-            <a:off x="914400" y="4480560"/>
-            <a:ext cx="2103120" cy="658368"/>
-          </a:xfrm>
-          <a:prstGeom prst="rect">
-            <a:avLst/>
-          </a:prstGeom>
-          <a:noFill/>
-        </p:spPr>
-        <p:txBody>
-          <a:bodyPr wrap="square" lIns="0" rIns="0" tIns="0" bIns="0" anchor="t">
-            <a:spAutoFit/>
-          </a:bodyPr>
-          <a:lstStyle/>
-          <a:p>
-            <a:pPr algn="l">
-              <a:lnSpc>
-                <a:spcPct val="130000"/>
-              </a:lnSpc>
-            </a:pPr>
-            <a:r>
-              <a:rPr sz="1300" b="1">
-                <a:solidFill>
-                  <a:srgbClr val="111111"/>
-                </a:solidFill>
-                <a:latin typeface="Poppins"/>
-              </a:rPr>
-              <a:t>Jewell</a:t>
-            </a:r>
-          </a:p>
-        </p:txBody>
-      </p:sp>
-      <p:sp>
-        <p:nvSpPr>
-          <p:cNvPr id="12" name="TextBox 11"/>
-          <p:cNvSpPr txBox="1"/>
-          <p:nvPr/>
-        </p:nvSpPr>
-        <p:spPr>
-          <a:xfrm>
-            <a:off x="3291840" y="4480560"/>
-            <a:ext cx="7955280" cy="658368"/>
-          </a:xfrm>
-          <a:prstGeom prst="rect">
-            <a:avLst/>
-          </a:prstGeom>
-          <a:noFill/>
-        </p:spPr>
-        <p:txBody>
-          <a:bodyPr wrap="square" lIns="0" rIns="0" tIns="0" bIns="0" anchor="t">
-            <a:spAutoFit/>
-          </a:bodyPr>
-          <a:lstStyle/>
-          <a:p>
-            <a:pPr algn="l">
-              <a:lnSpc>
-                <a:spcPct val="138000"/>
-              </a:lnSpc>
-            </a:pPr>
-            <a:r>
-              <a:rPr sz="1300" b="0">
-                <a:solidFill>
-                  <a:srgbClr val="666666"/>
-                </a:solidFill>
-                <a:latin typeface="Poppins"/>
-              </a:rPr>
-              <a:t>Database acquisition and the campaign against it. The Urban Legends booking tool. Tracking, so you can see what any of it did.</a:t>
-            </a:r>
-          </a:p>
-        </p:txBody>
-      </p:sp>
-      <p:cxnSp>
-        <p:nvCxnSpPr>
-          <p:cNvPr id="13" name="Connector 12"/>
-          <p:cNvCxnSpPr/>
-          <p:nvPr/>
-        </p:nvCxnSpPr>
-        <p:spPr>
-          <a:xfrm>
-            <a:off x="914400" y="5065776"/>
-            <a:ext cx="10332720" cy="0"/>
-          </a:xfrm>
-          <a:prstGeom prst="line">
-            <a:avLst/>
-          </a:prstGeom>
-          <a:ln w="9525">
-            <a:solidFill>
-              <a:srgbClr val="EDEBEA"/>
-            </a:solidFill>
-          </a:ln>
-        </p:spPr>
-        <p:style>
-          <a:lnRef idx="2">
-            <a:schemeClr val="accent1"/>
-          </a:lnRef>
-          <a:fillRef idx="0">
-            <a:schemeClr val="accent1"/>
-          </a:fillRef>
-          <a:effectRef idx="1">
-            <a:schemeClr val="accent1"/>
-          </a:effectRef>
-          <a:fontRef idx="minor">
-            <a:schemeClr val="tx1"/>
-          </a:fontRef>
-        </p:style>
-      </p:cxnSp>
-    </p:spTree>
-  </p:cSld>
-  <p:clrMapOvr>
-    <a:masterClrMapping/>
-  </p:clrMapOvr>
-</p:sld>
-</file>
-
-<file path=ppt/slides/slide16.xml><?xml version="1.0" encoding="utf-8"?>
-<p:sld xmlns:a="http://schemas.openxmlformats.org/drawingml/2006/main" xmlns:p="http://schemas.openxmlformats.org/presentationml/2006/main" xmlns:r="http://schemas.openxmlformats.org/officeDocument/2006/relationships">
-  <p:cSld>
-    <p:bg>
-      <p:bgPr>
-        <a:solidFill>
-          <a:srgbClr val="FAF8F4"/>
-        </a:solidFill>
-        <a:effectLst/>
-      </p:bgPr>
-    </p:bg>
-    <p:spTree>
-      <p:nvGrpSpPr>
-        <p:cNvPr id="1" name=""/>
-        <p:cNvGrpSpPr/>
-        <p:nvPr/>
-      </p:nvGrpSpPr>
-      <p:grpSpPr/>
-      <p:sp>
-        <p:nvSpPr>
-          <p:cNvPr id="2" name="TextBox 1"/>
-          <p:cNvSpPr txBox="1"/>
-          <p:nvPr/>
-        </p:nvSpPr>
-        <p:spPr>
-          <a:xfrm>
             <a:off x="914400" y="1828800"/>
             <a:ext cx="10332720" cy="1828800"/>
           </a:xfrm>
@@ -6746,9 +6586,48 @@
           </a:p>
         </p:txBody>
       </p:sp>
+      <p:sp>
+        <p:nvSpPr>
+          <p:cNvPr id="4" name="TextBox 3"/>
+          <p:cNvSpPr txBox="1"/>
+          <p:nvPr/>
+        </p:nvSpPr>
+        <p:spPr>
+          <a:xfrm>
+            <a:off x="914400" y="4114800"/>
+            <a:ext cx="9144000" cy="2194560"/>
+          </a:xfrm>
+          <a:prstGeom prst="rect">
+            <a:avLst/>
+          </a:prstGeom>
+          <a:noFill/>
+        </p:spPr>
+        <p:txBody>
+          <a:bodyPr wrap="square" lIns="0" rIns="0" tIns="0" bIns="0" anchor="t">
+            <a:spAutoFit/>
+          </a:bodyPr>
+          <a:lstStyle/>
+          <a:p>
+            <a:pPr algn="l">
+              <a:lnSpc>
+                <a:spcPct val="155000"/>
+              </a:lnSpc>
+            </a:pPr>
+            <a:r>
+              <a:rPr sz="1400" b="0">
+                <a:solidFill>
+                  <a:srgbClr val="111111"/>
+                </a:solidFill>
+                <a:latin typeface="Poppins"/>
+              </a:rPr>
+              <a:t>Two of those numbers need settling before they can carry a plan. Which definition of active is the live one, and what the business actually costs to run.</a:t>
+            </a:r>
+          </a:p>
+        </p:txBody>
+      </p:sp>
       <p:cxnSp>
         <p:nvCxnSpPr>
-          <p:cNvPr id="4" name="Connector 3"/>
+          <p:cNvPr id="5" name="Connector 4"/>
           <p:cNvCxnSpPr/>
           <p:nvPr/>
         </p:nvCxnSpPr>
@@ -6783,7 +6662,7 @@
       </p:cxnSp>
       <p:sp>
         <p:nvSpPr>
-          <p:cNvPr id="5" name="TextBox 4"/>
+          <p:cNvPr id="6" name="TextBox 5"/>
           <p:cNvSpPr txBox="1"/>
           <p:nvPr/>
         </p:nvSpPr>
@@ -6822,7 +6701,7 @@
       </p:sp>
       <p:sp>
         <p:nvSpPr>
-          <p:cNvPr id="6" name="TextBox 5"/>
+          <p:cNvPr id="7" name="TextBox 6"/>
           <p:cNvSpPr txBox="1"/>
           <p:nvPr/>
         </p:nvSpPr>
@@ -6861,7 +6740,7 @@
       </p:sp>
       <p:cxnSp>
         <p:nvCxnSpPr>
-          <p:cNvPr id="7" name="Connector 6"/>
+          <p:cNvPr id="8" name="Connector 7"/>
           <p:cNvCxnSpPr/>
           <p:nvPr/>
         </p:nvCxnSpPr>
@@ -6896,7 +6775,7 @@
       </p:cxnSp>
       <p:sp>
         <p:nvSpPr>
-          <p:cNvPr id="8" name="TextBox 7"/>
+          <p:cNvPr id="9" name="TextBox 8"/>
           <p:cNvSpPr txBox="1"/>
           <p:nvPr/>
         </p:nvSpPr>
@@ -6935,7 +6814,7 @@
       </p:sp>
       <p:sp>
         <p:nvSpPr>
-          <p:cNvPr id="9" name="TextBox 8"/>
+          <p:cNvPr id="10" name="TextBox 9"/>
           <p:cNvSpPr txBox="1"/>
           <p:nvPr/>
         </p:nvSpPr>
@@ -6974,7 +6853,7 @@
       </p:sp>
       <p:cxnSp>
         <p:nvCxnSpPr>
-          <p:cNvPr id="10" name="Connector 9"/>
+          <p:cNvPr id="11" name="Connector 10"/>
           <p:cNvCxnSpPr/>
           <p:nvPr/>
         </p:nvCxnSpPr>
@@ -7009,7 +6888,7 @@
       </p:cxnSp>
       <p:sp>
         <p:nvSpPr>
-          <p:cNvPr id="11" name="TextBox 10"/>
+          <p:cNvPr id="12" name="TextBox 11"/>
           <p:cNvSpPr txBox="1"/>
           <p:nvPr/>
         </p:nvSpPr>
@@ -7048,7 +6927,7 @@
       </p:sp>
       <p:sp>
         <p:nvSpPr>
-          <p:cNvPr id="12" name="TextBox 11"/>
+          <p:cNvPr id="13" name="TextBox 12"/>
           <p:cNvSpPr txBox="1"/>
           <p:nvPr/>
         </p:nvSpPr>
@@ -7087,7 +6966,7 @@
       </p:sp>
       <p:cxnSp>
         <p:nvCxnSpPr>
-          <p:cNvPr id="13" name="Connector 12"/>
+          <p:cNvPr id="14" name="Connector 13"/>
           <p:cNvCxnSpPr/>
           <p:nvPr/>
         </p:nvCxnSpPr>
@@ -7122,7 +7001,7 @@
       </p:cxnSp>
       <p:sp>
         <p:nvSpPr>
-          <p:cNvPr id="14" name="TextBox 13"/>
+          <p:cNvPr id="15" name="TextBox 14"/>
           <p:cNvSpPr txBox="1"/>
           <p:nvPr/>
         </p:nvSpPr>
@@ -7161,7 +7040,7 @@
       </p:sp>
       <p:sp>
         <p:nvSpPr>
-          <p:cNvPr id="15" name="TextBox 14"/>
+          <p:cNvPr id="16" name="TextBox 15"/>
           <p:cNvSpPr txBox="1"/>
           <p:nvPr/>
         </p:nvSpPr>
@@ -7514,7 +7393,7 @@
     <p:bg>
       <p:bgPr>
         <a:solidFill>
-          <a:srgbClr val="FAF8F4"/>
+          <a:srgbClr val="111111"/>
         </a:solidFill>
         <a:effectLst/>
       </p:bgPr>
@@ -7554,13 +7433,13 @@
               </a:lnSpc>
             </a:pPr>
             <a:r>
-              <a:rPr sz="900" b="0" spc="200">
-                <a:solidFill>
-                  <a:srgbClr val="111111"/>
-                </a:solidFill>
-                <a:latin typeface="Poppins"/>
-              </a:rPr>
-              <a:t>BEFORE ANYTHING ELSE</a:t>
+              <a:rPr sz="1200" b="0" spc="200">
+                <a:solidFill>
+                  <a:srgbClr val="FAF8F4"/>
+                </a:solidFill>
+                <a:latin typeface="Poppins"/>
+              </a:rPr>
+              <a:t>PART 02</a:t>
             </a:r>
           </a:p>
         </p:txBody>
@@ -7573,637 +7452,76 @@
         </p:nvSpPr>
         <p:spPr>
           <a:xfrm>
-            <a:off x="914400" y="1737360"/>
-            <a:ext cx="10332720" cy="2103120"/>
-          </a:xfrm>
-          <a:prstGeom prst="rect">
-            <a:avLst/>
-          </a:prstGeom>
-          <a:noFill/>
-        </p:spPr>
-        <p:txBody>
-          <a:bodyPr wrap="square" lIns="0" rIns="0" tIns="0" bIns="0" anchor="t">
-            <a:spAutoFit/>
-          </a:bodyPr>
-          <a:lstStyle/>
-          <a:p>
-            <a:pPr algn="l">
-              <a:lnSpc>
-                <a:spcPct val="112000"/>
-              </a:lnSpc>
-            </a:pPr>
-            <a:r>
-              <a:rPr sz="3800" b="0">
-                <a:solidFill>
-                  <a:srgbClr val="111111"/>
-                </a:solidFill>
-                <a:latin typeface="Poppins"/>
-              </a:rPr>
-              <a:t>What we got wrong.</a:t>
-            </a:r>
-          </a:p>
-        </p:txBody>
-      </p:sp>
-      <p:cxnSp>
-        <p:nvCxnSpPr>
-          <p:cNvPr id="4" name="Connector 3"/>
-          <p:cNvCxnSpPr/>
-          <p:nvPr/>
-        </p:nvCxnSpPr>
-        <p:spPr>
-          <a:xfrm>
-            <a:off x="914400" y="2834640"/>
-            <a:ext cx="10332720" cy="0"/>
-          </a:xfrm>
-          <a:prstGeom prst="line">
-            <a:avLst/>
-          </a:prstGeom>
-          <a:ln w="9525">
-            <a:solidFill>
-              <a:srgbClr val="EDEBEA"/>
-            </a:solidFill>
-          </a:ln>
-        </p:spPr>
-        <p:style>
-          <a:lnRef idx="2">
-            <a:schemeClr val="accent1"/>
-          </a:lnRef>
-          <a:fillRef idx="0">
-            <a:schemeClr val="accent1"/>
-          </a:fillRef>
-          <a:effectRef idx="1">
-            <a:schemeClr val="accent1"/>
-          </a:effectRef>
-          <a:fontRef idx="minor">
-            <a:schemeClr val="tx1"/>
-          </a:fontRef>
-        </p:style>
-      </p:cxnSp>
-      <p:sp>
-        <p:nvSpPr>
-          <p:cNvPr id="5" name="TextBox 4"/>
-          <p:cNvSpPr txBox="1"/>
-          <p:nvPr/>
-        </p:nvSpPr>
-        <p:spPr>
-          <a:xfrm>
-            <a:off x="914400" y="2962656"/>
-            <a:ext cx="2834640" cy="658368"/>
-          </a:xfrm>
-          <a:prstGeom prst="rect">
-            <a:avLst/>
-          </a:prstGeom>
-          <a:noFill/>
-        </p:spPr>
-        <p:txBody>
-          <a:bodyPr wrap="square" lIns="0" rIns="0" tIns="0" bIns="0" anchor="t">
-            <a:spAutoFit/>
-          </a:bodyPr>
-          <a:lstStyle/>
-          <a:p>
-            <a:pPr algn="l">
-              <a:lnSpc>
-                <a:spcPct val="130000"/>
-              </a:lnSpc>
-            </a:pPr>
-            <a:r>
-              <a:rPr sz="1300" b="1">
-                <a:solidFill>
-                  <a:srgbClr val="111111"/>
-                </a:solidFill>
-                <a:latin typeface="Poppins"/>
-              </a:rPr>
-              <a:t>We never said it</a:t>
-            </a:r>
-          </a:p>
-        </p:txBody>
-      </p:sp>
-      <p:sp>
-        <p:nvSpPr>
-          <p:cNvPr id="6" name="TextBox 5"/>
-          <p:cNvSpPr txBox="1"/>
-          <p:nvPr/>
-        </p:nvSpPr>
-        <p:spPr>
-          <a:xfrm>
-            <a:off x="4023360" y="2962656"/>
-            <a:ext cx="7223760" cy="658368"/>
-          </a:xfrm>
-          <a:prstGeom prst="rect">
-            <a:avLst/>
-          </a:prstGeom>
-          <a:noFill/>
-        </p:spPr>
-        <p:txBody>
-          <a:bodyPr wrap="square" lIns="0" rIns="0" tIns="0" bIns="0" anchor="t">
-            <a:spAutoFit/>
-          </a:bodyPr>
-          <a:lstStyle/>
-          <a:p>
-            <a:pPr algn="l">
-              <a:lnSpc>
-                <a:spcPct val="138000"/>
-              </a:lnSpc>
-            </a:pPr>
-            <a:r>
-              <a:rPr sz="1300" b="0">
-                <a:solidFill>
-                  <a:srgbClr val="666666"/>
-                </a:solidFill>
-                <a:latin typeface="Poppins"/>
-              </a:rPr>
-              <a:t>Nothing in seventy nine documents said the business is losing money.</a:t>
-            </a:r>
-          </a:p>
-        </p:txBody>
-      </p:sp>
-      <p:cxnSp>
-        <p:nvCxnSpPr>
-          <p:cNvPr id="7" name="Connector 6"/>
-          <p:cNvCxnSpPr/>
-          <p:nvPr/>
-        </p:nvCxnSpPr>
-        <p:spPr>
-          <a:xfrm>
-            <a:off x="914400" y="3547872"/>
-            <a:ext cx="10332720" cy="0"/>
-          </a:xfrm>
-          <a:prstGeom prst="line">
-            <a:avLst/>
-          </a:prstGeom>
-          <a:ln w="9525">
-            <a:solidFill>
-              <a:srgbClr val="EDEBEA"/>
-            </a:solidFill>
-          </a:ln>
-        </p:spPr>
-        <p:style>
-          <a:lnRef idx="2">
-            <a:schemeClr val="accent1"/>
-          </a:lnRef>
-          <a:fillRef idx="0">
-            <a:schemeClr val="accent1"/>
-          </a:fillRef>
-          <a:effectRef idx="1">
-            <a:schemeClr val="accent1"/>
-          </a:effectRef>
-          <a:fontRef idx="minor">
-            <a:schemeClr val="tx1"/>
-          </a:fontRef>
-        </p:style>
-      </p:cxnSp>
-      <p:sp>
-        <p:nvSpPr>
-          <p:cNvPr id="8" name="TextBox 7"/>
-          <p:cNvSpPr txBox="1"/>
-          <p:nvPr/>
-        </p:nvSpPr>
-        <p:spPr>
-          <a:xfrm>
-            <a:off x="914400" y="3675887"/>
-            <a:ext cx="2834640" cy="658368"/>
-          </a:xfrm>
-          <a:prstGeom prst="rect">
-            <a:avLst/>
-          </a:prstGeom>
-          <a:noFill/>
-        </p:spPr>
-        <p:txBody>
-          <a:bodyPr wrap="square" lIns="0" rIns="0" tIns="0" bIns="0" anchor="t">
-            <a:spAutoFit/>
-          </a:bodyPr>
-          <a:lstStyle/>
-          <a:p>
-            <a:pPr algn="l">
-              <a:lnSpc>
-                <a:spcPct val="130000"/>
-              </a:lnSpc>
-            </a:pPr>
-            <a:r>
-              <a:rPr sz="1300" b="1">
-                <a:solidFill>
-                  <a:srgbClr val="111111"/>
-                </a:solidFill>
-                <a:latin typeface="Poppins"/>
-              </a:rPr>
-              <a:t>The taproom</a:t>
-            </a:r>
-          </a:p>
-        </p:txBody>
-      </p:sp>
-      <p:sp>
-        <p:nvSpPr>
-          <p:cNvPr id="9" name="TextBox 8"/>
-          <p:cNvSpPr txBox="1"/>
-          <p:nvPr/>
-        </p:nvSpPr>
-        <p:spPr>
-          <a:xfrm>
-            <a:off x="4023360" y="3675887"/>
-            <a:ext cx="7223760" cy="658368"/>
-          </a:xfrm>
-          <a:prstGeom prst="rect">
-            <a:avLst/>
-          </a:prstGeom>
-          <a:noFill/>
-        </p:spPr>
-        <p:txBody>
-          <a:bodyPr wrap="square" lIns="0" rIns="0" tIns="0" bIns="0" anchor="t">
-            <a:spAutoFit/>
-          </a:bodyPr>
-          <a:lstStyle/>
-          <a:p>
-            <a:pPr algn="l">
-              <a:lnSpc>
-                <a:spcPct val="138000"/>
-              </a:lnSpc>
-            </a:pPr>
-            <a:r>
-              <a:rPr sz="1300" b="0">
-                <a:solidFill>
-                  <a:srgbClr val="666666"/>
-                </a:solidFill>
-                <a:latin typeface="Poppins"/>
-              </a:rPr>
-              <a:t>We treated it as a funnel when it is also a cost.</a:t>
-            </a:r>
-          </a:p>
-        </p:txBody>
-      </p:sp>
-      <p:cxnSp>
-        <p:nvCxnSpPr>
-          <p:cNvPr id="10" name="Connector 9"/>
-          <p:cNvCxnSpPr/>
-          <p:nvPr/>
-        </p:nvCxnSpPr>
-        <p:spPr>
-          <a:xfrm>
-            <a:off x="914400" y="4261104"/>
-            <a:ext cx="10332720" cy="0"/>
-          </a:xfrm>
-          <a:prstGeom prst="line">
-            <a:avLst/>
-          </a:prstGeom>
-          <a:ln w="9525">
-            <a:solidFill>
-              <a:srgbClr val="EDEBEA"/>
-            </a:solidFill>
-          </a:ln>
-        </p:spPr>
-        <p:style>
-          <a:lnRef idx="2">
-            <a:schemeClr val="accent1"/>
-          </a:lnRef>
-          <a:fillRef idx="0">
-            <a:schemeClr val="accent1"/>
-          </a:fillRef>
-          <a:effectRef idx="1">
-            <a:schemeClr val="accent1"/>
-          </a:effectRef>
-          <a:fontRef idx="minor">
-            <a:schemeClr val="tx1"/>
-          </a:fontRef>
-        </p:style>
-      </p:cxnSp>
-      <p:sp>
-        <p:nvSpPr>
-          <p:cNvPr id="11" name="TextBox 10"/>
-          <p:cNvSpPr txBox="1"/>
-          <p:nvPr/>
-        </p:nvSpPr>
-        <p:spPr>
-          <a:xfrm>
-            <a:off x="914400" y="4389120"/>
-            <a:ext cx="2834640" cy="658368"/>
-          </a:xfrm>
-          <a:prstGeom prst="rect">
-            <a:avLst/>
-          </a:prstGeom>
-          <a:noFill/>
-        </p:spPr>
-        <p:txBody>
-          <a:bodyPr wrap="square" lIns="0" rIns="0" tIns="0" bIns="0" anchor="t">
-            <a:spAutoFit/>
-          </a:bodyPr>
-          <a:lstStyle/>
-          <a:p>
-            <a:pPr algn="l">
-              <a:lnSpc>
-                <a:spcPct val="130000"/>
-              </a:lnSpc>
-            </a:pPr>
-            <a:r>
-              <a:rPr sz="1300" b="1">
-                <a:solidFill>
-                  <a:srgbClr val="111111"/>
-                </a:solidFill>
-                <a:latin typeface="Poppins"/>
-              </a:rPr>
-              <a:t>A number we used</a:t>
-            </a:r>
-          </a:p>
-        </p:txBody>
-      </p:sp>
-      <p:sp>
-        <p:nvSpPr>
-          <p:cNvPr id="12" name="TextBox 11"/>
-          <p:cNvSpPr txBox="1"/>
-          <p:nvPr/>
-        </p:nvSpPr>
-        <p:spPr>
-          <a:xfrm>
-            <a:off x="4023360" y="4389120"/>
-            <a:ext cx="7223760" cy="658368"/>
-          </a:xfrm>
-          <a:prstGeom prst="rect">
-            <a:avLst/>
-          </a:prstGeom>
-          <a:noFill/>
-        </p:spPr>
-        <p:txBody>
-          <a:bodyPr wrap="square" lIns="0" rIns="0" tIns="0" bIns="0" anchor="t">
-            <a:spAutoFit/>
-          </a:bodyPr>
-          <a:lstStyle/>
-          <a:p>
-            <a:pPr algn="l">
-              <a:lnSpc>
-                <a:spcPct val="138000"/>
-              </a:lnSpc>
-            </a:pPr>
-            <a:r>
-              <a:rPr sz="1300" b="0">
-                <a:solidFill>
-                  <a:srgbClr val="666666"/>
-                </a:solidFill>
-                <a:latin typeface="Poppins"/>
-              </a:rPr>
-              <a:t>The 20 to 30 per cent taproom conversion has never been measured.</a:t>
-            </a:r>
-          </a:p>
-        </p:txBody>
-      </p:sp>
-      <p:cxnSp>
-        <p:nvCxnSpPr>
-          <p:cNvPr id="13" name="Connector 12"/>
-          <p:cNvCxnSpPr/>
-          <p:nvPr/>
-        </p:nvCxnSpPr>
-        <p:spPr>
-          <a:xfrm>
-            <a:off x="914400" y="4974336"/>
-            <a:ext cx="10332720" cy="0"/>
-          </a:xfrm>
-          <a:prstGeom prst="line">
-            <a:avLst/>
-          </a:prstGeom>
-          <a:ln w="9525">
-            <a:solidFill>
-              <a:srgbClr val="EDEBEA"/>
-            </a:solidFill>
-          </a:ln>
-        </p:spPr>
-        <p:style>
-          <a:lnRef idx="2">
-            <a:schemeClr val="accent1"/>
-          </a:lnRef>
-          <a:fillRef idx="0">
-            <a:schemeClr val="accent1"/>
-          </a:fillRef>
-          <a:effectRef idx="1">
-            <a:schemeClr val="accent1"/>
-          </a:effectRef>
-          <a:fontRef idx="minor">
-            <a:schemeClr val="tx1"/>
-          </a:fontRef>
-        </p:style>
-      </p:cxnSp>
-      <p:sp>
-        <p:nvSpPr>
-          <p:cNvPr id="14" name="TextBox 13"/>
-          <p:cNvSpPr txBox="1"/>
-          <p:nvPr/>
-        </p:nvSpPr>
-        <p:spPr>
-          <a:xfrm>
-            <a:off x="914400" y="5102352"/>
-            <a:ext cx="2834640" cy="658368"/>
-          </a:xfrm>
-          <a:prstGeom prst="rect">
-            <a:avLst/>
-          </a:prstGeom>
-          <a:noFill/>
-        </p:spPr>
-        <p:txBody>
-          <a:bodyPr wrap="square" lIns="0" rIns="0" tIns="0" bIns="0" anchor="t">
-            <a:spAutoFit/>
-          </a:bodyPr>
-          <a:lstStyle/>
-          <a:p>
-            <a:pPr algn="l">
-              <a:lnSpc>
-                <a:spcPct val="130000"/>
-              </a:lnSpc>
-            </a:pPr>
-            <a:r>
-              <a:rPr sz="1300" b="1">
-                <a:solidFill>
-                  <a:srgbClr val="111111"/>
-                </a:solidFill>
-                <a:latin typeface="Poppins"/>
-              </a:rPr>
-              <a:t>The census</a:t>
-            </a:r>
-          </a:p>
-        </p:txBody>
-      </p:sp>
-      <p:sp>
-        <p:nvSpPr>
-          <p:cNvPr id="15" name="TextBox 14"/>
-          <p:cNvSpPr txBox="1"/>
-          <p:nvPr/>
-        </p:nvSpPr>
-        <p:spPr>
-          <a:xfrm>
-            <a:off x="4023360" y="5102352"/>
-            <a:ext cx="7223760" cy="658368"/>
-          </a:xfrm>
-          <a:prstGeom prst="rect">
-            <a:avLst/>
-          </a:prstGeom>
-          <a:noFill/>
-        </p:spPr>
-        <p:txBody>
-          <a:bodyPr wrap="square" lIns="0" rIns="0" tIns="0" bIns="0" anchor="t">
-            <a:spAutoFit/>
-          </a:bodyPr>
-          <a:lstStyle/>
-          <a:p>
-            <a:pPr algn="l">
-              <a:lnSpc>
-                <a:spcPct val="138000"/>
-              </a:lnSpc>
-            </a:pPr>
-            <a:r>
-              <a:rPr sz="1300" b="0">
-                <a:solidFill>
-                  <a:srgbClr val="666666"/>
-                </a:solidFill>
-                <a:latin typeface="Poppins"/>
-              </a:rPr>
-              <a:t>Forty nine self selected people cannot carry a strategy on their own.</a:t>
-            </a:r>
-          </a:p>
-        </p:txBody>
-      </p:sp>
-      <p:cxnSp>
-        <p:nvCxnSpPr>
-          <p:cNvPr id="16" name="Connector 15"/>
-          <p:cNvCxnSpPr/>
-          <p:nvPr/>
-        </p:nvCxnSpPr>
-        <p:spPr>
-          <a:xfrm>
-            <a:off x="914400" y="5687568"/>
-            <a:ext cx="10332720" cy="0"/>
-          </a:xfrm>
-          <a:prstGeom prst="line">
-            <a:avLst/>
-          </a:prstGeom>
-          <a:ln w="9525">
-            <a:solidFill>
-              <a:srgbClr val="EDEBEA"/>
-            </a:solidFill>
-          </a:ln>
-        </p:spPr>
-        <p:style>
-          <a:lnRef idx="2">
-            <a:schemeClr val="accent1"/>
-          </a:lnRef>
-          <a:fillRef idx="0">
-            <a:schemeClr val="accent1"/>
-          </a:fillRef>
-          <a:effectRef idx="1">
-            <a:schemeClr val="accent1"/>
-          </a:effectRef>
-          <a:fontRef idx="minor">
-            <a:schemeClr val="tx1"/>
-          </a:fontRef>
-        </p:style>
-      </p:cxnSp>
-      <p:sp>
-        <p:nvSpPr>
-          <p:cNvPr id="17" name="TextBox 16"/>
-          <p:cNvSpPr txBox="1"/>
-          <p:nvPr/>
-        </p:nvSpPr>
-        <p:spPr>
-          <a:xfrm>
-            <a:off x="914400" y="5815584"/>
-            <a:ext cx="2834640" cy="658368"/>
-          </a:xfrm>
-          <a:prstGeom prst="rect">
-            <a:avLst/>
-          </a:prstGeom>
-          <a:noFill/>
-        </p:spPr>
-        <p:txBody>
-          <a:bodyPr wrap="square" lIns="0" rIns="0" tIns="0" bIns="0" anchor="t">
-            <a:spAutoFit/>
-          </a:bodyPr>
-          <a:lstStyle/>
-          <a:p>
-            <a:pPr algn="l">
-              <a:lnSpc>
-                <a:spcPct val="130000"/>
-              </a:lnSpc>
-            </a:pPr>
-            <a:r>
-              <a:rPr sz="1300" b="1">
-                <a:solidFill>
-                  <a:srgbClr val="111111"/>
-                </a:solidFill>
-                <a:latin typeface="Poppins"/>
-              </a:rPr>
-              <a:t>Your marketing lead</a:t>
-            </a:r>
-          </a:p>
-        </p:txBody>
-      </p:sp>
-      <p:sp>
-        <p:nvSpPr>
-          <p:cNvPr id="18" name="TextBox 17"/>
-          <p:cNvSpPr txBox="1"/>
-          <p:nvPr/>
-        </p:nvSpPr>
-        <p:spPr>
-          <a:xfrm>
-            <a:off x="4023360" y="5815584"/>
-            <a:ext cx="7223760" cy="658368"/>
-          </a:xfrm>
-          <a:prstGeom prst="rect">
-            <a:avLst/>
-          </a:prstGeom>
-          <a:noFill/>
-        </p:spPr>
-        <p:txBody>
-          <a:bodyPr wrap="square" lIns="0" rIns="0" tIns="0" bIns="0" anchor="t">
-            <a:spAutoFit/>
-          </a:bodyPr>
-          <a:lstStyle/>
-          <a:p>
-            <a:pPr algn="l">
-              <a:lnSpc>
-                <a:spcPct val="138000"/>
-              </a:lnSpc>
-            </a:pPr>
-            <a:r>
-              <a:rPr sz="1300" b="0">
-                <a:solidFill>
-                  <a:srgbClr val="666666"/>
-                </a:solidFill>
-                <a:latin typeface="Poppins"/>
-              </a:rPr>
-              <a:t>We called Harry by the wrong name in a hundred and sixty places.</a:t>
-            </a:r>
-          </a:p>
-        </p:txBody>
-      </p:sp>
-      <p:cxnSp>
-        <p:nvCxnSpPr>
-          <p:cNvPr id="19" name="Connector 18"/>
-          <p:cNvCxnSpPr/>
-          <p:nvPr/>
-        </p:nvCxnSpPr>
-        <p:spPr>
-          <a:xfrm>
-            <a:off x="914400" y="6400800"/>
-            <a:ext cx="10332720" cy="0"/>
-          </a:xfrm>
-          <a:prstGeom prst="line">
-            <a:avLst/>
-          </a:prstGeom>
-          <a:ln w="9525">
-            <a:solidFill>
-              <a:srgbClr val="EDEBEA"/>
-            </a:solidFill>
-          </a:ln>
-        </p:spPr>
-        <p:style>
-          <a:lnRef idx="2">
-            <a:schemeClr val="accent1"/>
-          </a:lnRef>
-          <a:fillRef idx="0">
-            <a:schemeClr val="accent1"/>
-          </a:fillRef>
-          <a:effectRef idx="1">
-            <a:schemeClr val="accent1"/>
-          </a:effectRef>
-          <a:fontRef idx="minor">
-            <a:schemeClr val="tx1"/>
-          </a:fontRef>
-        </p:style>
-      </p:cxnSp>
+            <a:off x="914400" y="2103120"/>
+            <a:ext cx="10332720" cy="2743200"/>
+          </a:xfrm>
+          <a:prstGeom prst="rect">
+            <a:avLst/>
+          </a:prstGeom>
+          <a:noFill/>
+        </p:spPr>
+        <p:txBody>
+          <a:bodyPr wrap="square" lIns="0" rIns="0" tIns="0" bIns="0" anchor="ctr">
+            <a:spAutoFit/>
+          </a:bodyPr>
+          <a:lstStyle/>
+          <a:p>
+            <a:pPr algn="l">
+              <a:lnSpc>
+                <a:spcPct val="100000"/>
+              </a:lnSpc>
+            </a:pPr>
+            <a:r>
+              <a:rPr sz="9600" b="0">
+                <a:solidFill>
+                  <a:srgbClr val="FAF8F4"/>
+                </a:solidFill>
+                <a:latin typeface="Poppins"/>
+              </a:rPr>
+              <a:t>What to do</a:t>
+            </a:r>
+          </a:p>
+        </p:txBody>
+      </p:sp>
+      <p:sp>
+        <p:nvSpPr>
+          <p:cNvPr id="4" name="TextBox 3"/>
+          <p:cNvSpPr txBox="1"/>
+          <p:nvPr/>
+        </p:nvSpPr>
+        <p:spPr>
+          <a:xfrm>
+            <a:off x="914400" y="5394960"/>
+            <a:ext cx="10332720" cy="548640"/>
+          </a:xfrm>
+          <a:prstGeom prst="rect">
+            <a:avLst/>
+          </a:prstGeom>
+          <a:noFill/>
+        </p:spPr>
+        <p:txBody>
+          <a:bodyPr wrap="square" lIns="0" rIns="0" tIns="0" bIns="0" anchor="t">
+            <a:spAutoFit/>
+          </a:bodyPr>
+          <a:lstStyle/>
+          <a:p>
+            <a:pPr algn="l">
+              <a:lnSpc>
+                <a:spcPct val="150000"/>
+              </a:lnSpc>
+            </a:pPr>
+            <a:r>
+              <a:rPr sz="1600" b="0">
+                <a:solidFill>
+                  <a:srgbClr val="FAF8F4"/>
+                </a:solidFill>
+                <a:latin typeface="Poppins"/>
+              </a:rPr>
+              <a:t>Three moves, ranked. And one we have ranked below them.</a:t>
+            </a:r>
+          </a:p>
+        </p:txBody>
+      </p:sp>
     </p:spTree>
   </p:cSld>
   <p:clrMapOvr>
@@ -8218,7 +7536,7 @@
     <p:bg>
       <p:bgPr>
         <a:solidFill>
-          <a:srgbClr val="111111"/>
+          <a:srgbClr val="FAF8F4"/>
         </a:solidFill>
         <a:effectLst/>
       </p:bgPr>
@@ -8258,13 +7576,13 @@
               </a:lnSpc>
             </a:pPr>
             <a:r>
-              <a:rPr sz="1200" b="0" spc="200">
-                <a:solidFill>
-                  <a:srgbClr val="FAF8F4"/>
-                </a:solidFill>
-                <a:latin typeface="Poppins"/>
-              </a:rPr>
-              <a:t>PART 02</a:t>
+              <a:rPr sz="900" b="0" spc="200">
+                <a:solidFill>
+                  <a:srgbClr val="111111"/>
+                </a:solidFill>
+                <a:latin typeface="Poppins"/>
+              </a:rPr>
+              <a:t>MOVE 01</a:t>
             </a:r>
           </a:p>
         </p:txBody>
@@ -8277,33 +7595,49 @@
         </p:nvSpPr>
         <p:spPr>
           <a:xfrm>
-            <a:off x="914400" y="2103120"/>
-            <a:ext cx="10332720" cy="2743200"/>
-          </a:xfrm>
-          <a:prstGeom prst="rect">
-            <a:avLst/>
-          </a:prstGeom>
-          <a:noFill/>
-        </p:spPr>
-        <p:txBody>
-          <a:bodyPr wrap="square" lIns="0" rIns="0" tIns="0" bIns="0" anchor="ctr">
-            <a:spAutoFit/>
-          </a:bodyPr>
-          <a:lstStyle/>
-          <a:p>
-            <a:pPr algn="l">
-              <a:lnSpc>
-                <a:spcPct val="100000"/>
-              </a:lnSpc>
-            </a:pPr>
-            <a:r>
-              <a:rPr sz="9600" b="0">
-                <a:solidFill>
-                  <a:srgbClr val="FAF8F4"/>
-                </a:solidFill>
-                <a:latin typeface="Poppins"/>
-              </a:rPr>
-              <a:t>What to do</a:t>
+            <a:off x="914400" y="1737360"/>
+            <a:ext cx="10332720" cy="2103120"/>
+          </a:xfrm>
+          <a:prstGeom prst="rect">
+            <a:avLst/>
+          </a:prstGeom>
+          <a:noFill/>
+        </p:spPr>
+        <p:txBody>
+          <a:bodyPr wrap="square" lIns="0" rIns="0" tIns="0" bIns="0" anchor="t">
+            <a:spAutoFit/>
+          </a:bodyPr>
+          <a:lstStyle/>
+          <a:p>
+            <a:pPr algn="l">
+              <a:lnSpc>
+                <a:spcPct val="112000"/>
+              </a:lnSpc>
+            </a:pPr>
+            <a:r>
+              <a:rPr sz="3800" b="0">
+                <a:solidFill>
+                  <a:srgbClr val="111111"/>
+                </a:solidFill>
+                <a:latin typeface="Poppins"/>
+              </a:rPr>
+              <a:t>Buy the databases of people who</a:t>
+            </a:r>
+          </a:p>
+          <a:p>
+            <a:pPr algn="l">
+              <a:lnSpc>
+                <a:spcPct val="112000"/>
+              </a:lnSpc>
+            </a:pPr>
+            <a:r>
+              <a:rPr sz="3800" b="0">
+                <a:solidFill>
+                  <a:srgbClr val="111111"/>
+                </a:solidFill>
+                <a:latin typeface="Poppins"/>
+              </a:rPr>
+              <a:t>already own a system.</a:t>
             </a:r>
           </a:p>
         </p:txBody>
@@ -8316,33 +7650,33 @@
         </p:nvSpPr>
         <p:spPr>
           <a:xfrm>
-            <a:off x="914400" y="5394960"/>
-            <a:ext cx="10332720" cy="548640"/>
-          </a:xfrm>
-          <a:prstGeom prst="rect">
-            <a:avLst/>
-          </a:prstGeom>
-          <a:noFill/>
-        </p:spPr>
-        <p:txBody>
-          <a:bodyPr wrap="square" lIns="0" rIns="0" tIns="0" bIns="0" anchor="t">
-            <a:spAutoFit/>
-          </a:bodyPr>
-          <a:lstStyle/>
-          <a:p>
-            <a:pPr algn="l">
-              <a:lnSpc>
-                <a:spcPct val="150000"/>
-              </a:lnSpc>
-            </a:pPr>
-            <a:r>
-              <a:rPr sz="1600" b="0">
-                <a:solidFill>
-                  <a:srgbClr val="FAF8F4"/>
-                </a:solidFill>
-                <a:latin typeface="Poppins"/>
-              </a:rPr>
-              <a:t>Three moves, ranked. And one we have ranked below them.</a:t>
+            <a:off x="914400" y="4114800"/>
+            <a:ext cx="9144000" cy="2194560"/>
+          </a:xfrm>
+          <a:prstGeom prst="rect">
+            <a:avLst/>
+          </a:prstGeom>
+          <a:noFill/>
+        </p:spPr>
+        <p:txBody>
+          <a:bodyPr wrap="square" lIns="0" rIns="0" tIns="0" bIns="0" anchor="t">
+            <a:spAutoFit/>
+          </a:bodyPr>
+          <a:lstStyle/>
+          <a:p>
+            <a:pPr algn="l">
+              <a:lnSpc>
+                <a:spcPct val="155000"/>
+              </a:lnSpc>
+            </a:pPr>
+            <a:r>
+              <a:rPr sz="1400" b="0">
+                <a:solidFill>
+                  <a:srgbClr val="111111"/>
+                </a:solidFill>
+                <a:latin typeface="Poppins"/>
+              </a:rPr>
+              <a:t>Harvey Norman lists six kegerator models plus a tap unit. Keg Land, Kegmaster and BenchTop hold buyer lists of their own. Every name on those lists owns hardware, so the price of the system, the most expensive objection your marketing fights, is already cleared. At about seventy dollars gross a keg, the data pays for itself quickly.</a:t>
             </a:r>
           </a:p>
         </p:txBody>
@@ -8407,7 +7741,7 @@
                 </a:solidFill>
                 <a:latin typeface="Poppins"/>
               </a:rPr>
-              <a:t>MOVE 01</a:t>
+              <a:t>MOVE 02</a:t>
             </a:r>
           </a:p>
         </p:txBody>
@@ -8446,7 +7780,7 @@
                 </a:solidFill>
                 <a:latin typeface="Poppins"/>
               </a:rPr>
-              <a:t>Buy the databases of people who</a:t>
+              <a:t>Do a deal with Harvey Norman</a:t>
             </a:r>
           </a:p>
           <a:p>
@@ -8462,7 +7796,7 @@
                 </a:solidFill>
                 <a:latin typeface="Poppins"/>
               </a:rPr>
-              <a:t>already own a system.</a:t>
+              <a:t>directly.</a:t>
             </a:r>
           </a:p>
         </p:txBody>
@@ -8501,7 +7835,7 @@
                 </a:solidFill>
                 <a:latin typeface="Poppins"/>
               </a:rPr>
-              <a:t>Harvey Norman lists six kegerator models plus a tap unit. Keg Land, Kegmaster and BenchTop hold buyer lists of their own. Every name on those lists owns hardware, so the price of the system, the most expensive objection your marketing fights, is already cleared. At about seventy dollars gross a keg, the data pays for itself quickly.</a:t>
+              <a:t>A QR code at the point of sale. A referral rebate on each keg. Or a free keg with purchase if the liquor rules allow it. Monk is one of their closest allies and holds point contacts. This is a conversation, not a campaign, and it is worth having before any budget moves.</a:t>
             </a:r>
           </a:p>
         </p:txBody>
@@ -8566,7 +7900,7 @@
                 </a:solidFill>
                 <a:latin typeface="Poppins"/>
               </a:rPr>
-              <a:t>MOVE 02</a:t>
+              <a:t>MOVE 03</a:t>
             </a:r>
           </a:p>
         </p:txBody>
@@ -8605,7 +7939,7 @@
                 </a:solidFill>
                 <a:latin typeface="Poppins"/>
               </a:rPr>
-              <a:t>Do a deal with Harvey Norman</a:t>
+              <a:t>Go at the tour operators, and run</a:t>
             </a:r>
           </a:p>
           <a:p>
@@ -8621,7 +7955,7 @@
                 </a:solidFill>
                 <a:latin typeface="Poppins"/>
               </a:rPr>
-              <a:t>directly.</a:t>
+              <a:t>wholesale properly.</a:t>
             </a:r>
           </a:p>
         </p:txBody>
@@ -8660,7 +7994,7 @@
                 </a:solidFill>
                 <a:latin typeface="Poppins"/>
               </a:rPr>
-              <a:t>A QR code at the point of sale. A referral rebate on each keg. Or a free keg with purchase if the liquor rules allow it. Monk is one of their closest allies and holds point contacts. This is a conversation, not a campaign, and it is worth having before any budget moves.</a:t>
+              <a:t>Hop On, Urban Legends and Pineapple Tours all let the customer choose which breweries to visit. So your write up decides whether you get picked, and yours does not mention Midnight in Tokyo while Balter gets the imagery. On wholesale, one commercial account is worth about ten households, and it currently has no structure, no targets and nobody carrying it.</a:t>
             </a:r>
           </a:p>
         </p:txBody>
